--- a/presentation_puls_events_FR.pptx
+++ b/presentation_puls_events_FR.pptx
@@ -13,16 +13,16 @@
     <p:sldId id="257" r:id="rId4"/>
     <p:sldId id="258" r:id="rId5"/>
     <p:sldId id="259" r:id="rId6"/>
-    <p:sldId id="260" r:id="rId16"/>
-    <p:sldId id="270" r:id="rId7"/>
-    <p:sldId id="261" r:id="rId8"/>
-    <p:sldId id="262" r:id="rId9"/>
-    <p:sldId id="263" r:id="rId10"/>
-    <p:sldId id="264" r:id="rId11"/>
-    <p:sldId id="265" r:id="rId12"/>
-    <p:sldId id="266" r:id="rId13"/>
-    <p:sldId id="267" r:id="rId14"/>
-    <p:sldId id="268" r:id="rId15"/>
+    <p:sldId id="260" r:id="rId7"/>
+    <p:sldId id="271" r:id="rId8"/>
+    <p:sldId id="261" r:id="rId9"/>
+    <p:sldId id="262" r:id="rId10"/>
+    <p:sldId id="263" r:id="rId11"/>
+    <p:sldId id="264" r:id="rId12"/>
+    <p:sldId id="265" r:id="rId13"/>
+    <p:sldId id="266" r:id="rId14"/>
+    <p:sldId id="267" r:id="rId15"/>
+    <p:sldId id="268" r:id="rId16"/>
   </p:sldIdLst>
   <p:sldSz cx="9144000" cy="5143500" type="screen16x9"/>
   <p:notesSz cx="5143500" cy="9144000"/>
@@ -384,7 +384,7 @@
           <a:p>
             <a:r>
               <a:rPr lang="en-US" dirty="0"/>
-              <a:t>Insister sur le fait que le chemin vers la production est bien defini. Pas de refonte architecturale : uniquement de l'infrastructure.</a:t>
+              <a:t>30 questions couvrant tous les cas realistes. Les metriques RAGAS mesurent objectivement la qualite. Mentionner la limitation de debit sur le niveau gratuit Mistral.</a:t>
             </a:r>
           </a:p>
         </p:txBody>
@@ -471,7 +471,7 @@
           <a:p>
             <a:r>
               <a:rPr lang="en-US" dirty="0"/>
-              <a:t>Slide de conclusion. Revenir sur les cinq points valides. Terminer avec la recommandation claire de passer en production.</a:t>
+              <a:t>Insister sur le fait que le chemin vers la production est bien defini. Pas de refonte architecturale : uniquement de l'infrastructure.</a:t>
             </a:r>
           </a:p>
         </p:txBody>
@@ -558,7 +558,7 @@
           <a:p>
             <a:r>
               <a:rPr lang="en-US" dirty="0"/>
-              <a:t>Questions anticipees de Jeremy : Comment FAISS optimise la recherche ? Limites de FAISS a grande echelle ? Pourquoi LangChain ? Qualite des donnees dans un pipeline automatise ? Detection des derives de performance ?</a:t>
+              <a:t>Slide de conclusion. Revenir sur les cinq points valides. Terminer avec la recommandation claire de passer en production.</a:t>
             </a:r>
           </a:p>
         </p:txBody>
@@ -645,7 +645,7 @@
           <a:p>
             <a:r>
               <a:rPr lang="en-US" dirty="0"/>
-              <a:t>Justifier chaque choix. Pour FAISS : IndexFlatL2 est exact et suffisant a cette echelle. Pour le chunking : les descriptions sont trop courtes pour etre decoupees.</a:t>
+              <a:t>Questions anticipees de Jeremy : Comment FAISS optimise la recherche ? Limites de FAISS a grande echelle ? Pourquoi LangChain ? Qualite des donnees dans un pipeline automatise ? Detection des derives de performance ?</a:t>
             </a:r>
           </a:p>
         </p:txBody>
@@ -676,7 +676,7 @@
     </p:spTree>
     <p:extLst>
       <p:ext uri="{BB962C8B-B14F-4D97-AF65-F5344CB8AC3E}">
-        <p14:creationId xmlns:p14="http://schemas.microsoft.com/office/powerpoint/2010/main" val="700583620"/>
+        <p14:creationId xmlns:p14="http://schemas.microsoft.com/office/powerpoint/2010/main" val="1024086991"/>
       </p:ext>
     </p:extLst>
   </p:cSld>
@@ -993,7 +993,7 @@
           <a:p>
             <a:r>
               <a:rPr lang="en-US" dirty="0"/>
-              <a:t>Insister sur le pattern self-contained : chaque script bash ecrit le fichier Python ET l'execute. Souligner la logique de skip : si l'artefact existe deja, l'etape est ignoree.</a:t>
+              <a:t>Justifier chaque choix. Pour FAISS : IndexFlatL2 est exact et suffisant a cette echelle. Pour le chunking : les descriptions sont trop courtes pour etre decoupees.</a:t>
             </a:r>
           </a:p>
         </p:txBody>
@@ -1015,7 +1015,7 @@
           <a:p>
             <a:fld id="{F7021451-1387-4CA6-816F-3879F97B5CBC}" type="slidenum">
               <a:rPr lang="en-US"/>
-              <a:t>7</a:t>
+              <a:t>6</a:t>
             </a:fld>
             <a:endParaRPr lang="en-US"/>
           </a:p>
@@ -1024,7 +1024,7 @@
     </p:spTree>
     <p:extLst>
       <p:ext uri="{BB962C8B-B14F-4D97-AF65-F5344CB8AC3E}">
-        <p14:creationId xmlns:p14="http://schemas.microsoft.com/office/powerpoint/2010/main" val="1024086991"/>
+        <p14:creationId xmlns:p14="http://schemas.microsoft.com/office/powerpoint/2010/main" val="700583620"/>
       </p:ext>
     </p:extLst>
   </p:cSld>
@@ -1080,7 +1080,7 @@
           <a:p>
             <a:r>
               <a:rPr lang="en-US" dirty="0"/>
-              <a:t>Les distances L2 valident que la recherche semantique fonctionne. Insister sur le cas 4 : requete hors perimetre correctement refusee sans hallucination.</a:t>
+              <a:t>Insister sur le pattern self-contained : chaque script bash ecrit le fichier Python ET l'execute. Souligner la logique de skip : si l'artefact existe deja, l'etape est ignoree.</a:t>
             </a:r>
           </a:p>
         </p:txBody>
@@ -1167,7 +1167,7 @@
           <a:p>
             <a:r>
               <a:rPr lang="en-US" dirty="0"/>
-              <a:t>DEMO LIVE. Lancer : bash pipeline.sh --skip-run puis bash 04_run.sh. Ouvrir localhost:8501. Tester : 1) concert classique 2) restaurant (hors perimetre) 3) que faire ce weekend.</a:t>
+              <a:t>Les distances L2 valident que la recherche semantique fonctionne. Insister sur le cas 4 : requete hors perimetre correctement refusee sans hallucination.</a:t>
             </a:r>
           </a:p>
         </p:txBody>
@@ -1254,7 +1254,7 @@
           <a:p>
             <a:r>
               <a:rPr lang="en-US" dirty="0"/>
-              <a:t>Souligner la decouverte du bug de parsing des dates (millisecondes vs ISO). Ce bug aurait silencieusement corrompu le filtre en production. Les tests l'ont detecte.</a:t>
+              <a:t>DEMO LIVE. Lancer : bash pipeline.sh --skip-run puis bash 04_run.sh. Ouvrir localhost:8501. Tester : 1) concert classique 2) restaurant (hors perimetre) 3) que faire ce weekend.</a:t>
             </a:r>
           </a:p>
         </p:txBody>
@@ -1341,7 +1341,7 @@
           <a:p>
             <a:r>
               <a:rPr lang="en-US" dirty="0"/>
-              <a:t>30 questions couvrant tous les cas realistes. Les metriques RAGAS mesurent objectivement la qualite. Mentionner la limitation de debit sur le niveau gratuit Mistral.</a:t>
+              <a:t>Souligner la decouverte du bug de parsing des dates (millisecondes vs ISO). Ce bug aurait silencieusement corrompu le filtre en production. Les tests l'ont detecte.</a:t>
             </a:r>
           </a:p>
         </p:txBody>
@@ -2048,7 +2048,7 @@
                   <a:srgbClr val="CADCFC"/>
                 </a:solidFill>
               </a:rPr>
-              <a:t>Hope Donglo  |  Ingenieur de donnees freelance</a:t>
+              <a:t>Hope Donglo  |  OpenClassrooms Projet 11</a:t>
             </a:r>
             <a:endParaRPr lang="en-US" sz="1200" dirty="0"/>
           </a:p>
@@ -2062,7 +2062,7 @@
                   <a:srgbClr val="CADCFC"/>
                 </a:solidFill>
               </a:rPr>
-              <a:t>Mars 2026  |  Paris, Ile-de-France</a:t>
+              <a:t>Juillet 2026  |  Paris, Ile-de-France</a:t>
             </a:r>
             <a:endParaRPr lang="en-US" sz="1200" dirty="0"/>
           </a:p>
@@ -2077,6 +2077,602 @@
 </file>
 
 <file path=ppt/slides/slide10.xml><?xml version="1.0" encoding="utf-8"?>
+<p:sld xmlns:a="http://schemas.openxmlformats.org/drawingml/2006/main" xmlns:r="http://schemas.openxmlformats.org/officeDocument/2006/relationships" xmlns:p="http://schemas.openxmlformats.org/presentationml/2006/main">
+  <p:cSld name="Slide 8">
+    <p:bg>
+      <p:bgPr>
+        <a:solidFill>
+          <a:srgbClr val="1F4E79"/>
+        </a:solidFill>
+        <a:effectLst/>
+      </p:bgPr>
+    </p:bg>
+    <p:spTree>
+      <p:nvGrpSpPr>
+        <p:cNvPr id="1" name=""/>
+        <p:cNvGrpSpPr/>
+        <p:nvPr/>
+      </p:nvGrpSpPr>
+      <p:grpSpPr>
+        <a:xfrm>
+          <a:off x="0" y="0"/>
+          <a:ext cx="0" cy="0"/>
+          <a:chOff x="0" y="0"/>
+          <a:chExt cx="0" cy="0"/>
+        </a:xfrm>
+      </p:grpSpPr>
+      <p:sp>
+        <p:nvSpPr>
+          <p:cNvPr id="2" name="Shape 0"/>
+          <p:cNvSpPr/>
+          <p:nvPr/>
+        </p:nvSpPr>
+        <p:spPr>
+          <a:xfrm>
+            <a:off x="0" y="0"/>
+            <a:ext cx="9144000" cy="5143500"/>
+          </a:xfrm>
+          <a:prstGeom prst="rect">
+            <a:avLst/>
+          </a:prstGeom>
+          <a:solidFill>
+            <a:srgbClr val="1F4E79"/>
+          </a:solidFill>
+          <a:ln/>
+        </p:spPr>
+      </p:sp>
+      <p:sp>
+        <p:nvSpPr>
+          <p:cNvPr id="3" name="Text 1"/>
+          <p:cNvSpPr/>
+          <p:nvPr/>
+        </p:nvSpPr>
+        <p:spPr>
+          <a:xfrm>
+            <a:off x="457200" y="457200"/>
+            <a:ext cx="8229600" cy="640080"/>
+          </a:xfrm>
+          <a:prstGeom prst="rect">
+            <a:avLst/>
+          </a:prstGeom>
+          <a:noFill/>
+          <a:ln/>
+        </p:spPr>
+        <p:txBody>
+          <a:bodyPr wrap="square" rtlCol="0" anchor="ctr"/>
+          <a:lstStyle/>
+          <a:p>
+            <a:pPr marL="0" indent="0" algn="ctr">
+              <a:buNone/>
+            </a:pPr>
+            <a:r>
+              <a:rPr lang="en-US" sz="1300" b="1" kern="0" spc="400" dirty="0">
+                <a:solidFill>
+                  <a:srgbClr val="F39C12"/>
+                </a:solidFill>
+              </a:rPr>
+              <a:t>DEMONSTRATION EN DIRECT</a:t>
+            </a:r>
+            <a:endParaRPr lang="en-US" sz="1300" dirty="0"/>
+          </a:p>
+        </p:txBody>
+      </p:sp>
+      <p:sp>
+        <p:nvSpPr>
+          <p:cNvPr id="4" name="Shape 2"/>
+          <p:cNvSpPr/>
+          <p:nvPr/>
+        </p:nvSpPr>
+        <p:spPr>
+          <a:xfrm>
+            <a:off x="2286000" y="1188720"/>
+            <a:ext cx="6583680" cy="3749040"/>
+          </a:xfrm>
+          <a:prstGeom prst="roundRect">
+            <a:avLst>
+              <a:gd name="adj" fmla="val 3659"/>
+            </a:avLst>
+          </a:prstGeom>
+          <a:solidFill>
+            <a:srgbClr val="FFFFFF"/>
+          </a:solidFill>
+          <a:ln/>
+          <a:effectLst>
+            <a:outerShdw blurRad="101600" dist="38100" dir="2700000" algn="bl" rotWithShape="0">
+              <a:srgbClr val="000000">
+                <a:alpha val="12000"/>
+              </a:srgbClr>
+            </a:outerShdw>
+          </a:effectLst>
+        </p:spPr>
+      </p:sp>
+      <p:sp>
+        <p:nvSpPr>
+          <p:cNvPr id="5" name="Shape 3"/>
+          <p:cNvSpPr/>
+          <p:nvPr/>
+        </p:nvSpPr>
+        <p:spPr>
+          <a:xfrm>
+            <a:off x="2286000" y="1188720"/>
+            <a:ext cx="6583680" cy="502920"/>
+          </a:xfrm>
+          <a:prstGeom prst="roundRect">
+            <a:avLst>
+              <a:gd name="adj" fmla="val 14545"/>
+            </a:avLst>
+          </a:prstGeom>
+          <a:solidFill>
+            <a:srgbClr val="2E75B6"/>
+          </a:solidFill>
+          <a:ln/>
+        </p:spPr>
+      </p:sp>
+      <p:sp>
+        <p:nvSpPr>
+          <p:cNvPr id="6" name="Text 4"/>
+          <p:cNvSpPr/>
+          <p:nvPr/>
+        </p:nvSpPr>
+        <p:spPr>
+          <a:xfrm>
+            <a:off x="2468880" y="1188720"/>
+            <a:ext cx="6400800" cy="502920"/>
+          </a:xfrm>
+          <a:prstGeom prst="rect">
+            <a:avLst/>
+          </a:prstGeom>
+          <a:noFill/>
+          <a:ln/>
+        </p:spPr>
+        <p:txBody>
+          <a:bodyPr wrap="square" rtlCol="0" anchor="ctr"/>
+          <a:lstStyle/>
+          <a:p>
+            <a:pPr marL="0" indent="0">
+              <a:buNone/>
+            </a:pPr>
+            <a:r>
+              <a:rPr lang="en-US" sz="1100" b="1" dirty="0">
+                <a:solidFill>
+                  <a:srgbClr val="FFFFFF"/>
+                </a:solidFill>
+              </a:rPr>
+              <a:t>Puls-Events  |  Assistant Culturel Paris</a:t>
+            </a:r>
+            <a:endParaRPr lang="en-US" sz="1100" dirty="0"/>
+          </a:p>
+        </p:txBody>
+      </p:sp>
+      <p:sp>
+        <p:nvSpPr>
+          <p:cNvPr id="7" name="Shape 5"/>
+          <p:cNvSpPr/>
+          <p:nvPr/>
+        </p:nvSpPr>
+        <p:spPr>
+          <a:xfrm>
+            <a:off x="5029200" y="1920240"/>
+            <a:ext cx="3566160" cy="502920"/>
+          </a:xfrm>
+          <a:prstGeom prst="roundRect">
+            <a:avLst>
+              <a:gd name="adj" fmla="val 18182"/>
+            </a:avLst>
+          </a:prstGeom>
+          <a:solidFill>
+            <a:srgbClr val="2E75B6"/>
+          </a:solidFill>
+          <a:ln/>
+        </p:spPr>
+      </p:sp>
+      <p:sp>
+        <p:nvSpPr>
+          <p:cNvPr id="8" name="Text 6"/>
+          <p:cNvSpPr/>
+          <p:nvPr/>
+        </p:nvSpPr>
+        <p:spPr>
+          <a:xfrm>
+            <a:off x="5120640" y="1920240"/>
+            <a:ext cx="3383280" cy="502920"/>
+          </a:xfrm>
+          <a:prstGeom prst="rect">
+            <a:avLst/>
+          </a:prstGeom>
+          <a:noFill/>
+          <a:ln/>
+        </p:spPr>
+        <p:txBody>
+          <a:bodyPr wrap="square" rtlCol="0" anchor="ctr"/>
+          <a:lstStyle/>
+          <a:p>
+            <a:pPr marL="0" indent="0">
+              <a:buNone/>
+            </a:pPr>
+            <a:r>
+              <a:rPr lang="en-US" sz="1000" dirty="0">
+                <a:solidFill>
+                  <a:srgbClr val="FFFFFF"/>
+                </a:solidFill>
+              </a:rPr>
+              <a:t>Quels concerts classiques ce mois ?</a:t>
+            </a:r>
+            <a:endParaRPr lang="en-US" sz="1000" dirty="0"/>
+          </a:p>
+        </p:txBody>
+      </p:sp>
+      <p:sp>
+        <p:nvSpPr>
+          <p:cNvPr id="11" name="Shape 9"/>
+          <p:cNvSpPr/>
+          <p:nvPr/>
+        </p:nvSpPr>
+        <p:spPr>
+          <a:xfrm>
+            <a:off x="274320" y="1188720"/>
+            <a:ext cx="1828800" cy="3749040"/>
+          </a:xfrm>
+          <a:prstGeom prst="roundRect">
+            <a:avLst>
+              <a:gd name="adj" fmla="val 5000"/>
+            </a:avLst>
+          </a:prstGeom>
+          <a:solidFill>
+            <a:srgbClr val="1A252F"/>
+          </a:solidFill>
+          <a:ln/>
+        </p:spPr>
+      </p:sp>
+      <p:sp>
+        <p:nvSpPr>
+          <p:cNvPr id="12" name="Text 10"/>
+          <p:cNvSpPr/>
+          <p:nvPr/>
+        </p:nvSpPr>
+        <p:spPr>
+          <a:xfrm>
+            <a:off x="365760" y="1280160"/>
+            <a:ext cx="1645920" cy="365760"/>
+          </a:xfrm>
+          <a:prstGeom prst="rect">
+            <a:avLst/>
+          </a:prstGeom>
+          <a:noFill/>
+          <a:ln/>
+        </p:spPr>
+        <p:txBody>
+          <a:bodyPr wrap="square" rtlCol="0" anchor="ctr"/>
+          <a:lstStyle/>
+          <a:p>
+            <a:pPr marL="0" indent="0" algn="ctr">
+              <a:buNone/>
+            </a:pPr>
+            <a:r>
+              <a:rPr lang="en-US" sz="1100" b="1" dirty="0">
+                <a:solidFill>
+                  <a:srgbClr val="F39C12"/>
+                </a:solidFill>
+              </a:rPr>
+              <a:t>Sources</a:t>
+            </a:r>
+            <a:endParaRPr lang="en-US" sz="1100" dirty="0"/>
+          </a:p>
+        </p:txBody>
+      </p:sp>
+      <p:sp>
+        <p:nvSpPr>
+          <p:cNvPr id="13" name="Text 11"/>
+          <p:cNvSpPr/>
+          <p:nvPr/>
+        </p:nvSpPr>
+        <p:spPr>
+          <a:xfrm>
+            <a:off x="365760" y="1691640"/>
+            <a:ext cx="1645920" cy="3108960"/>
+          </a:xfrm>
+          <a:prstGeom prst="rect">
+            <a:avLst/>
+          </a:prstGeom>
+          <a:noFill/>
+          <a:ln/>
+        </p:spPr>
+        <p:txBody>
+          <a:bodyPr wrap="square" rtlCol="0" anchor="ctr"/>
+          <a:lstStyle/>
+          <a:p>
+            <a:pPr marL="0" indent="0">
+              <a:buNone/>
+            </a:pPr>
+            <a:r>
+              <a:rPr lang="en-US" sz="900" dirty="0">
+                <a:solidFill>
+                  <a:srgbClr val="CADCFC"/>
+                </a:solidFill>
+              </a:rPr>
+              <a:t>1. Les 4 Saisons...</a:t>
+            </a:r>
+            <a:endParaRPr lang="en-US" sz="900" dirty="0"/>
+          </a:p>
+          <a:p>
+            <a:pPr marL="0" indent="0">
+              <a:buNone/>
+            </a:pPr>
+            <a:r>
+              <a:rPr lang="en-US" sz="900" dirty="0">
+                <a:solidFill>
+                  <a:srgbClr val="CADCFC"/>
+                </a:solidFill>
+              </a:rPr>
+              <a:t>11 mars, 20h00</a:t>
+            </a:r>
+            <a:endParaRPr lang="en-US" sz="900" dirty="0"/>
+          </a:p>
+          <a:p>
+            <a:pPr marL="0" indent="0">
+              <a:buNone/>
+            </a:pPr>
+            <a:r>
+              <a:rPr lang="en-US" sz="900" dirty="0">
+                <a:solidFill>
+                  <a:srgbClr val="CADCFC"/>
+                </a:solidFill>
+              </a:rPr>
+              <a:t>La Madeleine</a:t>
+            </a:r>
+            <a:endParaRPr lang="en-US" sz="900" dirty="0"/>
+          </a:p>
+          <a:p>
+            <a:pPr marL="0" indent="0">
+              <a:buNone/>
+            </a:pPr>
+            <a:r>
+              <a:rPr lang="en-US" sz="900" dirty="0">
+                <a:solidFill>
+                  <a:srgbClr val="CADCFC"/>
+                </a:solidFill>
+              </a:rPr>
+              <a:t> </a:t>
+            </a:r>
+            <a:endParaRPr lang="en-US" sz="900" dirty="0"/>
+          </a:p>
+          <a:p>
+            <a:pPr marL="0" indent="0">
+              <a:buNone/>
+            </a:pPr>
+            <a:r>
+              <a:rPr lang="en-US" sz="900" dirty="0">
+                <a:solidFill>
+                  <a:srgbClr val="CADCFC"/>
+                </a:solidFill>
+              </a:rPr>
+              <a:t>2. Concert Aria...</a:t>
+            </a:r>
+            <a:endParaRPr lang="en-US" sz="900" dirty="0"/>
+          </a:p>
+          <a:p>
+            <a:pPr marL="0" indent="0">
+              <a:buNone/>
+            </a:pPr>
+            <a:r>
+              <a:rPr lang="en-US" sz="900" dirty="0">
+                <a:solidFill>
+                  <a:srgbClr val="CADCFC"/>
+                </a:solidFill>
+              </a:rPr>
+              <a:t>14 mars, 16h00</a:t>
+            </a:r>
+            <a:endParaRPr lang="en-US" sz="900" dirty="0"/>
+          </a:p>
+          <a:p>
+            <a:pPr marL="0" indent="0">
+              <a:buNone/>
+            </a:pPr>
+            <a:r>
+              <a:rPr lang="en-US" sz="900" dirty="0">
+                <a:solidFill>
+                  <a:srgbClr val="CADCFC"/>
+                </a:solidFill>
+              </a:rPr>
+              <a:t>Ste-Elisabeth</a:t>
+            </a:r>
+            <a:endParaRPr lang="en-US" sz="900" dirty="0"/>
+          </a:p>
+        </p:txBody>
+      </p:sp>
+      <p:pic>
+        <p:nvPicPr>
+          <p:cNvPr id="16" name="Picture 15">
+            <a:extLst>
+              <a:ext uri="{FF2B5EF4-FFF2-40B4-BE49-F238E27FC236}">
+                <a16:creationId xmlns:a16="http://schemas.microsoft.com/office/drawing/2014/main" id="{E45C2EFC-2D18-AD72-36CA-3920B31CC3EF}"/>
+              </a:ext>
+            </a:extLst>
+          </p:cNvPr>
+          <p:cNvPicPr>
+            <a:picLocks noChangeAspect="1"/>
+          </p:cNvPicPr>
+          <p:nvPr/>
+        </p:nvPicPr>
+        <p:blipFill>
+          <a:blip r:embed="rId3"/>
+          <a:stretch>
+            <a:fillRect/>
+          </a:stretch>
+        </p:blipFill>
+        <p:spPr>
+          <a:xfrm>
+            <a:off x="2277030" y="1730968"/>
+            <a:ext cx="6583679" cy="3406140"/>
+          </a:xfrm>
+          <a:prstGeom prst="rect">
+            <a:avLst/>
+          </a:prstGeom>
+        </p:spPr>
+      </p:pic>
+      <p:sp>
+        <p:nvSpPr>
+          <p:cNvPr id="10" name="Text 8"/>
+          <p:cNvSpPr/>
+          <p:nvPr/>
+        </p:nvSpPr>
+        <p:spPr>
+          <a:xfrm>
+            <a:off x="6189772" y="2458556"/>
+            <a:ext cx="4023360" cy="1920240"/>
+          </a:xfrm>
+          <a:prstGeom prst="rect">
+            <a:avLst/>
+          </a:prstGeom>
+          <a:noFill/>
+          <a:ln/>
+        </p:spPr>
+        <p:txBody>
+          <a:bodyPr wrap="square" rtlCol="0" anchor="ctr"/>
+          <a:lstStyle/>
+          <a:p>
+            <a:pPr marL="0" indent="0">
+              <a:buNone/>
+            </a:pPr>
+            <a:r>
+              <a:rPr lang="en-US" sz="1000" b="1" dirty="0">
+                <a:solidFill>
+                  <a:srgbClr val="FF0000"/>
+                </a:solidFill>
+              </a:rPr>
+              <a:t>Voici les concerts disponibles :</a:t>
+            </a:r>
+            <a:endParaRPr lang="en-US" sz="1000" dirty="0">
+              <a:solidFill>
+                <a:srgbClr val="FF0000"/>
+              </a:solidFill>
+            </a:endParaRPr>
+          </a:p>
+          <a:p>
+            <a:pPr marL="0" indent="0">
+              <a:buNone/>
+            </a:pPr>
+            <a:r>
+              <a:rPr lang="en-US" sz="1000" dirty="0">
+                <a:solidFill>
+                  <a:srgbClr val="FF0000"/>
+                </a:solidFill>
+              </a:rPr>
+              <a:t> </a:t>
+            </a:r>
+          </a:p>
+          <a:p>
+            <a:pPr marL="0" indent="0">
+              <a:buNone/>
+            </a:pPr>
+            <a:r>
+              <a:rPr lang="en-US" sz="1000" b="1" dirty="0">
+                <a:solidFill>
+                  <a:srgbClr val="FF0000"/>
+                </a:solidFill>
+              </a:rPr>
+              <a:t>1. Les 4 Saisons de Vivaldi</a:t>
+            </a:r>
+            <a:endParaRPr lang="en-US" sz="1000" dirty="0">
+              <a:solidFill>
+                <a:srgbClr val="FF0000"/>
+              </a:solidFill>
+            </a:endParaRPr>
+          </a:p>
+          <a:p>
+            <a:pPr marL="0" indent="0">
+              <a:buNone/>
+            </a:pPr>
+            <a:r>
+              <a:rPr lang="en-US" sz="1000" dirty="0">
+                <a:solidFill>
+                  <a:srgbClr val="FF0000"/>
+                </a:solidFill>
+              </a:rPr>
+              <a:t>   Mercredi 11 mars, 20h00</a:t>
+            </a:r>
+          </a:p>
+          <a:p>
+            <a:pPr marL="0" indent="0">
+              <a:buNone/>
+            </a:pPr>
+            <a:r>
+              <a:rPr lang="en-US" sz="1000" dirty="0">
+                <a:solidFill>
+                  <a:srgbClr val="FF0000"/>
+                </a:solidFill>
+              </a:rPr>
+              <a:t>   Eglise de La Madeleine, Paris</a:t>
+            </a:r>
+          </a:p>
+          <a:p>
+            <a:pPr marL="0" indent="0">
+              <a:buNone/>
+            </a:pPr>
+            <a:r>
+              <a:rPr lang="en-US" sz="1000" dirty="0">
+                <a:solidFill>
+                  <a:srgbClr val="FF0000"/>
+                </a:solidFill>
+              </a:rPr>
+              <a:t> </a:t>
+            </a:r>
+          </a:p>
+          <a:p>
+            <a:pPr marL="0" indent="0">
+              <a:buNone/>
+            </a:pPr>
+            <a:r>
+              <a:rPr lang="en-US" sz="1000" b="1" dirty="0">
+                <a:solidFill>
+                  <a:srgbClr val="FF0000"/>
+                </a:solidFill>
+              </a:rPr>
+              <a:t>2. Concert Aria Baroque</a:t>
+            </a:r>
+            <a:endParaRPr lang="en-US" sz="1000" dirty="0">
+              <a:solidFill>
+                <a:srgbClr val="FF0000"/>
+              </a:solidFill>
+            </a:endParaRPr>
+          </a:p>
+          <a:p>
+            <a:pPr marL="0" indent="0">
+              <a:buNone/>
+            </a:pPr>
+            <a:r>
+              <a:rPr lang="en-US" sz="1000" dirty="0">
+                <a:solidFill>
+                  <a:srgbClr val="FF0000"/>
+                </a:solidFill>
+              </a:rPr>
+              <a:t>   Samedi 14 mars, 16h00</a:t>
+            </a:r>
+          </a:p>
+          <a:p>
+            <a:pPr marL="0" indent="0">
+              <a:buNone/>
+            </a:pPr>
+            <a:r>
+              <a:rPr lang="en-US" sz="1000" dirty="0">
+                <a:solidFill>
+                  <a:srgbClr val="FF0000"/>
+                </a:solidFill>
+              </a:rPr>
+              <a:t>   Eglise Sainte-Elisabeth de Hongrie</a:t>
+            </a:r>
+          </a:p>
+        </p:txBody>
+      </p:sp>
+    </p:spTree>
+  </p:cSld>
+  <p:clrMapOvr>
+    <a:masterClrMapping/>
+  </p:clrMapOvr>
+</p:sld>
+</file>
+
+<file path=ppt/slides/slide11.xml><?xml version="1.0" encoding="utf-8"?>
 <p:sld xmlns:a="http://schemas.openxmlformats.org/drawingml/2006/main" xmlns:r="http://schemas.openxmlformats.org/officeDocument/2006/relationships" xmlns:p="http://schemas.openxmlformats.org/presentationml/2006/main">
   <p:cSld name="Slide 9">
     <p:bg>
@@ -3115,7 +3711,7 @@
 </p:sld>
 </file>
 
-<file path=ppt/slides/slide11.xml><?xml version="1.0" encoding="utf-8"?>
+<file path=ppt/slides/slide12.xml><?xml version="1.0" encoding="utf-8"?>
 <p:sld xmlns:a="http://schemas.openxmlformats.org/drawingml/2006/main" xmlns:r="http://schemas.openxmlformats.org/officeDocument/2006/relationships" xmlns:p="http://schemas.openxmlformats.org/presentationml/2006/main">
   <p:cSld name="Slide 10">
     <p:bg>
@@ -4515,7 +5111,7 @@
 </p:sld>
 </file>
 
-<file path=ppt/slides/slide12.xml><?xml version="1.0" encoding="utf-8"?>
+<file path=ppt/slides/slide13.xml><?xml version="1.0" encoding="utf-8"?>
 <p:sld xmlns:a="http://schemas.openxmlformats.org/drawingml/2006/main" xmlns:r="http://schemas.openxmlformats.org/officeDocument/2006/relationships" xmlns:p="http://schemas.openxmlformats.org/presentationml/2006/main">
   <p:cSld name="Slide 11">
     <p:bg>
@@ -4722,7 +5318,7 @@
                   <a:srgbClr val="5D6D7E"/>
                 </a:solidFill>
               </a:rPr>
-              <a:t>Embedding 1 740 evenements : 17 min (niveau gratuit)</a:t>
+              <a:t>Embedding 1 643 evenements : ~16 min (niveau gratuit)</a:t>
             </a:r>
             <a:endParaRPr lang="en-US" sz="1100" dirty="0"/>
           </a:p>
@@ -4958,7 +5554,7 @@
 </p:sld>
 </file>
 
-<file path=ppt/slides/slide13.xml><?xml version="1.0" encoding="utf-8"?>
+<file path=ppt/slides/slide14.xml><?xml version="1.0" encoding="utf-8"?>
 <p:sld xmlns:a="http://schemas.openxmlformats.org/drawingml/2006/main" xmlns:r="http://schemas.openxmlformats.org/officeDocument/2006/relationships" xmlns:p="http://schemas.openxmlformats.org/presentationml/2006/main">
   <p:cSld name="Slide 12">
     <p:bg>
@@ -5217,7 +5813,7 @@
                   <a:srgbClr val="FFFFFF"/>
                 </a:solidFill>
               </a:rPr>
-              <a:t>1 740 evenements parisiens indexes et interrogeables semantiquement</a:t>
+              <a:t>1 643 evenements parisiens indexes et interrogeables semantiquement</a:t>
             </a:r>
             <a:endParaRPr lang="en-US" sz="1300" dirty="0"/>
           </a:p>
@@ -5401,7 +5997,7 @@
                   <a:srgbClr val="FFFFFF"/>
                 </a:solidFill>
               </a:rPr>
-              <a:t>24 / 24 tests unitaires passes, pipeline reproductible en une commande</a:t>
+              <a:t>25 / 25 tests unitaires passes, pipeline reproductible en une commande</a:t>
             </a:r>
             <a:endParaRPr lang="en-US" sz="1300" dirty="0"/>
           </a:p>
@@ -5565,7 +6161,7 @@
 </p:sld>
 </file>
 
-<file path=ppt/slides/slide14.xml><?xml version="1.0" encoding="utf-8"?>
+<file path=ppt/slides/slide15.xml><?xml version="1.0" encoding="utf-8"?>
 <p:sld xmlns:a="http://schemas.openxmlformats.org/drawingml/2006/main" xmlns:r="http://schemas.openxmlformats.org/officeDocument/2006/relationships" xmlns:p="http://schemas.openxmlformats.org/presentationml/2006/main">
   <p:cSld name="Slide 13">
     <p:bg>
@@ -5715,7 +6311,7 @@
                   <a:srgbClr val="CADCFC"/>
                 </a:solidFill>
               </a:rPr>
-              <a:t>Hope Donglo  |  Ingenieur de donnees freelance  |  Mars 2026</a:t>
+              <a:t>Hope Donglo  |  OpenClassrooms Projet 11  |  Juillet 2026</a:t>
             </a:r>
             <a:endParaRPr lang="en-US" sz="1200" dirty="0"/>
           </a:p>
@@ -5765,7 +6361,7 @@
 </p:sld>
 </file>
 
-<file path=ppt/slides/slide15.xml><?xml version="1.0" encoding="utf-8"?>
+<file path=ppt/slides/slide2.xml><?xml version="1.0" encoding="utf-8"?>
 <p:sld xmlns:a="http://schemas.openxmlformats.org/drawingml/2006/main" xmlns:r="http://schemas.openxmlformats.org/officeDocument/2006/relationships" xmlns:p="http://schemas.openxmlformats.org/presentationml/2006/main">
   <p:cSld>
     <p:spTree>
@@ -5784,2293 +6380,14 @@
       </p:grpSpPr>
       <p:sp>
         <p:nvSpPr>
-          <p:cNvPr id="2" name="Shape 0"/>
-          <p:cNvSpPr/>
-          <p:nvPr/>
-        </p:nvSpPr>
-        <p:spPr>
-          <a:xfrm>
-            <a:off x="0" y="0"/>
-            <a:ext cx="9144000" cy="914400"/>
-          </a:xfrm>
-          <a:prstGeom prst="rect">
-            <a:avLst/>
-          </a:prstGeom>
-          <a:solidFill>
-            <a:srgbClr val="1F4E79"/>
-          </a:solidFill>
-          <a:ln/>
-        </p:spPr>
-      </p:sp>
-      <p:sp>
-        <p:nvSpPr>
-          <p:cNvPr id="3" name="Text 1"/>
-          <p:cNvSpPr/>
-          <p:nvPr/>
-        </p:nvSpPr>
-        <p:spPr>
-          <a:xfrm>
-            <a:off x="365760" y="0"/>
-            <a:ext cx="8412480" cy="914400"/>
-          </a:xfrm>
-          <a:prstGeom prst="rect">
-            <a:avLst/>
-          </a:prstGeom>
-          <a:noFill/>
-          <a:ln/>
-        </p:spPr>
-        <p:txBody>
-          <a:bodyPr wrap="square" rtlCol="0" anchor="ctr"/>
-          <a:lstStyle/>
-          <a:p>
-            <a:pPr marL="0" indent="0">
-              <a:buNone/>
-            </a:pPr>
-            <a:r>
-              <a:rPr lang="en-US" sz="2200" b="1" dirty="0">
-                <a:solidFill>
-                  <a:srgbClr val="FFFFFF"/>
-                </a:solidFill>
-              </a:rPr>
-              <a:t>CHOIX TECHNIQUES</a:t>
-            </a:r>
-            <a:endParaRPr lang="en-US" sz="2200" dirty="0"/>
-          </a:p>
-        </p:txBody>
-      </p:sp>
-      <p:sp>
-        <p:nvSpPr>
-          <p:cNvPr id="4" name="Shape 2"/>
-          <p:cNvSpPr/>
-          <p:nvPr/>
-        </p:nvSpPr>
-        <p:spPr>
-          <a:xfrm>
-            <a:off x="274320" y="1051560"/>
-            <a:ext cx="2697480" cy="1783080"/>
-          </a:xfrm>
-          <a:prstGeom prst="roundRect">
-            <a:avLst>
-              <a:gd name="adj" fmla="val 5128"/>
-            </a:avLst>
-          </a:prstGeom>
-          <a:solidFill>
-            <a:srgbClr val="F2F6FA"/>
-          </a:solidFill>
-          <a:ln/>
-          <a:effectLst>
-            <a:outerShdw blurRad="101600" dist="38100" dir="2700000" algn="bl" rotWithShape="0">
-              <a:srgbClr val="000000">
-                <a:alpha val="12000"/>
-              </a:srgbClr>
-            </a:outerShdw>
-          </a:effectLst>
-        </p:spPr>
-      </p:sp>
-      <p:sp>
-        <p:nvSpPr>
-          <p:cNvPr id="5" name="Shape 3"/>
-          <p:cNvSpPr/>
-          <p:nvPr/>
-        </p:nvSpPr>
-        <p:spPr>
-          <a:xfrm>
-            <a:off x="384048" y="1143000"/>
-            <a:ext cx="502920" cy="502920"/>
-          </a:xfrm>
-          <a:prstGeom prst="ellipse">
-            <a:avLst/>
-          </a:prstGeom>
-          <a:solidFill>
-            <a:srgbClr val="1F4E79"/>
-          </a:solidFill>
-          <a:ln/>
-        </p:spPr>
-      </p:sp>
-      <p:pic>
-        <p:nvPicPr>
-          <p:cNvPr id="6" name="Image 0" descr="preencoded.png"/>
-          <p:cNvPicPr>
-            <a:picLocks noChangeAspect="1"/>
-          </p:cNvPicPr>
-          <p:nvPr/>
-        </p:nvPicPr>
-        <p:blipFill>
-          <a:blip r:embed="rId3"/>
-          <a:stretch>
-            <a:fillRect/>
-          </a:stretch>
-        </p:blipFill>
-        <p:spPr>
-          <a:xfrm>
-            <a:off x="429768" y="1188720"/>
-            <a:ext cx="384048" cy="384048"/>
-          </a:xfrm>
-          <a:prstGeom prst="rect">
-            <a:avLst/>
-          </a:prstGeom>
-        </p:spPr>
-      </p:pic>
-      <p:sp>
-        <p:nvSpPr>
-          <p:cNvPr id="7" name="Text 4"/>
-          <p:cNvSpPr/>
-          <p:nvPr/>
-        </p:nvSpPr>
-        <p:spPr>
-          <a:xfrm>
-            <a:off x="960120" y="1143000"/>
-            <a:ext cx="1920240" cy="320040"/>
-          </a:xfrm>
-          <a:prstGeom prst="rect">
-            <a:avLst/>
-          </a:prstGeom>
-          <a:noFill/>
-          <a:ln/>
-        </p:spPr>
-        <p:txBody>
-          <a:bodyPr wrap="square" rtlCol="0" anchor="ctr"/>
-          <a:lstStyle/>
-          <a:p>
-            <a:pPr marL="0" indent="0">
-              <a:buNone/>
-            </a:pPr>
-            <a:r>
-              <a:rPr lang="en-US" sz="1200" b="1" dirty="0">
-                <a:solidFill>
-                  <a:srgbClr val="1F4E79"/>
-                </a:solidFill>
-              </a:rPr>
-              <a:t>mistral-embed</a:t>
-            </a:r>
-            <a:endParaRPr lang="en-US" sz="1200" dirty="0"/>
-          </a:p>
-        </p:txBody>
-      </p:sp>
-      <p:sp>
-        <p:nvSpPr>
-          <p:cNvPr id="8" name="Text 5"/>
-          <p:cNvSpPr/>
-          <p:nvPr/>
-        </p:nvSpPr>
-        <p:spPr>
-          <a:xfrm>
-            <a:off x="960120" y="1463040"/>
-            <a:ext cx="1920240" cy="274320"/>
-          </a:xfrm>
-          <a:prstGeom prst="rect">
-            <a:avLst/>
-          </a:prstGeom>
-          <a:noFill/>
-          <a:ln/>
-        </p:spPr>
-        <p:txBody>
-          <a:bodyPr wrap="square" rtlCol="0" anchor="ctr"/>
-          <a:lstStyle/>
-          <a:p>
-            <a:pPr marL="0" indent="0">
-              <a:buNone/>
-            </a:pPr>
-            <a:r>
-              <a:rPr lang="en-US" sz="1000" i="1" dirty="0">
-                <a:solidFill>
-                  <a:srgbClr val="5D6D7E"/>
-                </a:solidFill>
-              </a:rPr>
-              <a:t>Modele d'embedding</a:t>
-            </a:r>
-            <a:endParaRPr lang="en-US" sz="1000" dirty="0"/>
-          </a:p>
-        </p:txBody>
-      </p:sp>
-      <p:sp>
-        <p:nvSpPr>
-          <p:cNvPr id="9" name="Text 6"/>
-          <p:cNvSpPr/>
-          <p:nvPr/>
-        </p:nvSpPr>
-        <p:spPr>
-          <a:xfrm>
-            <a:off x="384048" y="1828800"/>
-            <a:ext cx="2487168" cy="914400"/>
-          </a:xfrm>
-          <a:prstGeom prst="rect">
-            <a:avLst/>
-          </a:prstGeom>
-          <a:noFill/>
-          <a:ln/>
-        </p:spPr>
-        <p:txBody>
-          <a:bodyPr wrap="square" rtlCol="0" anchor="ctr"/>
-          <a:lstStyle/>
-          <a:p>
-            <a:pPr marL="0" indent="0">
-              <a:buNone/>
-            </a:pPr>
-            <a:r>
-              <a:rPr lang="en-US" sz="1000" dirty="0">
-                <a:solidFill>
-                  <a:srgbClr val="5D6D7E"/>
-                </a:solidFill>
-              </a:rPr>
-              <a:t>1 024 dimensions. Support francais optimise. Meme fournisseur que le LLM pour la coherence de tokenisation.</a:t>
-            </a:r>
-            <a:endParaRPr lang="en-US" sz="1000" dirty="0"/>
-          </a:p>
-        </p:txBody>
-      </p:sp>
-      <p:sp>
-        <p:nvSpPr>
-          <p:cNvPr id="10" name="Shape 7"/>
-          <p:cNvSpPr/>
-          <p:nvPr/>
-        </p:nvSpPr>
-        <p:spPr>
-          <a:xfrm>
-            <a:off x="3154680" y="1051560"/>
-            <a:ext cx="2697480" cy="1783080"/>
-          </a:xfrm>
-          <a:prstGeom prst="roundRect">
-            <a:avLst>
-              <a:gd name="adj" fmla="val 5128"/>
-            </a:avLst>
-          </a:prstGeom>
-          <a:solidFill>
-            <a:srgbClr val="F2F6FA"/>
-          </a:solidFill>
-          <a:ln/>
-          <a:effectLst>
-            <a:outerShdw blurRad="101600" dist="38100" dir="2700000" algn="bl" rotWithShape="0">
-              <a:srgbClr val="000000">
-                <a:alpha val="12000"/>
-              </a:srgbClr>
-            </a:outerShdw>
-          </a:effectLst>
-        </p:spPr>
-      </p:sp>
-      <p:sp>
-        <p:nvSpPr>
-          <p:cNvPr id="11" name="Shape 8"/>
-          <p:cNvSpPr/>
-          <p:nvPr/>
-        </p:nvSpPr>
-        <p:spPr>
-          <a:xfrm>
-            <a:off x="3264408" y="1143000"/>
-            <a:ext cx="502920" cy="502920"/>
-          </a:xfrm>
-          <a:prstGeom prst="ellipse">
-            <a:avLst/>
-          </a:prstGeom>
-          <a:solidFill>
-            <a:srgbClr val="2E75B6"/>
-          </a:solidFill>
-          <a:ln/>
-        </p:spPr>
-      </p:sp>
-      <p:pic>
-        <p:nvPicPr>
-          <p:cNvPr id="12" name="Image 1" descr="preencoded.png"/>
-          <p:cNvPicPr>
-            <a:picLocks noChangeAspect="1"/>
-          </p:cNvPicPr>
-          <p:nvPr/>
-        </p:nvPicPr>
-        <p:blipFill>
-          <a:blip r:embed="rId4"/>
-          <a:stretch>
-            <a:fillRect/>
-          </a:stretch>
-        </p:blipFill>
-        <p:spPr>
-          <a:xfrm>
-            <a:off x="3310128" y="1188720"/>
-            <a:ext cx="384048" cy="384048"/>
-          </a:xfrm>
-          <a:prstGeom prst="rect">
-            <a:avLst/>
-          </a:prstGeom>
-        </p:spPr>
-      </p:pic>
-      <p:sp>
-        <p:nvSpPr>
-          <p:cNvPr id="13" name="Text 9"/>
-          <p:cNvSpPr/>
-          <p:nvPr/>
-        </p:nvSpPr>
-        <p:spPr>
-          <a:xfrm>
-            <a:off x="3840480" y="1143000"/>
-            <a:ext cx="1920240" cy="320040"/>
-          </a:xfrm>
-          <a:prstGeom prst="rect">
-            <a:avLst/>
-          </a:prstGeom>
-          <a:noFill/>
-          <a:ln/>
-        </p:spPr>
-        <p:txBody>
-          <a:bodyPr wrap="square" rtlCol="0" anchor="ctr"/>
-          <a:lstStyle/>
-          <a:p>
-            <a:pPr marL="0" indent="0">
-              <a:buNone/>
-            </a:pPr>
-            <a:r>
-              <a:rPr lang="en-US" sz="1200" b="1" dirty="0">
-                <a:solidFill>
-                  <a:srgbClr val="1F4E79"/>
-                </a:solidFill>
-              </a:rPr>
-              <a:t>FAISS IndexFlatL2</a:t>
-            </a:r>
-            <a:endParaRPr lang="en-US" sz="1200" dirty="0"/>
-          </a:p>
-        </p:txBody>
-      </p:sp>
-      <p:sp>
-        <p:nvSpPr>
-          <p:cNvPr id="14" name="Text 10"/>
-          <p:cNvSpPr/>
-          <p:nvPr/>
-        </p:nvSpPr>
-        <p:spPr>
-          <a:xfrm>
-            <a:off x="3840480" y="1463040"/>
-            <a:ext cx="1920240" cy="274320"/>
-          </a:xfrm>
-          <a:prstGeom prst="rect">
-            <a:avLst/>
-          </a:prstGeom>
-          <a:noFill/>
-          <a:ln/>
-        </p:spPr>
-        <p:txBody>
-          <a:bodyPr wrap="square" rtlCol="0" anchor="ctr"/>
-          <a:lstStyle/>
-          <a:p>
-            <a:pPr marL="0" indent="0">
-              <a:buNone/>
-            </a:pPr>
-            <a:r>
-              <a:rPr lang="en-US" sz="1000" i="1" dirty="0">
-                <a:solidFill>
-                  <a:srgbClr val="5D6D7E"/>
-                </a:solidFill>
-              </a:rPr>
-              <a:t>Base vectorielle</a:t>
-            </a:r>
-            <a:endParaRPr lang="en-US" sz="1000" dirty="0"/>
-          </a:p>
-        </p:txBody>
-      </p:sp>
-      <p:sp>
-        <p:nvSpPr>
-          <p:cNvPr id="15" name="Text 11"/>
-          <p:cNvSpPr/>
-          <p:nvPr/>
-        </p:nvSpPr>
-        <p:spPr>
-          <a:xfrm>
-            <a:off x="3264408" y="1828800"/>
-            <a:ext cx="2487168" cy="914400"/>
-          </a:xfrm>
-          <a:prstGeom prst="rect">
-            <a:avLst/>
-          </a:prstGeom>
-          <a:noFill/>
-          <a:ln/>
-        </p:spPr>
-        <p:txBody>
-          <a:bodyPr wrap="square" rtlCol="0" anchor="ctr"/>
-          <a:lstStyle/>
-          <a:p>
-            <a:pPr marL="0" indent="0">
-              <a:buNone/>
-            </a:pPr>
-            <a:r>
-              <a:rPr lang="en-US" sz="1000" dirty="0">
-                <a:solidFill>
-                  <a:srgbClr val="5D6D7E"/>
-                </a:solidFill>
-              </a:rPr>
-              <a:t>Recherche exacte en moins de 1 ms sur 1 740 vecteurs. Zero configuration pour le POC. Scalable avec IVFFlat en production.</a:t>
-            </a:r>
-            <a:endParaRPr lang="en-US" sz="1000" dirty="0"/>
-          </a:p>
-        </p:txBody>
-      </p:sp>
-      <p:sp>
-        <p:nvSpPr>
-          <p:cNvPr id="16" name="Shape 12"/>
-          <p:cNvSpPr/>
-          <p:nvPr/>
-        </p:nvSpPr>
-        <p:spPr>
-          <a:xfrm>
-            <a:off x="6035040" y="1051560"/>
-            <a:ext cx="2697480" cy="1783080"/>
-          </a:xfrm>
-          <a:prstGeom prst="roundRect">
-            <a:avLst>
-              <a:gd name="adj" fmla="val 5128"/>
-            </a:avLst>
-          </a:prstGeom>
-          <a:solidFill>
-            <a:srgbClr val="F2F6FA"/>
-          </a:solidFill>
-          <a:ln/>
-          <a:effectLst>
-            <a:outerShdw blurRad="101600" dist="38100" dir="2700000" algn="bl" rotWithShape="0">
-              <a:srgbClr val="000000">
-                <a:alpha val="12000"/>
-              </a:srgbClr>
-            </a:outerShdw>
-          </a:effectLst>
-        </p:spPr>
-      </p:sp>
-      <p:sp>
-        <p:nvSpPr>
-          <p:cNvPr id="17" name="Shape 13"/>
-          <p:cNvSpPr/>
-          <p:nvPr/>
-        </p:nvSpPr>
-        <p:spPr>
-          <a:xfrm>
-            <a:off x="6144768" y="1143000"/>
-            <a:ext cx="502920" cy="502920"/>
-          </a:xfrm>
-          <a:prstGeom prst="ellipse">
-            <a:avLst/>
-          </a:prstGeom>
-          <a:solidFill>
-            <a:srgbClr val="028090"/>
-          </a:solidFill>
-          <a:ln/>
-        </p:spPr>
-      </p:sp>
-      <p:pic>
-        <p:nvPicPr>
-          <p:cNvPr id="18" name="Image 2" descr="preencoded.png"/>
-          <p:cNvPicPr>
-            <a:picLocks noChangeAspect="1"/>
-          </p:cNvPicPr>
-          <p:nvPr/>
-        </p:nvPicPr>
-        <p:blipFill>
-          <a:blip r:embed="rId5"/>
-          <a:stretch>
-            <a:fillRect/>
-          </a:stretch>
-        </p:blipFill>
-        <p:spPr>
-          <a:xfrm>
-            <a:off x="6190488" y="1188720"/>
-            <a:ext cx="384048" cy="384048"/>
-          </a:xfrm>
-          <a:prstGeom prst="rect">
-            <a:avLst/>
-          </a:prstGeom>
-        </p:spPr>
-      </p:pic>
-      <p:sp>
-        <p:nvSpPr>
-          <p:cNvPr id="19" name="Text 14"/>
-          <p:cNvSpPr/>
-          <p:nvPr/>
-        </p:nvSpPr>
-        <p:spPr>
-          <a:xfrm>
-            <a:off x="6720840" y="1143000"/>
-            <a:ext cx="1920240" cy="320040"/>
-          </a:xfrm>
-          <a:prstGeom prst="rect">
-            <a:avLst/>
-          </a:prstGeom>
-          <a:noFill/>
-          <a:ln/>
-        </p:spPr>
-        <p:txBody>
-          <a:bodyPr wrap="square" rtlCol="0" anchor="ctr"/>
-          <a:lstStyle/>
-          <a:p>
-            <a:pPr marL="0" indent="0">
-              <a:buNone/>
-            </a:pPr>
-            <a:r>
-              <a:rPr lang="en-US" sz="1200" b="1" dirty="0">
-                <a:solidFill>
-                  <a:srgbClr val="1F4E79"/>
-                </a:solidFill>
-              </a:rPr>
-              <a:t>mistral-small-latest</a:t>
-            </a:r>
-            <a:endParaRPr lang="en-US" sz="1200" dirty="0"/>
-          </a:p>
-        </p:txBody>
-      </p:sp>
-      <p:sp>
-        <p:nvSpPr>
-          <p:cNvPr id="20" name="Text 15"/>
-          <p:cNvSpPr/>
-          <p:nvPr/>
-        </p:nvSpPr>
-        <p:spPr>
-          <a:xfrm>
-            <a:off x="6720840" y="1463040"/>
-            <a:ext cx="1920240" cy="274320"/>
-          </a:xfrm>
-          <a:prstGeom prst="rect">
-            <a:avLst/>
-          </a:prstGeom>
-          <a:noFill/>
-          <a:ln/>
-        </p:spPr>
-        <p:txBody>
-          <a:bodyPr wrap="square" rtlCol="0" anchor="ctr"/>
-          <a:lstStyle/>
-          <a:p>
-            <a:pPr marL="0" indent="0">
-              <a:buNone/>
-            </a:pPr>
-            <a:r>
-              <a:rPr lang="en-US" sz="1000" i="1" dirty="0">
-                <a:solidFill>
-                  <a:srgbClr val="5D6D7E"/>
-                </a:solidFill>
-              </a:rPr>
-              <a:t>Modele de generation</a:t>
-            </a:r>
-            <a:endParaRPr lang="en-US" sz="1000" dirty="0"/>
-          </a:p>
-        </p:txBody>
-      </p:sp>
-      <p:sp>
-        <p:nvSpPr>
-          <p:cNvPr id="21" name="Text 16"/>
-          <p:cNvSpPr/>
-          <p:nvPr/>
-        </p:nvSpPr>
-        <p:spPr>
-          <a:xfrm>
-            <a:off x="6144768" y="1828800"/>
-            <a:ext cx="2487168" cy="914400"/>
-          </a:xfrm>
-          <a:prstGeom prst="rect">
-            <a:avLst/>
-          </a:prstGeom>
-          <a:noFill/>
-          <a:ln/>
-        </p:spPr>
-        <p:txBody>
-          <a:bodyPr wrap="square" rtlCol="0" anchor="ctr"/>
-          <a:lstStyle/>
-          <a:p>
-            <a:pPr marL="0" indent="0">
-              <a:buNone/>
-            </a:pPr>
-            <a:r>
-              <a:rPr lang="en-US" sz="1000" dirty="0">
-                <a:solidFill>
-                  <a:srgbClr val="5D6D7E"/>
-                </a:solidFill>
-              </a:rPr>
-              <a:t>Temperature 0,1. Niveau gratuit. Reponses en francais. Prompt systeme strict : zero hallucination.</a:t>
-            </a:r>
-            <a:endParaRPr lang="en-US" sz="1000" dirty="0"/>
-          </a:p>
-        </p:txBody>
-      </p:sp>
-      <p:sp>
-        <p:nvSpPr>
-          <p:cNvPr id="22" name="Shape 17"/>
-          <p:cNvSpPr/>
-          <p:nvPr/>
-        </p:nvSpPr>
-        <p:spPr>
-          <a:xfrm>
-            <a:off x="274320" y="2971800"/>
-            <a:ext cx="2697480" cy="1783080"/>
-          </a:xfrm>
-          <a:prstGeom prst="roundRect">
-            <a:avLst>
-              <a:gd name="adj" fmla="val 5128"/>
-            </a:avLst>
-          </a:prstGeom>
-          <a:solidFill>
-            <a:srgbClr val="F2F6FA"/>
-          </a:solidFill>
-          <a:ln/>
-          <a:effectLst>
-            <a:outerShdw blurRad="101600" dist="38100" dir="2700000" algn="bl" rotWithShape="0">
-              <a:srgbClr val="000000">
-                <a:alpha val="12000"/>
-              </a:srgbClr>
-            </a:outerShdw>
-          </a:effectLst>
-        </p:spPr>
-      </p:sp>
-      <p:sp>
-        <p:nvSpPr>
-          <p:cNvPr id="23" name="Shape 18"/>
-          <p:cNvSpPr/>
-          <p:nvPr/>
-        </p:nvSpPr>
-        <p:spPr>
-          <a:xfrm>
-            <a:off x="384048" y="3063240"/>
-            <a:ext cx="502920" cy="502920"/>
-          </a:xfrm>
-          <a:prstGeom prst="ellipse">
-            <a:avLst/>
-          </a:prstGeom>
-          <a:solidFill>
-            <a:srgbClr val="1F4E79"/>
-          </a:solidFill>
-          <a:ln/>
-        </p:spPr>
-      </p:sp>
-      <p:pic>
-        <p:nvPicPr>
-          <p:cNvPr id="24" name="Image 3" descr="preencoded.png"/>
-          <p:cNvPicPr>
-            <a:picLocks noChangeAspect="1"/>
-          </p:cNvPicPr>
-          <p:nvPr/>
-        </p:nvPicPr>
-        <p:blipFill>
-          <a:blip r:embed="rId6"/>
-          <a:stretch>
-            <a:fillRect/>
-          </a:stretch>
-        </p:blipFill>
-        <p:spPr>
-          <a:xfrm>
-            <a:off x="429768" y="3108960"/>
-            <a:ext cx="384048" cy="384048"/>
-          </a:xfrm>
-          <a:prstGeom prst="rect">
-            <a:avLst/>
-          </a:prstGeom>
-        </p:spPr>
-      </p:pic>
-      <p:sp>
-        <p:nvSpPr>
-          <p:cNvPr id="25" name="Text 19"/>
-          <p:cNvSpPr/>
-          <p:nvPr/>
-        </p:nvSpPr>
-        <p:spPr>
-          <a:xfrm>
-            <a:off x="960120" y="3063240"/>
-            <a:ext cx="1920240" cy="320040"/>
-          </a:xfrm>
-          <a:prstGeom prst="rect">
-            <a:avLst/>
-          </a:prstGeom>
-          <a:noFill/>
-          <a:ln/>
-        </p:spPr>
-        <p:txBody>
-          <a:bodyPr wrap="square" rtlCol="0" anchor="ctr"/>
-          <a:lstStyle/>
-          <a:p>
-            <a:pPr marL="0" indent="0">
-              <a:buNone/>
-            </a:pPr>
-            <a:r>
-              <a:rPr lang="en-US" sz="1200" b="1" dirty="0">
-                <a:solidFill>
-                  <a:srgbClr val="1F4E79"/>
-                </a:solidFill>
-              </a:rPr>
-              <a:t>Poetry + Python 3.13</a:t>
-            </a:r>
-            <a:endParaRPr lang="en-US" sz="1200" dirty="0"/>
-          </a:p>
-        </p:txBody>
-      </p:sp>
-      <p:sp>
-        <p:nvSpPr>
-          <p:cNvPr id="26" name="Text 20"/>
-          <p:cNvSpPr/>
-          <p:nvPr/>
-        </p:nvSpPr>
-        <p:spPr>
-          <a:xfrm>
-            <a:off x="960120" y="3383280"/>
-            <a:ext cx="1920240" cy="274320"/>
-          </a:xfrm>
-          <a:prstGeom prst="rect">
-            <a:avLst/>
-          </a:prstGeom>
-          <a:noFill/>
-          <a:ln/>
-        </p:spPr>
-        <p:txBody>
-          <a:bodyPr wrap="square" rtlCol="0" anchor="ctr"/>
-          <a:lstStyle/>
-          <a:p>
-            <a:pPr marL="0" indent="0">
-              <a:buNone/>
-            </a:pPr>
-            <a:r>
-              <a:rPr lang="en-US" sz="1000" i="1" dirty="0">
-                <a:solidFill>
-                  <a:srgbClr val="5D6D7E"/>
-                </a:solidFill>
-              </a:rPr>
-              <a:t>Environnement</a:t>
-            </a:r>
-            <a:endParaRPr lang="en-US" sz="1000" dirty="0"/>
-          </a:p>
-        </p:txBody>
-      </p:sp>
-      <p:sp>
-        <p:nvSpPr>
-          <p:cNvPr id="27" name="Text 21"/>
-          <p:cNvSpPr/>
-          <p:nvPr/>
-        </p:nvSpPr>
-        <p:spPr>
-          <a:xfrm>
-            <a:off x="384048" y="3749040"/>
-            <a:ext cx="2487168" cy="914400"/>
-          </a:xfrm>
-          <a:prstGeom prst="rect">
-            <a:avLst/>
-          </a:prstGeom>
-          <a:noFill/>
-          <a:ln/>
-        </p:spPr>
-        <p:txBody>
-          <a:bodyPr wrap="square" rtlCol="0" anchor="ctr"/>
-          <a:lstStyle/>
-          <a:p>
-            <a:pPr marL="0" indent="0">
-              <a:buNone/>
-            </a:pPr>
-            <a:r>
-              <a:rPr lang="en-US" sz="1000" dirty="0">
-                <a:solidFill>
-                  <a:srgbClr val="5D6D7E"/>
-                </a:solidFill>
-              </a:rPr>
-              <a:t>Lock file pour la reproducibilite. Contrainte Python bornee a 3.13-3.15. mistralai epingle a 1.2.5.</a:t>
-            </a:r>
-            <a:endParaRPr lang="en-US" sz="1000" dirty="0"/>
-          </a:p>
-        </p:txBody>
-      </p:sp>
-      <p:sp>
-        <p:nvSpPr>
-          <p:cNvPr id="28" name="Shape 22"/>
-          <p:cNvSpPr/>
-          <p:nvPr/>
-        </p:nvSpPr>
-        <p:spPr>
-          <a:xfrm>
-            <a:off x="3154680" y="2971800"/>
-            <a:ext cx="2697480" cy="1783080"/>
-          </a:xfrm>
-          <a:prstGeom prst="roundRect">
-            <a:avLst>
-              <a:gd name="adj" fmla="val 5128"/>
-            </a:avLst>
-          </a:prstGeom>
-          <a:solidFill>
-            <a:srgbClr val="F2F6FA"/>
-          </a:solidFill>
-          <a:ln/>
-          <a:effectLst>
-            <a:outerShdw blurRad="101600" dist="38100" dir="2700000" algn="bl" rotWithShape="0">
-              <a:srgbClr val="000000">
-                <a:alpha val="12000"/>
-              </a:srgbClr>
-            </a:outerShdw>
-          </a:effectLst>
-        </p:spPr>
-      </p:sp>
-      <p:sp>
-        <p:nvSpPr>
-          <p:cNvPr id="29" name="Shape 23"/>
-          <p:cNvSpPr/>
-          <p:nvPr/>
-        </p:nvSpPr>
-        <p:spPr>
-          <a:xfrm>
-            <a:off x="3264408" y="3063240"/>
-            <a:ext cx="502920" cy="502920"/>
-          </a:xfrm>
-          <a:prstGeom prst="ellipse">
-            <a:avLst/>
-          </a:prstGeom>
-          <a:solidFill>
-            <a:srgbClr val="2E75B6"/>
-          </a:solidFill>
-          <a:ln/>
-        </p:spPr>
-      </p:sp>
-      <p:pic>
-        <p:nvPicPr>
-          <p:cNvPr id="30" name="Image 4" descr="preencoded.png"/>
-          <p:cNvPicPr>
-            <a:picLocks noChangeAspect="1"/>
-          </p:cNvPicPr>
-          <p:nvPr/>
-        </p:nvPicPr>
-        <p:blipFill>
-          <a:blip r:embed="rId7"/>
-          <a:stretch>
-            <a:fillRect/>
-          </a:stretch>
-        </p:blipFill>
-        <p:spPr>
-          <a:xfrm>
-            <a:off x="3310128" y="3108960"/>
-            <a:ext cx="384048" cy="384048"/>
-          </a:xfrm>
-          <a:prstGeom prst="rect">
-            <a:avLst/>
-          </a:prstGeom>
-        </p:spPr>
-      </p:pic>
-      <p:sp>
-        <p:nvSpPr>
-          <p:cNvPr id="31" name="Text 24"/>
-          <p:cNvSpPr/>
-          <p:nvPr/>
-        </p:nvSpPr>
-        <p:spPr>
-          <a:xfrm>
-            <a:off x="3840480" y="3063240"/>
-            <a:ext cx="1920240" cy="320040"/>
-          </a:xfrm>
-          <a:prstGeom prst="rect">
-            <a:avLst/>
-          </a:prstGeom>
-          <a:noFill/>
-          <a:ln/>
-        </p:spPr>
-        <p:txBody>
-          <a:bodyPr wrap="square" rtlCol="0" anchor="ctr"/>
-          <a:lstStyle/>
-          <a:p>
-            <a:pPr marL="0" indent="0">
-              <a:buNone/>
-            </a:pPr>
-            <a:r>
-              <a:rPr lang="en-US" sz="1200" b="1" dirty="0">
-                <a:solidFill>
-                  <a:srgbClr val="1F4E79"/>
-                </a:solidFill>
-              </a:rPr>
-              <a:t>1 chunk par evenement</a:t>
-            </a:r>
-            <a:endParaRPr lang="en-US" sz="1200" dirty="0"/>
-          </a:p>
-        </p:txBody>
-      </p:sp>
-      <p:sp>
-        <p:nvSpPr>
-          <p:cNvPr id="32" name="Text 25"/>
-          <p:cNvSpPr/>
-          <p:nvPr/>
-        </p:nvSpPr>
-        <p:spPr>
-          <a:xfrm>
-            <a:off x="3840480" y="3383280"/>
-            <a:ext cx="1920240" cy="274320"/>
-          </a:xfrm>
-          <a:prstGeom prst="rect">
-            <a:avLst/>
-          </a:prstGeom>
-          <a:noFill/>
-          <a:ln/>
-        </p:spPr>
-        <p:txBody>
-          <a:bodyPr wrap="square" rtlCol="0" anchor="ctr"/>
-          <a:lstStyle/>
-          <a:p>
-            <a:pPr marL="0" indent="0">
-              <a:buNone/>
-            </a:pPr>
-            <a:r>
-              <a:rPr lang="en-US" sz="1000" i="1" dirty="0">
-                <a:solidFill>
-                  <a:srgbClr val="5D6D7E"/>
-                </a:solidFill>
-              </a:rPr>
-              <a:t>Strategie de chunking</a:t>
-            </a:r>
-            <a:endParaRPr lang="en-US" sz="1000" dirty="0"/>
-          </a:p>
-        </p:txBody>
-      </p:sp>
-      <p:sp>
-        <p:nvSpPr>
-          <p:cNvPr id="33" name="Text 26"/>
-          <p:cNvSpPr/>
-          <p:nvPr/>
-        </p:nvSpPr>
-        <p:spPr>
-          <a:xfrm>
-            <a:off x="3264408" y="3749040"/>
-            <a:ext cx="2487168" cy="914400"/>
-          </a:xfrm>
-          <a:prstGeom prst="rect">
-            <a:avLst/>
-          </a:prstGeom>
-          <a:noFill/>
-          <a:ln/>
-        </p:spPr>
-        <p:txBody>
-          <a:bodyPr wrap="square" rtlCol="0" anchor="ctr"/>
-          <a:lstStyle/>
-          <a:p>
-            <a:pPr marL="0" indent="0">
-              <a:buNone/>
-            </a:pPr>
-            <a:r>
-              <a:rPr lang="en-US" sz="1000" dirty="0">
-                <a:solidFill>
-                  <a:srgbClr val="5D6D7E"/>
-                </a:solidFill>
-              </a:rPr>
-              <a:t>Mediane 50 caracteres. Pas de decoupage recursif. Concatenation titre + description + lieu + date.</a:t>
-            </a:r>
-            <a:endParaRPr lang="en-US" sz="1000" dirty="0"/>
-          </a:p>
-        </p:txBody>
-      </p:sp>
-      <p:sp>
-        <p:nvSpPr>
-          <p:cNvPr id="34" name="Shape 27"/>
-          <p:cNvSpPr/>
-          <p:nvPr/>
-        </p:nvSpPr>
-        <p:spPr>
-          <a:xfrm>
-            <a:off x="6035040" y="2971800"/>
-            <a:ext cx="2697480" cy="1783080"/>
-          </a:xfrm>
-          <a:prstGeom prst="roundRect">
-            <a:avLst>
-              <a:gd name="adj" fmla="val 5128"/>
-            </a:avLst>
-          </a:prstGeom>
-          <a:solidFill>
-            <a:srgbClr val="F2F6FA"/>
-          </a:solidFill>
-          <a:ln/>
-          <a:effectLst>
-            <a:outerShdw blurRad="101600" dist="38100" dir="2700000" algn="bl" rotWithShape="0">
-              <a:srgbClr val="000000">
-                <a:alpha val="12000"/>
-              </a:srgbClr>
-            </a:outerShdw>
-          </a:effectLst>
-        </p:spPr>
-      </p:sp>
-      <p:sp>
-        <p:nvSpPr>
-          <p:cNvPr id="35" name="Shape 28"/>
-          <p:cNvSpPr/>
-          <p:nvPr/>
-        </p:nvSpPr>
-        <p:spPr>
-          <a:xfrm>
-            <a:off x="6144768" y="3063240"/>
-            <a:ext cx="502920" cy="502920"/>
-          </a:xfrm>
-          <a:prstGeom prst="ellipse">
-            <a:avLst/>
-          </a:prstGeom>
-          <a:solidFill>
-            <a:srgbClr val="028090"/>
-          </a:solidFill>
-          <a:ln/>
-        </p:spPr>
-      </p:sp>
-      <p:pic>
-        <p:nvPicPr>
-          <p:cNvPr id="36" name="Image 5" descr="preencoded.png"/>
-          <p:cNvPicPr>
-            <a:picLocks noChangeAspect="1"/>
-          </p:cNvPicPr>
-          <p:nvPr/>
-        </p:nvPicPr>
-        <p:blipFill>
-          <a:blip r:embed="rId8"/>
-          <a:stretch>
-            <a:fillRect/>
-          </a:stretch>
-        </p:blipFill>
-        <p:spPr>
-          <a:xfrm>
-            <a:off x="6190488" y="3108960"/>
-            <a:ext cx="384048" cy="384048"/>
-          </a:xfrm>
-          <a:prstGeom prst="rect">
-            <a:avLst/>
-          </a:prstGeom>
-        </p:spPr>
-      </p:pic>
-      <p:sp>
-        <p:nvSpPr>
-          <p:cNvPr id="37" name="Text 29"/>
-          <p:cNvSpPr/>
-          <p:nvPr/>
-        </p:nvSpPr>
-        <p:spPr>
-          <a:xfrm>
-            <a:off x="6720840" y="3063240"/>
-            <a:ext cx="1920240" cy="320040"/>
-          </a:xfrm>
-          <a:prstGeom prst="rect">
-            <a:avLst/>
-          </a:prstGeom>
-          <a:noFill/>
-          <a:ln/>
-        </p:spPr>
-        <p:txBody>
-          <a:bodyPr wrap="square" rtlCol="0" anchor="ctr"/>
-          <a:lstStyle/>
-          <a:p>
-            <a:pPr marL="0" indent="0">
-              <a:buNone/>
-            </a:pPr>
-            <a:r>
-              <a:rPr lang="en-US" sz="1200" b="1" dirty="0">
-                <a:solidFill>
-                  <a:srgbClr val="1F4E79"/>
-                </a:solidFill>
-              </a:rPr>
-              <a:t>Streamlit</a:t>
-            </a:r>
-            <a:endParaRPr lang="en-US" sz="1200" dirty="0"/>
-          </a:p>
-        </p:txBody>
-      </p:sp>
-      <p:sp>
-        <p:nvSpPr>
-          <p:cNvPr id="38" name="Text 30"/>
-          <p:cNvSpPr/>
-          <p:nvPr/>
-        </p:nvSpPr>
-        <p:spPr>
-          <a:xfrm>
-            <a:off x="6720840" y="3383280"/>
-            <a:ext cx="1920240" cy="274320"/>
-          </a:xfrm>
-          <a:prstGeom prst="rect">
-            <a:avLst/>
-          </a:prstGeom>
-          <a:noFill/>
-          <a:ln/>
-        </p:spPr>
-        <p:txBody>
-          <a:bodyPr wrap="square" rtlCol="0" anchor="ctr"/>
-          <a:lstStyle/>
-          <a:p>
-            <a:pPr marL="0" indent="0">
-              <a:buNone/>
-            </a:pPr>
-            <a:r>
-              <a:rPr lang="en-US" sz="1000" i="1" dirty="0">
-                <a:solidFill>
-                  <a:srgbClr val="5D6D7E"/>
-                </a:solidFill>
-              </a:rPr>
-              <a:t>Interface</a:t>
-            </a:r>
-            <a:endParaRPr lang="en-US" sz="1000" dirty="0"/>
-          </a:p>
-        </p:txBody>
-      </p:sp>
-      <p:sp>
-        <p:nvSpPr>
-          <p:cNvPr id="39" name="Text 31"/>
-          <p:cNvSpPr/>
-          <p:nvPr/>
-        </p:nvSpPr>
-        <p:spPr>
-          <a:xfrm>
-            <a:off x="6144768" y="3749040"/>
-            <a:ext cx="2487168" cy="914400"/>
-          </a:xfrm>
-          <a:prstGeom prst="rect">
-            <a:avLst/>
-          </a:prstGeom>
-          <a:noFill/>
-          <a:ln/>
-        </p:spPr>
-        <p:txBody>
-          <a:bodyPr wrap="square" rtlCol="0" anchor="ctr"/>
-          <a:lstStyle/>
-          <a:p>
-            <a:pPr marL="0" indent="0">
-              <a:buNone/>
-            </a:pPr>
-            <a:r>
-              <a:rPr lang="en-US" sz="1000" dirty="0">
-                <a:solidFill>
-                  <a:srgbClr val="5D6D7E"/>
-                </a:solidFill>
-              </a:rPr>
-              <a:t>Interface conversationnelle avec panneau de sources. Chargement unique via @st.cache_resource.</a:t>
-            </a:r>
-            <a:endParaRPr lang="en-US" sz="1000" dirty="0"/>
-          </a:p>
-        </p:txBody>
-      </p:sp>
-    </p:spTree>
-    <p:extLst>
-      <p:ext uri="{BB962C8B-B14F-4D97-AF65-F5344CB8AC3E}">
-        <p14:creationId xmlns:p14="http://schemas.microsoft.com/office/powerpoint/2010/main" val="3838102217"/>
-      </p:ext>
-    </p:extLst>
-  </p:cSld>
-  <p:clrMapOvr>
-    <a:masterClrMapping/>
-  </p:clrMapOvr>
-</p:sld>
-</file>
-
-<file path=ppt/slides/slide2.xml><?xml version="1.0" encoding="utf-8"?>
-<p:sld xmlns:a="http://schemas.openxmlformats.org/drawingml/2006/main" xmlns:r="http://schemas.openxmlformats.org/officeDocument/2006/relationships" xmlns:p="http://schemas.openxmlformats.org/presentationml/2006/main">
-  <p:cSld name="Livrables soumis">
-    <p:bg>
-      <p:bgPr>
-        <a:solidFill>
-          <a:srgbClr val="FFFFFF"/>
-        </a:solidFill>
-        <a:effectLst/>
-      </p:bgPr>
-    </p:bg>
-    <p:spTree>
-      <p:nvGrpSpPr>
-        <p:cNvPr id="1" name=""/>
-        <p:cNvGrpSpPr/>
-        <p:nvPr/>
-      </p:nvGrpSpPr>
-      <p:grpSpPr>
-        <a:xfrm>
-          <a:off x="0" y="0"/>
-          <a:ext cx="0" cy="0"/>
-          <a:chOff x="0" y="0"/>
-          <a:chExt cx="0" cy="0"/>
-        </a:xfrm>
-      </p:grpSpPr>
-      <p:sp>
-        <p:nvSpPr>
-          <p:cNvPr id="2" name="Shape 0"/>
-          <p:cNvSpPr/>
-          <p:nvPr/>
-        </p:nvSpPr>
-        <p:spPr>
-          <a:xfrm>
-            <a:off x="0" y="0"/>
-            <a:ext cx="9144000" cy="914400"/>
-          </a:xfrm>
-          <a:prstGeom prst="rect">
-            <a:avLst/>
-          </a:prstGeom>
-          <a:solidFill>
-            <a:srgbClr val="1F4E79"/>
-          </a:solidFill>
-          <a:ln/>
-        </p:spPr>
-      </p:sp>
-      <p:sp>
-        <p:nvSpPr>
-          <p:cNvPr id="3" name="Text 1"/>
-          <p:cNvSpPr/>
-          <p:nvPr/>
-        </p:nvSpPr>
-        <p:spPr>
-          <a:xfrm>
-            <a:off x="365760" y="0"/>
-            <a:ext cx="8412480" cy="914400"/>
-          </a:xfrm>
-          <a:prstGeom prst="rect">
-            <a:avLst/>
-          </a:prstGeom>
-          <a:noFill/>
-          <a:ln/>
-        </p:spPr>
-        <p:txBody>
-          <a:bodyPr wrap="square" rtlCol="0" anchor="ctr"/>
-          <a:lstStyle/>
-          <a:p>
-            <a:pPr marL="0" indent="0">
-              <a:buNone/>
-            </a:pPr>
-            <a:r>
-              <a:rPr lang="fr-FR" sz="2200" b="1" dirty="0">
-                <a:solidFill>
-                  <a:srgbClr val="FFFFFF"/>
-                </a:solidFill>
-              </a:rPr>
-              <a:t>LIVRABLES SOUMIS</a:t>
-            </a:r>
-            <a:endParaRPr lang="fr-FR" sz="2200" dirty="0"/>
-          </a:p>
-        </p:txBody>
-      </p:sp>
-      <p:sp>
-        <p:nvSpPr>
-          <p:cNvPr id="10" name="Card1"/>
-          <p:cNvSpPr/>
-          <p:nvPr/>
-        </p:nvSpPr>
-        <p:spPr>
-          <a:xfrm>
-            <a:off x="274320" y="1051560"/>
-            <a:ext cx="4114800" cy="685800"/>
-          </a:xfrm>
-          <a:prstGeom prst="roundRect">
-            <a:avLst>
-              <a:gd name="adj" fmla="val 10667"/>
-            </a:avLst>
-          </a:prstGeom>
-          <a:solidFill>
-            <a:srgbClr val="F2F6FA"/>
-          </a:solidFill>
-          <a:ln/>
-        </p:spPr>
-      </p:sp>
-      <p:sp>
-        <p:nvSpPr>
-          <p:cNvPr id="11" name="Num1"/>
-          <p:cNvSpPr/>
-          <p:nvPr/>
-        </p:nvSpPr>
-        <p:spPr>
-          <a:xfrm>
-            <a:off x="384048" y="1143000"/>
-            <a:ext cx="457200" cy="502920"/>
-          </a:xfrm>
-          <a:prstGeom prst="roundRect">
-            <a:avLst>
-              <a:gd name="adj" fmla="val 12000"/>
-            </a:avLst>
-          </a:prstGeom>
-          <a:solidFill>
-            <a:srgbClr val="1F4E79"/>
-          </a:solidFill>
-          <a:ln/>
-        </p:spPr>
-      </p:sp>
-      <p:sp>
-        <p:nvSpPr>
-          <p:cNvPr id="12" name="NumTxt1"/>
-          <p:cNvSpPr/>
-          <p:nvPr/>
-        </p:nvSpPr>
-        <p:spPr>
-          <a:xfrm>
-            <a:off x="384048" y="1143000"/>
-            <a:ext cx="457200" cy="502920"/>
-          </a:xfrm>
-          <a:prstGeom prst="rect">
-            <a:avLst/>
-          </a:prstGeom>
-          <a:noFill/>
-          <a:ln/>
-        </p:spPr>
-        <p:txBody>
-          <a:bodyPr wrap="square" lIns="0" tIns="0" rIns="0" bIns="0" rtlCol="0" anchor="ctr"/>
-          <a:lstStyle/>
-          <a:p>
-            <a:pPr marL="0" indent="0" algn="ctr">
-              <a:buNone/>
-            </a:pPr>
-            <a:r>
-              <a:rPr lang="fr-FR" sz="1200" b="1" dirty="0">
-                <a:solidFill>
-                  <a:srgbClr val="FFFFFF"/>
-                </a:solidFill>
-              </a:rPr>
-              <a:t>1</a:t>
-            </a:r>
-          </a:p>
-        </p:txBody>
-      </p:sp>
-      <p:sp>
-        <p:nvSpPr>
-          <p:cNvPr id="13" name="Title1"/>
-          <p:cNvSpPr/>
-          <p:nvPr/>
-        </p:nvSpPr>
-        <p:spPr>
-          <a:xfrm>
-            <a:off x="932688" y="1124712"/>
-            <a:ext cx="3200400" cy="320040"/>
-          </a:xfrm>
-          <a:prstGeom prst="rect">
-            <a:avLst/>
-          </a:prstGeom>
-          <a:noFill/>
-          <a:ln/>
-        </p:spPr>
-        <p:txBody>
-          <a:bodyPr wrap="square" rtlCol="0" anchor="ctr"/>
-          <a:lstStyle/>
-          <a:p>
-            <a:pPr marL="0" indent="0">
-              <a:buNone/>
-            </a:pPr>
-            <a:r>
-              <a:rPr lang="fr-FR" sz="1200" b="1" dirty="0">
-                <a:solidFill>
-                  <a:srgbClr val="1F4E79"/>
-                </a:solidFill>
-              </a:rPr>
-              <a:t>README</a:t>
-            </a:r>
-          </a:p>
-        </p:txBody>
-      </p:sp>
-      <p:sp>
-        <p:nvSpPr>
-          <p:cNvPr id="14" name="Desc1"/>
-          <p:cNvSpPr/>
-          <p:nvPr/>
-        </p:nvSpPr>
-        <p:spPr>
-          <a:xfrm>
-            <a:off x="932688" y="1435608"/>
-            <a:ext cx="3200400" cy="256032"/>
-          </a:xfrm>
-          <a:prstGeom prst="rect">
-            <a:avLst/>
-          </a:prstGeom>
-          <a:noFill/>
-          <a:ln/>
-        </p:spPr>
-        <p:txBody>
-          <a:bodyPr wrap="square" rtlCol="0" anchor="ctr"/>
-          <a:lstStyle/>
-          <a:p>
-            <a:pPr marL="0" indent="0">
-              <a:buNone/>
-            </a:pPr>
-            <a:r>
-              <a:rPr lang="fr-FR" sz="1000" dirty="0">
-                <a:solidFill>
-                  <a:srgbClr val="5D6D7E"/>
-                </a:solidFill>
-              </a:rPr>
-              <a:t>Presentation, objectifs, reproduction, description des fichiers</a:t>
-            </a:r>
-          </a:p>
-        </p:txBody>
-      </p:sp>
-      <p:sp>
-        <p:nvSpPr>
-          <p:cNvPr id="20" name="Card2"/>
-          <p:cNvSpPr/>
-          <p:nvPr/>
-        </p:nvSpPr>
-        <p:spPr>
-          <a:xfrm>
-            <a:off x="274320" y="1837944"/>
-            <a:ext cx="4114800" cy="685800"/>
-          </a:xfrm>
-          <a:prstGeom prst="roundRect">
-            <a:avLst>
-              <a:gd name="adj" fmla="val 10667"/>
-            </a:avLst>
-          </a:prstGeom>
-          <a:solidFill>
-            <a:srgbClr val="F2F6FA"/>
-          </a:solidFill>
-          <a:ln/>
-        </p:spPr>
-      </p:sp>
-      <p:sp>
-        <p:nvSpPr>
-          <p:cNvPr id="21" name="Num2"/>
-          <p:cNvSpPr/>
-          <p:nvPr/>
-        </p:nvSpPr>
-        <p:spPr>
-          <a:xfrm>
-            <a:off x="384048" y="1929384"/>
-            <a:ext cx="457200" cy="502920"/>
-          </a:xfrm>
-          <a:prstGeom prst="roundRect">
-            <a:avLst>
-              <a:gd name="adj" fmla="val 12000"/>
-            </a:avLst>
-          </a:prstGeom>
-          <a:solidFill>
-            <a:srgbClr val="2E75B6"/>
-          </a:solidFill>
-          <a:ln/>
-        </p:spPr>
-      </p:sp>
-      <p:sp>
-        <p:nvSpPr>
-          <p:cNvPr id="22" name="NumTxt2"/>
-          <p:cNvSpPr/>
-          <p:nvPr/>
-        </p:nvSpPr>
-        <p:spPr>
-          <a:xfrm>
-            <a:off x="384048" y="1929384"/>
-            <a:ext cx="457200" cy="502920"/>
-          </a:xfrm>
-          <a:prstGeom prst="rect">
-            <a:avLst/>
-          </a:prstGeom>
-          <a:noFill/>
-          <a:ln/>
-        </p:spPr>
-        <p:txBody>
-          <a:bodyPr wrap="square" lIns="0" tIns="0" rIns="0" bIns="0" rtlCol="0" anchor="ctr"/>
-          <a:lstStyle/>
-          <a:p>
-            <a:pPr marL="0" indent="0" algn="ctr">
-              <a:buNone/>
-            </a:pPr>
-            <a:r>
-              <a:rPr lang="fr-FR" sz="1200" b="1" dirty="0">
-                <a:solidFill>
-                  <a:srgbClr val="FFFFFF"/>
-                </a:solidFill>
-              </a:rPr>
-              <a:t>2</a:t>
-            </a:r>
-          </a:p>
-        </p:txBody>
-      </p:sp>
-      <p:sp>
-        <p:nvSpPr>
-          <p:cNvPr id="23" name="Title2"/>
-          <p:cNvSpPr/>
-          <p:nvPr/>
-        </p:nvSpPr>
-        <p:spPr>
-          <a:xfrm>
-            <a:off x="932688" y="1911096"/>
-            <a:ext cx="3200400" cy="320040"/>
-          </a:xfrm>
-          <a:prstGeom prst="rect">
-            <a:avLst/>
-          </a:prstGeom>
-          <a:noFill/>
-          <a:ln/>
-        </p:spPr>
-        <p:txBody>
-          <a:bodyPr wrap="square" rtlCol="0" anchor="ctr"/>
-          <a:lstStyle/>
-          <a:p>
-            <a:pPr marL="0" indent="0">
-              <a:buNone/>
-            </a:pPr>
-            <a:r>
-              <a:rPr lang="fr-FR" sz="1200" b="1" dirty="0">
-                <a:solidFill>
-                  <a:srgbClr val="1F4E79"/>
-                </a:solidFill>
-              </a:rPr>
-              <a:t>Gestion des dependances</a:t>
-            </a:r>
-          </a:p>
-        </p:txBody>
-      </p:sp>
-      <p:sp>
-        <p:nvSpPr>
-          <p:cNvPr id="24" name="Desc2"/>
-          <p:cNvSpPr/>
-          <p:nvPr/>
-        </p:nvSpPr>
-        <p:spPr>
-          <a:xfrm>
-            <a:off x="932688" y="2221992"/>
-            <a:ext cx="3200400" cy="256032"/>
-          </a:xfrm>
-          <a:prstGeom prst="rect">
-            <a:avLst/>
-          </a:prstGeom>
-          <a:noFill/>
-          <a:ln/>
-        </p:spPr>
-        <p:txBody>
-          <a:bodyPr wrap="square" rtlCol="0" anchor="ctr"/>
-          <a:lstStyle/>
-          <a:p>
-            <a:pPr marL="0" indent="0">
-              <a:buNone/>
-            </a:pPr>
-            <a:r>
-              <a:rPr lang="fr-FR" sz="1000" dirty="0">
-                <a:solidFill>
-                  <a:srgbClr val="5D6D7E"/>
-                </a:solidFill>
-              </a:rPr>
-              <a:t>Poetry, pyproject.toml, poetry.lock — environnement reproductible</a:t>
-            </a:r>
-          </a:p>
-        </p:txBody>
-      </p:sp>
-      <p:sp>
-        <p:nvSpPr>
-          <p:cNvPr id="30" name="Card3"/>
-          <p:cNvSpPr/>
-          <p:nvPr/>
-        </p:nvSpPr>
-        <p:spPr>
-          <a:xfrm>
-            <a:off x="274320" y="2624328"/>
-            <a:ext cx="4114800" cy="685800"/>
-          </a:xfrm>
-          <a:prstGeom prst="roundRect">
-            <a:avLst>
-              <a:gd name="adj" fmla="val 10667"/>
-            </a:avLst>
-          </a:prstGeom>
-          <a:solidFill>
-            <a:srgbClr val="F2F6FA"/>
-          </a:solidFill>
-          <a:ln/>
-        </p:spPr>
-      </p:sp>
-      <p:sp>
-        <p:nvSpPr>
-          <p:cNvPr id="31" name="Num3"/>
-          <p:cNvSpPr/>
-          <p:nvPr/>
-        </p:nvSpPr>
-        <p:spPr>
-          <a:xfrm>
-            <a:off x="384048" y="2715768"/>
-            <a:ext cx="457200" cy="502920"/>
-          </a:xfrm>
-          <a:prstGeom prst="roundRect">
-            <a:avLst>
-              <a:gd name="adj" fmla="val 12000"/>
-            </a:avLst>
-          </a:prstGeom>
-          <a:solidFill>
-            <a:srgbClr val="028090"/>
-          </a:solidFill>
-          <a:ln/>
-        </p:spPr>
-      </p:sp>
-      <p:sp>
-        <p:nvSpPr>
-          <p:cNvPr id="32" name="NumTxt3"/>
-          <p:cNvSpPr/>
-          <p:nvPr/>
-        </p:nvSpPr>
-        <p:spPr>
-          <a:xfrm>
-            <a:off x="384048" y="2715768"/>
-            <a:ext cx="457200" cy="502920"/>
-          </a:xfrm>
-          <a:prstGeom prst="rect">
-            <a:avLst/>
-          </a:prstGeom>
-          <a:noFill/>
-          <a:ln/>
-        </p:spPr>
-        <p:txBody>
-          <a:bodyPr wrap="square" lIns="0" tIns="0" rIns="0" bIns="0" rtlCol="0" anchor="ctr"/>
-          <a:lstStyle/>
-          <a:p>
-            <a:pPr marL="0" indent="0" algn="ctr">
-              <a:buNone/>
-            </a:pPr>
-            <a:r>
-              <a:rPr lang="fr-FR" sz="1200" b="1" dirty="0">
-                <a:solidFill>
-                  <a:srgbClr val="FFFFFF"/>
-                </a:solidFill>
-              </a:rPr>
-              <a:t>3</a:t>
-            </a:r>
-          </a:p>
-        </p:txBody>
-      </p:sp>
-      <p:sp>
-        <p:nvSpPr>
-          <p:cNvPr id="33" name="Title3"/>
-          <p:cNvSpPr/>
-          <p:nvPr/>
-        </p:nvSpPr>
-        <p:spPr>
-          <a:xfrm>
-            <a:off x="932688" y="2697480"/>
-            <a:ext cx="3200400" cy="320040"/>
-          </a:xfrm>
-          <a:prstGeom prst="rect">
-            <a:avLst/>
-          </a:prstGeom>
-          <a:noFill/>
-          <a:ln/>
-        </p:spPr>
-        <p:txBody>
-          <a:bodyPr wrap="square" rtlCol="0" anchor="ctr"/>
-          <a:lstStyle/>
-          <a:p>
-            <a:pPr marL="0" indent="0">
-              <a:buNone/>
-            </a:pPr>
-            <a:r>
-              <a:rPr lang="fr-FR" sz="1200" b="1" dirty="0">
-                <a:solidFill>
-                  <a:srgbClr val="1F4E79"/>
-                </a:solidFill>
-              </a:rPr>
-              <a:t>Scripts de pre-traitement et vectorisation</a:t>
-            </a:r>
-          </a:p>
-        </p:txBody>
-      </p:sp>
-      <p:sp>
-        <p:nvSpPr>
-          <p:cNvPr id="34" name="Desc3"/>
-          <p:cNvSpPr/>
-          <p:nvPr/>
-        </p:nvSpPr>
-        <p:spPr>
-          <a:xfrm>
-            <a:off x="932688" y="3008376"/>
-            <a:ext cx="3200400" cy="256032"/>
-          </a:xfrm>
-          <a:prstGeom prst="rect">
-            <a:avLst/>
-          </a:prstGeom>
-          <a:noFill/>
-          <a:ln/>
-        </p:spPr>
-        <p:txBody>
-          <a:bodyPr wrap="square" rtlCol="0" anchor="ctr"/>
-          <a:lstStyle/>
-          <a:p>
-            <a:pPr marL="0" indent="0">
-              <a:buNone/>
-            </a:pPr>
-            <a:r>
-              <a:rPr lang="fr-FR" sz="1000" dirty="0">
-                <a:solidFill>
-                  <a:srgbClr val="5D6D7E"/>
-                </a:solidFill>
-              </a:rPr>
-              <a:t>fetch, chunk, embed, index — avec docstrings integrees</a:t>
-            </a:r>
-          </a:p>
-        </p:txBody>
-      </p:sp>
-      <p:sp>
-        <p:nvSpPr>
-          <p:cNvPr id="40" name="Card4"/>
-          <p:cNvSpPr/>
-          <p:nvPr/>
-        </p:nvSpPr>
-        <p:spPr>
-          <a:xfrm>
-            <a:off x="274320" y="3410712"/>
-            <a:ext cx="4114800" cy="685800"/>
-          </a:xfrm>
-          <a:prstGeom prst="roundRect">
-            <a:avLst>
-              <a:gd name="adj" fmla="val 10667"/>
-            </a:avLst>
-          </a:prstGeom>
-          <a:solidFill>
-            <a:srgbClr val="F2F6FA"/>
-          </a:solidFill>
-          <a:ln/>
-        </p:spPr>
-      </p:sp>
-      <p:sp>
-        <p:nvSpPr>
-          <p:cNvPr id="41" name="Num4"/>
-          <p:cNvSpPr/>
-          <p:nvPr/>
-        </p:nvSpPr>
-        <p:spPr>
-          <a:xfrm>
-            <a:off x="384048" y="3502152"/>
-            <a:ext cx="457200" cy="502920"/>
-          </a:xfrm>
-          <a:prstGeom prst="roundRect">
-            <a:avLst>
-              <a:gd name="adj" fmla="val 12000"/>
-            </a:avLst>
-          </a:prstGeom>
-          <a:solidFill>
-            <a:srgbClr val="1F4E79"/>
-          </a:solidFill>
-          <a:ln/>
-        </p:spPr>
-      </p:sp>
-      <p:sp>
-        <p:nvSpPr>
-          <p:cNvPr id="42" name="NumTxt4"/>
-          <p:cNvSpPr/>
-          <p:nvPr/>
-        </p:nvSpPr>
-        <p:spPr>
-          <a:xfrm>
-            <a:off x="384048" y="3502152"/>
-            <a:ext cx="457200" cy="502920"/>
-          </a:xfrm>
-          <a:prstGeom prst="rect">
-            <a:avLst/>
-          </a:prstGeom>
-          <a:noFill/>
-          <a:ln/>
-        </p:spPr>
-        <p:txBody>
-          <a:bodyPr wrap="square" lIns="0" tIns="0" rIns="0" bIns="0" rtlCol="0" anchor="ctr"/>
-          <a:lstStyle/>
-          <a:p>
-            <a:pPr marL="0" indent="0" algn="ctr">
-              <a:buNone/>
-            </a:pPr>
-            <a:r>
-              <a:rPr lang="fr-FR" sz="1200" b="1" dirty="0">
-                <a:solidFill>
-                  <a:srgbClr val="FFFFFF"/>
-                </a:solidFill>
-              </a:rPr>
-              <a:t>4</a:t>
-            </a:r>
-          </a:p>
-        </p:txBody>
-      </p:sp>
-      <p:sp>
-        <p:nvSpPr>
-          <p:cNvPr id="43" name="Title4"/>
-          <p:cNvSpPr/>
-          <p:nvPr/>
-        </p:nvSpPr>
-        <p:spPr>
-          <a:xfrm>
-            <a:off x="932688" y="3483864"/>
-            <a:ext cx="3200400" cy="320040"/>
-          </a:xfrm>
-          <a:prstGeom prst="rect">
-            <a:avLst/>
-          </a:prstGeom>
-          <a:noFill/>
-          <a:ln/>
-        </p:spPr>
-        <p:txBody>
-          <a:bodyPr wrap="square" rtlCol="0" anchor="ctr"/>
-          <a:lstStyle/>
-          <a:p>
-            <a:pPr marL="0" indent="0">
-              <a:buNone/>
-            </a:pPr>
-            <a:r>
-              <a:rPr lang="fr-FR" sz="1200" b="1" dirty="0">
-                <a:solidFill>
-                  <a:srgbClr val="1F4E79"/>
-                </a:solidFill>
-              </a:rPr>
-              <a:t>Tests unitaires integres au pipeline</a:t>
-            </a:r>
-          </a:p>
-        </p:txBody>
-      </p:sp>
-      <p:sp>
-        <p:nvSpPr>
-          <p:cNvPr id="44" name="Desc4"/>
-          <p:cNvSpPr/>
-          <p:nvPr/>
-        </p:nvSpPr>
-        <p:spPr>
-          <a:xfrm>
-            <a:off x="932688" y="3794760"/>
-            <a:ext cx="3200400" cy="256032"/>
-          </a:xfrm>
-          <a:prstGeom prst="rect">
-            <a:avLst/>
-          </a:prstGeom>
-          <a:noFill/>
-          <a:ln/>
-        </p:spPr>
-        <p:txBody>
-          <a:bodyPr wrap="square" rtlCol="0" anchor="ctr"/>
-          <a:lstStyle/>
-          <a:p>
-            <a:pPr marL="0" indent="0">
-              <a:buNone/>
-            </a:pPr>
-            <a:r>
-              <a:rPr lang="fr-FR" sz="1000" dirty="0">
-                <a:solidFill>
-                  <a:srgbClr val="5D6D7E"/>
-                </a:solidFill>
-              </a:rPr>
-              <a:t>25 tests pytest — date, localisation, index, qualite chunks</a:t>
-            </a:r>
-          </a:p>
-        </p:txBody>
-      </p:sp>
-      <p:sp>
-        <p:nvSpPr>
-          <p:cNvPr id="50" name="Card5"/>
-          <p:cNvSpPr/>
-          <p:nvPr/>
-        </p:nvSpPr>
-        <p:spPr>
-          <a:xfrm>
-            <a:off x="4754880" y="1051560"/>
-            <a:ext cx="4114800" cy="685800"/>
-          </a:xfrm>
-          <a:prstGeom prst="roundRect">
-            <a:avLst>
-              <a:gd name="adj" fmla="val 10667"/>
-            </a:avLst>
-          </a:prstGeom>
-          <a:solidFill>
-            <a:srgbClr val="F2F6FA"/>
-          </a:solidFill>
-          <a:ln/>
-        </p:spPr>
-      </p:sp>
-      <p:sp>
-        <p:nvSpPr>
-          <p:cNvPr id="51" name="Num5"/>
-          <p:cNvSpPr/>
-          <p:nvPr/>
-        </p:nvSpPr>
-        <p:spPr>
-          <a:xfrm>
-            <a:off x="4864608" y="1143000"/>
-            <a:ext cx="457200" cy="502920"/>
-          </a:xfrm>
-          <a:prstGeom prst="roundRect">
-            <a:avLst>
-              <a:gd name="adj" fmla="val 12000"/>
-            </a:avLst>
-          </a:prstGeom>
-          <a:solidFill>
-            <a:srgbClr val="2E75B6"/>
-          </a:solidFill>
-          <a:ln/>
-        </p:spPr>
-      </p:sp>
-      <p:sp>
-        <p:nvSpPr>
-          <p:cNvPr id="52" name="NumTxt5"/>
-          <p:cNvSpPr/>
-          <p:nvPr/>
-        </p:nvSpPr>
-        <p:spPr>
-          <a:xfrm>
-            <a:off x="4864608" y="1143000"/>
-            <a:ext cx="457200" cy="502920"/>
-          </a:xfrm>
-          <a:prstGeom prst="rect">
-            <a:avLst/>
-          </a:prstGeom>
-          <a:noFill/>
-          <a:ln/>
-        </p:spPr>
-        <p:txBody>
-          <a:bodyPr wrap="square" lIns="0" tIns="0" rIns="0" bIns="0" rtlCol="0" anchor="ctr"/>
-          <a:lstStyle/>
-          <a:p>
-            <a:pPr marL="0" indent="0" algn="ctr">
-              <a:buNone/>
-            </a:pPr>
-            <a:r>
-              <a:rPr lang="fr-FR" sz="1200" b="1" dirty="0">
-                <a:solidFill>
-                  <a:srgbClr val="FFFFFF"/>
-                </a:solidFill>
-              </a:rPr>
-              <a:t>5</a:t>
-            </a:r>
-          </a:p>
-        </p:txBody>
-      </p:sp>
-      <p:sp>
-        <p:nvSpPr>
-          <p:cNvPr id="53" name="Title5"/>
-          <p:cNvSpPr/>
-          <p:nvPr/>
-        </p:nvSpPr>
-        <p:spPr>
-          <a:xfrm>
-            <a:off x="5413248" y="1124712"/>
-            <a:ext cx="3200400" cy="320040"/>
-          </a:xfrm>
-          <a:prstGeom prst="rect">
-            <a:avLst/>
-          </a:prstGeom>
-          <a:noFill/>
-          <a:ln/>
-        </p:spPr>
-        <p:txBody>
-          <a:bodyPr wrap="square" rtlCol="0" anchor="ctr"/>
-          <a:lstStyle/>
-          <a:p>
-            <a:pPr marL="0" indent="0">
-              <a:buNone/>
-            </a:pPr>
-            <a:r>
-              <a:rPr lang="fr-FR" sz="1200" b="1" dirty="0">
-                <a:solidFill>
-                  <a:srgbClr val="1F4E79"/>
-                </a:solidFill>
-              </a:rPr>
-              <a:t>Rapport technique</a:t>
-            </a:r>
-          </a:p>
-        </p:txBody>
-      </p:sp>
-      <p:sp>
-        <p:nvSpPr>
-          <p:cNvPr id="54" name="Desc5"/>
-          <p:cNvSpPr/>
-          <p:nvPr/>
-        </p:nvSpPr>
-        <p:spPr>
-          <a:xfrm>
-            <a:off x="5413248" y="1435608"/>
-            <a:ext cx="3200400" cy="256032"/>
-          </a:xfrm>
-          <a:prstGeom prst="rect">
-            <a:avLst/>
-          </a:prstGeom>
-          <a:noFill/>
-          <a:ln/>
-        </p:spPr>
-        <p:txBody>
-          <a:bodyPr wrap="square" rtlCol="0" anchor="ctr"/>
-          <a:lstStyle/>
-          <a:p>
-            <a:pPr marL="0" indent="0">
-              <a:buNone/>
-            </a:pPr>
-            <a:r>
-              <a:rPr lang="fr-FR" sz="1000" dirty="0">
-                <a:solidFill>
-                  <a:srgbClr val="5D6D7E"/>
-                </a:solidFill>
-              </a:rPr>
-              <a:t>Architecture, choix techniques, resultats, recommandations</a:t>
-            </a:r>
-          </a:p>
-        </p:txBody>
-      </p:sp>
-      <p:sp>
-        <p:nvSpPr>
-          <p:cNvPr id="60" name="Card6"/>
-          <p:cNvSpPr/>
-          <p:nvPr/>
-        </p:nvSpPr>
-        <p:spPr>
-          <a:xfrm>
-            <a:off x="4754880" y="1837944"/>
-            <a:ext cx="4114800" cy="685800"/>
-          </a:xfrm>
-          <a:prstGeom prst="roundRect">
-            <a:avLst>
-              <a:gd name="adj" fmla="val 10667"/>
-            </a:avLst>
-          </a:prstGeom>
-          <a:solidFill>
-            <a:srgbClr val="F2F6FA"/>
-          </a:solidFill>
-          <a:ln/>
-        </p:spPr>
-      </p:sp>
-      <p:sp>
-        <p:nvSpPr>
-          <p:cNvPr id="61" name="Num6"/>
-          <p:cNvSpPr/>
-          <p:nvPr/>
-        </p:nvSpPr>
-        <p:spPr>
-          <a:xfrm>
-            <a:off x="4864608" y="1929384"/>
-            <a:ext cx="457200" cy="502920"/>
-          </a:xfrm>
-          <a:prstGeom prst="roundRect">
-            <a:avLst>
-              <a:gd name="adj" fmla="val 12000"/>
-            </a:avLst>
-          </a:prstGeom>
-          <a:solidFill>
-            <a:srgbClr val="028090"/>
-          </a:solidFill>
-          <a:ln/>
-        </p:spPr>
-      </p:sp>
-      <p:sp>
-        <p:nvSpPr>
-          <p:cNvPr id="62" name="NumTxt6"/>
-          <p:cNvSpPr/>
-          <p:nvPr/>
-        </p:nvSpPr>
-        <p:spPr>
-          <a:xfrm>
-            <a:off x="4864608" y="1929384"/>
-            <a:ext cx="457200" cy="502920"/>
-          </a:xfrm>
-          <a:prstGeom prst="rect">
-            <a:avLst/>
-          </a:prstGeom>
-          <a:noFill/>
-          <a:ln/>
-        </p:spPr>
-        <p:txBody>
-          <a:bodyPr wrap="square" lIns="0" tIns="0" rIns="0" bIns="0" rtlCol="0" anchor="ctr"/>
-          <a:lstStyle/>
-          <a:p>
-            <a:pPr marL="0" indent="0" algn="ctr">
-              <a:buNone/>
-            </a:pPr>
-            <a:r>
-              <a:rPr lang="fr-FR" sz="1200" b="1" dirty="0">
-                <a:solidFill>
-                  <a:srgbClr val="FFFFFF"/>
-                </a:solidFill>
-              </a:rPr>
-              <a:t>6</a:t>
-            </a:r>
-          </a:p>
-        </p:txBody>
-      </p:sp>
-      <p:sp>
-        <p:nvSpPr>
-          <p:cNvPr id="63" name="Title6"/>
-          <p:cNvSpPr/>
-          <p:nvPr/>
-        </p:nvSpPr>
-        <p:spPr>
-          <a:xfrm>
-            <a:off x="5413248" y="1911096"/>
-            <a:ext cx="3200400" cy="320040"/>
-          </a:xfrm>
-          <a:prstGeom prst="rect">
-            <a:avLst/>
-          </a:prstGeom>
-          <a:noFill/>
-          <a:ln/>
-        </p:spPr>
-        <p:txBody>
-          <a:bodyPr wrap="square" rtlCol="0" anchor="ctr"/>
-          <a:lstStyle/>
-          <a:p>
-            <a:pPr marL="0" indent="0">
-              <a:buNone/>
-            </a:pPr>
-            <a:r>
-              <a:rPr lang="fr-FR" sz="1200" b="1" dirty="0">
-                <a:solidFill>
-                  <a:srgbClr val="1F4E79"/>
-                </a:solidFill>
-              </a:rPr>
-              <a:t>Code du systeme RAG</a:t>
-            </a:r>
-          </a:p>
-        </p:txBody>
-      </p:sp>
-      <p:sp>
-        <p:nvSpPr>
-          <p:cNvPr id="64" name="Desc6"/>
-          <p:cNvSpPr/>
-          <p:nvPr/>
-        </p:nvSpPr>
-        <p:spPr>
-          <a:xfrm>
-            <a:off x="5413248" y="2221992"/>
-            <a:ext cx="3200400" cy="256032"/>
-          </a:xfrm>
-          <a:prstGeom prst="rect">
-            <a:avLst/>
-          </a:prstGeom>
-          <a:noFill/>
-          <a:ln/>
-        </p:spPr>
-        <p:txBody>
-          <a:bodyPr wrap="square" rtlCol="0" anchor="ctr"/>
-          <a:lstStyle/>
-          <a:p>
-            <a:pPr marL="0" indent="0">
-              <a:buNone/>
-            </a:pPr>
-            <a:r>
-              <a:rPr lang="fr-FR" sz="1000" dirty="0">
-                <a:solidFill>
-                  <a:srgbClr val="5D6D7E"/>
-                </a:solidFill>
-              </a:rPr>
-              <a:t>Chaine complete LangChain + Mistral + FAISS versionnee Git</a:t>
-            </a:r>
-          </a:p>
-        </p:txBody>
-      </p:sp>
-      <p:sp>
-        <p:nvSpPr>
-          <p:cNvPr id="70" name="Card7"/>
-          <p:cNvSpPr/>
-          <p:nvPr/>
-        </p:nvSpPr>
-        <p:spPr>
-          <a:xfrm>
-            <a:off x="4754880" y="2624328"/>
-            <a:ext cx="4114800" cy="685800"/>
-          </a:xfrm>
-          <a:prstGeom prst="roundRect">
-            <a:avLst>
-              <a:gd name="adj" fmla="val 10667"/>
-            </a:avLst>
-          </a:prstGeom>
-          <a:solidFill>
-            <a:srgbClr val="F2F6FA"/>
-          </a:solidFill>
-          <a:ln/>
-        </p:spPr>
-      </p:sp>
-      <p:sp>
-        <p:nvSpPr>
-          <p:cNvPr id="71" name="Num7"/>
-          <p:cNvSpPr/>
-          <p:nvPr/>
-        </p:nvSpPr>
-        <p:spPr>
-          <a:xfrm>
-            <a:off x="4864608" y="2715768"/>
-            <a:ext cx="457200" cy="502920"/>
-          </a:xfrm>
-          <a:prstGeom prst="roundRect">
-            <a:avLst>
-              <a:gd name="adj" fmla="val 12000"/>
-            </a:avLst>
-          </a:prstGeom>
-          <a:solidFill>
-            <a:srgbClr val="1F4E79"/>
-          </a:solidFill>
-          <a:ln/>
-        </p:spPr>
-      </p:sp>
-      <p:sp>
-        <p:nvSpPr>
-          <p:cNvPr id="72" name="NumTxt7"/>
-          <p:cNvSpPr/>
-          <p:nvPr/>
-        </p:nvSpPr>
-        <p:spPr>
-          <a:xfrm>
-            <a:off x="4864608" y="2715768"/>
-            <a:ext cx="457200" cy="502920"/>
-          </a:xfrm>
-          <a:prstGeom prst="rect">
-            <a:avLst/>
-          </a:prstGeom>
-          <a:noFill/>
-          <a:ln/>
-        </p:spPr>
-        <p:txBody>
-          <a:bodyPr wrap="square" lIns="0" tIns="0" rIns="0" bIns="0" rtlCol="0" anchor="ctr"/>
-          <a:lstStyle/>
-          <a:p>
-            <a:pPr marL="0" indent="0" algn="ctr">
-              <a:buNone/>
-            </a:pPr>
-            <a:r>
-              <a:rPr lang="fr-FR" sz="1200" b="1" dirty="0">
-                <a:solidFill>
-                  <a:srgbClr val="FFFFFF"/>
-                </a:solidFill>
-              </a:rPr>
-              <a:t>7</a:t>
-            </a:r>
-          </a:p>
-        </p:txBody>
-      </p:sp>
-      <p:sp>
-        <p:nvSpPr>
-          <p:cNvPr id="73" name="Title7"/>
-          <p:cNvSpPr/>
-          <p:nvPr/>
-        </p:nvSpPr>
-        <p:spPr>
-          <a:xfrm>
-            <a:off x="5413248" y="2697480"/>
-            <a:ext cx="3200400" cy="320040"/>
-          </a:xfrm>
-          <a:prstGeom prst="rect">
-            <a:avLst/>
-          </a:prstGeom>
-          <a:noFill/>
-          <a:ln/>
-        </p:spPr>
-        <p:txBody>
-          <a:bodyPr wrap="square" rtlCol="0" anchor="ctr"/>
-          <a:lstStyle/>
-          <a:p>
-            <a:pPr marL="0" indent="0">
-              <a:buNone/>
-            </a:pPr>
-            <a:r>
-              <a:rPr lang="fr-FR" sz="1200" b="1" dirty="0">
-                <a:solidFill>
-                  <a:srgbClr val="1F4E79"/>
-                </a:solidFill>
-              </a:rPr>
-              <a:t>Presentation PowerPoint</a:t>
-            </a:r>
-          </a:p>
-        </p:txBody>
-      </p:sp>
-      <p:sp>
-        <p:nvSpPr>
-          <p:cNvPr id="74" name="Desc7"/>
-          <p:cNvSpPr/>
-          <p:nvPr/>
-        </p:nvSpPr>
-        <p:spPr>
-          <a:xfrm>
-            <a:off x="5413248" y="3008376"/>
-            <a:ext cx="3200400" cy="256032"/>
-          </a:xfrm>
-          <a:prstGeom prst="rect">
-            <a:avLst/>
-          </a:prstGeom>
-          <a:noFill/>
-          <a:ln/>
-        </p:spPr>
-        <p:txBody>
-          <a:bodyPr wrap="square" rtlCol="0" anchor="ctr"/>
-          <a:lstStyle/>
-          <a:p>
-            <a:pPr marL="0" indent="0">
-              <a:buNone/>
-            </a:pPr>
-            <a:r>
-              <a:rPr lang="fr-FR" sz="1000" dirty="0">
-                <a:solidFill>
-                  <a:srgbClr val="5D6D7E"/>
-                </a:solidFill>
-              </a:rPr>
-              <a:t>10-15 diapositives — concept, resultats, demo, recommandations</a:t>
-            </a:r>
-          </a:p>
-        </p:txBody>
-      </p:sp>
-      <p:sp>
-        <p:nvSpPr>
           <p:cNvPr id="80" name="Footer"/>
           <p:cNvSpPr/>
           <p:nvPr/>
         </p:nvSpPr>
         <p:spPr>
           <a:xfrm>
-            <a:off x="274320" y="4700000"/>
-            <a:ext cx="8595360" cy="420000"/>
+            <a:off x="41565" y="4695790"/>
+            <a:ext cx="9033164" cy="420000"/>
           </a:xfrm>
           <a:prstGeom prst="roundRect">
             <a:avLst>
@@ -8082,42 +6399,6 @@
           </a:solidFill>
           <a:ln/>
         </p:spPr>
-      </p:sp>
-      <p:sp>
-        <p:nvSpPr>
-          <p:cNvPr id="81" name="FooterText"/>
-          <p:cNvSpPr/>
-          <p:nvPr/>
-        </p:nvSpPr>
-        <p:spPr>
-          <a:xfrm>
-            <a:off x="274320" y="4700000"/>
-            <a:ext cx="8595360" cy="420000"/>
-          </a:xfrm>
-          <a:prstGeom prst="rect">
-            <a:avLst/>
-          </a:prstGeom>
-          <a:noFill/>
-          <a:ln/>
-        </p:spPr>
-        <p:txBody>
-          <a:bodyPr wrap="square" lIns="114300" tIns="0" rIns="0" bIns="0" rtlCol="0" anchor="ctr"/>
-          <a:lstStyle/>
-          <a:p>
-            <a:pPr marL="0" indent="0">
-              <a:buNone/>
-            </a:pPr>
-            <a:r>
-              <a:rPr lang="fr-FR" sz="900" b="0" dirty="0">
-                <a:solidFill>
-                  <a:srgbClr val="F39C12"/>
-                </a:solidFill>
-                <a:latin typeface="Courier New"/>
-              </a:rPr>
-              <a:t>Convention de nommage :  Donglo_Hope_1_readme_072026  |  Donglo_Hope_2_management_072026  |  Donglo_Hope_3_scripts_072026</a:t>
-            </a:r>
-          </a:p>
-        </p:txBody>
       </p:sp>
       <p:sp>
         <p:nvSpPr>
@@ -8131,16 +6412,1388 @@
         </p:nvSpPr>
         <p:spPr/>
         <p:txBody>
-          <a:bodyPr/>
-          <a:lstStyle/>
-          <a:p>
-            <a:r>
-              <a:t>Presenter chaque livrable en une phrase. Insister sur : (1) le README couvre la reproduction complete en une commande, (2) Poetry assure un environnement identique sur toutes les machines, (3) les docstrings sont integrees dans le code de production, (4) les 25 tests sont lances avant le deploiement, bloquant si echec, (5) le rapport couvre architecture + resultats + recommandations, (6) tout le code est versionne sur Git. La convention de nommage en bas correspond aux exigences de soumission de la plateforme.</a:t>
-            </a:r>
+          <a:bodyPr>
+            <a:normAutofit fontScale="25000" lnSpcReduction="20000"/>
+          </a:bodyPr>
+          <a:lstStyle/>
+          <a:p>
+            <a:pPr marL="0" indent="0">
+              <a:buNone/>
+            </a:pPr>
+            <a:endParaRPr dirty="0"/>
+          </a:p>
+        </p:txBody>
+      </p:sp>
+      <p:sp>
+        <p:nvSpPr>
+          <p:cNvPr id="5" name="Card1">
+            <a:extLst>
+              <a:ext uri="{FF2B5EF4-FFF2-40B4-BE49-F238E27FC236}">
+                <a16:creationId xmlns:a16="http://schemas.microsoft.com/office/drawing/2014/main" id="{C04C85A0-67AF-0DFC-2A60-312368D2BD0E}"/>
+              </a:ext>
+            </a:extLst>
+          </p:cNvPr>
+          <p:cNvSpPr/>
+          <p:nvPr/>
+        </p:nvSpPr>
+        <p:spPr>
+          <a:xfrm>
+            <a:off x="274320" y="1051560"/>
+            <a:ext cx="4114800" cy="685800"/>
+          </a:xfrm>
+          <a:prstGeom prst="roundRect">
+            <a:avLst>
+              <a:gd name="adj" fmla="val 10667"/>
+            </a:avLst>
+          </a:prstGeom>
+          <a:solidFill>
+            <a:srgbClr val="F2F6FA"/>
+          </a:solidFill>
+          <a:ln/>
+        </p:spPr>
+      </p:sp>
+      <p:sp>
+        <p:nvSpPr>
+          <p:cNvPr id="6" name="Num1">
+            <a:extLst>
+              <a:ext uri="{FF2B5EF4-FFF2-40B4-BE49-F238E27FC236}">
+                <a16:creationId xmlns:a16="http://schemas.microsoft.com/office/drawing/2014/main" id="{CF740CE2-61F6-0C04-D970-05C65248C1C6}"/>
+              </a:ext>
+            </a:extLst>
+          </p:cNvPr>
+          <p:cNvSpPr/>
+          <p:nvPr/>
+        </p:nvSpPr>
+        <p:spPr>
+          <a:xfrm>
+            <a:off x="384048" y="1143000"/>
+            <a:ext cx="457200" cy="502920"/>
+          </a:xfrm>
+          <a:prstGeom prst="roundRect">
+            <a:avLst>
+              <a:gd name="adj" fmla="val 12000"/>
+            </a:avLst>
+          </a:prstGeom>
+          <a:solidFill>
+            <a:srgbClr val="1F4E79"/>
+          </a:solidFill>
+          <a:ln/>
+        </p:spPr>
+      </p:sp>
+      <p:sp>
+        <p:nvSpPr>
+          <p:cNvPr id="7" name="NumTxt1">
+            <a:extLst>
+              <a:ext uri="{FF2B5EF4-FFF2-40B4-BE49-F238E27FC236}">
+                <a16:creationId xmlns:a16="http://schemas.microsoft.com/office/drawing/2014/main" id="{0B351CAA-CCD4-6D48-C2B6-5B1701BCE21E}"/>
+              </a:ext>
+            </a:extLst>
+          </p:cNvPr>
+          <p:cNvSpPr/>
+          <p:nvPr/>
+        </p:nvSpPr>
+        <p:spPr>
+          <a:xfrm>
+            <a:off x="384048" y="1143000"/>
+            <a:ext cx="457200" cy="502920"/>
+          </a:xfrm>
+          <a:prstGeom prst="rect">
+            <a:avLst/>
+          </a:prstGeom>
+          <a:noFill/>
+          <a:ln/>
+        </p:spPr>
+        <p:txBody>
+          <a:bodyPr wrap="square" lIns="0" tIns="0" rIns="0" bIns="0" rtlCol="0" anchor="ctr"/>
+          <a:lstStyle/>
+          <a:p>
+            <a:pPr marL="0" indent="0" algn="ctr">
+              <a:buNone/>
+            </a:pPr>
+            <a:r>
+              <a:rPr lang="fr-FR" sz="1200" b="1" dirty="0">
+                <a:solidFill>
+                  <a:srgbClr val="FFFFFF"/>
+                </a:solidFill>
+              </a:rPr>
+              <a:t>1</a:t>
+            </a:r>
+          </a:p>
+        </p:txBody>
+      </p:sp>
+      <p:sp>
+        <p:nvSpPr>
+          <p:cNvPr id="8" name="Title1">
+            <a:extLst>
+              <a:ext uri="{FF2B5EF4-FFF2-40B4-BE49-F238E27FC236}">
+                <a16:creationId xmlns:a16="http://schemas.microsoft.com/office/drawing/2014/main" id="{0C261C5C-3CEA-8623-8DEE-C96569935541}"/>
+              </a:ext>
+            </a:extLst>
+          </p:cNvPr>
+          <p:cNvSpPr/>
+          <p:nvPr/>
+        </p:nvSpPr>
+        <p:spPr>
+          <a:xfrm>
+            <a:off x="932688" y="1124712"/>
+            <a:ext cx="3200400" cy="320040"/>
+          </a:xfrm>
+          <a:prstGeom prst="rect">
+            <a:avLst/>
+          </a:prstGeom>
+          <a:noFill/>
+          <a:ln/>
+        </p:spPr>
+        <p:txBody>
+          <a:bodyPr wrap="square" rtlCol="0" anchor="ctr"/>
+          <a:lstStyle/>
+          <a:p>
+            <a:pPr marL="0" indent="0">
+              <a:buNone/>
+            </a:pPr>
+            <a:r>
+              <a:rPr lang="fr-FR" sz="1200" b="1" dirty="0">
+                <a:solidFill>
+                  <a:srgbClr val="1F4E79"/>
+                </a:solidFill>
+              </a:rPr>
+              <a:t>README</a:t>
+            </a:r>
+          </a:p>
+        </p:txBody>
+      </p:sp>
+      <p:sp>
+        <p:nvSpPr>
+          <p:cNvPr id="9" name="Desc1">
+            <a:extLst>
+              <a:ext uri="{FF2B5EF4-FFF2-40B4-BE49-F238E27FC236}">
+                <a16:creationId xmlns:a16="http://schemas.microsoft.com/office/drawing/2014/main" id="{8A2FF9AF-9351-CD96-84D5-8E73FA46FC3F}"/>
+              </a:ext>
+            </a:extLst>
+          </p:cNvPr>
+          <p:cNvSpPr/>
+          <p:nvPr/>
+        </p:nvSpPr>
+        <p:spPr>
+          <a:xfrm>
+            <a:off x="932688" y="1435608"/>
+            <a:ext cx="3200400" cy="256032"/>
+          </a:xfrm>
+          <a:prstGeom prst="rect">
+            <a:avLst/>
+          </a:prstGeom>
+          <a:noFill/>
+          <a:ln/>
+        </p:spPr>
+        <p:txBody>
+          <a:bodyPr wrap="square" rtlCol="0" anchor="ctr"/>
+          <a:lstStyle/>
+          <a:p>
+            <a:pPr marL="0" indent="0">
+              <a:buNone/>
+            </a:pPr>
+            <a:r>
+              <a:rPr lang="fr-FR" sz="1000" dirty="0">
+                <a:solidFill>
+                  <a:srgbClr val="5D6D7E"/>
+                </a:solidFill>
+              </a:rPr>
+              <a:t>Presentation, objectifs, reproduction, description des fichiers</a:t>
+            </a:r>
+          </a:p>
+        </p:txBody>
+      </p:sp>
+      <p:sp>
+        <p:nvSpPr>
+          <p:cNvPr id="15" name="Card2">
+            <a:extLst>
+              <a:ext uri="{FF2B5EF4-FFF2-40B4-BE49-F238E27FC236}">
+                <a16:creationId xmlns:a16="http://schemas.microsoft.com/office/drawing/2014/main" id="{0E2474B4-E383-A585-758E-B7A154E2F6BC}"/>
+              </a:ext>
+            </a:extLst>
+          </p:cNvPr>
+          <p:cNvSpPr/>
+          <p:nvPr/>
+        </p:nvSpPr>
+        <p:spPr>
+          <a:xfrm>
+            <a:off x="274320" y="1837944"/>
+            <a:ext cx="4114800" cy="685800"/>
+          </a:xfrm>
+          <a:prstGeom prst="roundRect">
+            <a:avLst>
+              <a:gd name="adj" fmla="val 10667"/>
+            </a:avLst>
+          </a:prstGeom>
+          <a:solidFill>
+            <a:srgbClr val="F2F6FA"/>
+          </a:solidFill>
+          <a:ln/>
+        </p:spPr>
+      </p:sp>
+      <p:sp>
+        <p:nvSpPr>
+          <p:cNvPr id="16" name="Num2">
+            <a:extLst>
+              <a:ext uri="{FF2B5EF4-FFF2-40B4-BE49-F238E27FC236}">
+                <a16:creationId xmlns:a16="http://schemas.microsoft.com/office/drawing/2014/main" id="{1BF14CEF-F21D-BECE-885B-6DC29F305BF0}"/>
+              </a:ext>
+            </a:extLst>
+          </p:cNvPr>
+          <p:cNvSpPr/>
+          <p:nvPr/>
+        </p:nvSpPr>
+        <p:spPr>
+          <a:xfrm>
+            <a:off x="384048" y="1929384"/>
+            <a:ext cx="457200" cy="502920"/>
+          </a:xfrm>
+          <a:prstGeom prst="roundRect">
+            <a:avLst>
+              <a:gd name="adj" fmla="val 12000"/>
+            </a:avLst>
+          </a:prstGeom>
+          <a:solidFill>
+            <a:srgbClr val="2E75B6"/>
+          </a:solidFill>
+          <a:ln/>
+        </p:spPr>
+      </p:sp>
+      <p:sp>
+        <p:nvSpPr>
+          <p:cNvPr id="17" name="NumTxt2">
+            <a:extLst>
+              <a:ext uri="{FF2B5EF4-FFF2-40B4-BE49-F238E27FC236}">
+                <a16:creationId xmlns:a16="http://schemas.microsoft.com/office/drawing/2014/main" id="{B8D80186-BC05-0C28-FD11-D05147ED6E9B}"/>
+              </a:ext>
+            </a:extLst>
+          </p:cNvPr>
+          <p:cNvSpPr/>
+          <p:nvPr/>
+        </p:nvSpPr>
+        <p:spPr>
+          <a:xfrm>
+            <a:off x="384048" y="1929384"/>
+            <a:ext cx="457200" cy="502920"/>
+          </a:xfrm>
+          <a:prstGeom prst="rect">
+            <a:avLst/>
+          </a:prstGeom>
+          <a:noFill/>
+          <a:ln/>
+        </p:spPr>
+        <p:txBody>
+          <a:bodyPr wrap="square" lIns="0" tIns="0" rIns="0" bIns="0" rtlCol="0" anchor="ctr"/>
+          <a:lstStyle/>
+          <a:p>
+            <a:pPr marL="0" indent="0" algn="ctr">
+              <a:buNone/>
+            </a:pPr>
+            <a:r>
+              <a:rPr lang="fr-FR" sz="1200" b="1" dirty="0">
+                <a:solidFill>
+                  <a:srgbClr val="FFFFFF"/>
+                </a:solidFill>
+              </a:rPr>
+              <a:t>2</a:t>
+            </a:r>
+          </a:p>
+        </p:txBody>
+      </p:sp>
+      <p:sp>
+        <p:nvSpPr>
+          <p:cNvPr id="18" name="Title2">
+            <a:extLst>
+              <a:ext uri="{FF2B5EF4-FFF2-40B4-BE49-F238E27FC236}">
+                <a16:creationId xmlns:a16="http://schemas.microsoft.com/office/drawing/2014/main" id="{F253DA5C-5475-2680-CB96-A73885370324}"/>
+              </a:ext>
+            </a:extLst>
+          </p:cNvPr>
+          <p:cNvSpPr/>
+          <p:nvPr/>
+        </p:nvSpPr>
+        <p:spPr>
+          <a:xfrm>
+            <a:off x="932688" y="1911096"/>
+            <a:ext cx="3200400" cy="320040"/>
+          </a:xfrm>
+          <a:prstGeom prst="rect">
+            <a:avLst/>
+          </a:prstGeom>
+          <a:noFill/>
+          <a:ln/>
+        </p:spPr>
+        <p:txBody>
+          <a:bodyPr wrap="square" rtlCol="0" anchor="ctr"/>
+          <a:lstStyle/>
+          <a:p>
+            <a:pPr marL="0" indent="0">
+              <a:buNone/>
+            </a:pPr>
+            <a:r>
+              <a:rPr lang="fr-FR" sz="1200" b="1" dirty="0">
+                <a:solidFill>
+                  <a:srgbClr val="1F4E79"/>
+                </a:solidFill>
+              </a:rPr>
+              <a:t>Gestion des dependances</a:t>
+            </a:r>
+          </a:p>
+        </p:txBody>
+      </p:sp>
+      <p:sp>
+        <p:nvSpPr>
+          <p:cNvPr id="19" name="Desc2">
+            <a:extLst>
+              <a:ext uri="{FF2B5EF4-FFF2-40B4-BE49-F238E27FC236}">
+                <a16:creationId xmlns:a16="http://schemas.microsoft.com/office/drawing/2014/main" id="{EF4F8470-CA90-218D-EEE3-7E341C4FA459}"/>
+              </a:ext>
+            </a:extLst>
+          </p:cNvPr>
+          <p:cNvSpPr/>
+          <p:nvPr/>
+        </p:nvSpPr>
+        <p:spPr>
+          <a:xfrm>
+            <a:off x="932688" y="2221992"/>
+            <a:ext cx="3200400" cy="256032"/>
+          </a:xfrm>
+          <a:prstGeom prst="rect">
+            <a:avLst/>
+          </a:prstGeom>
+          <a:noFill/>
+          <a:ln/>
+        </p:spPr>
+        <p:txBody>
+          <a:bodyPr wrap="square" rtlCol="0" anchor="ctr"/>
+          <a:lstStyle/>
+          <a:p>
+            <a:pPr marL="0" indent="0">
+              <a:buNone/>
+            </a:pPr>
+            <a:r>
+              <a:rPr lang="fr-FR" sz="1000" dirty="0">
+                <a:solidFill>
+                  <a:srgbClr val="5D6D7E"/>
+                </a:solidFill>
+              </a:rPr>
+              <a:t>Poetry, pyproject.toml, poetry.lock — environnement reproductible</a:t>
+            </a:r>
+          </a:p>
+        </p:txBody>
+      </p:sp>
+      <p:sp>
+        <p:nvSpPr>
+          <p:cNvPr id="25" name="Card3">
+            <a:extLst>
+              <a:ext uri="{FF2B5EF4-FFF2-40B4-BE49-F238E27FC236}">
+                <a16:creationId xmlns:a16="http://schemas.microsoft.com/office/drawing/2014/main" id="{27AAF48E-2FD9-7D89-295B-0D8018D5D522}"/>
+              </a:ext>
+            </a:extLst>
+          </p:cNvPr>
+          <p:cNvSpPr/>
+          <p:nvPr/>
+        </p:nvSpPr>
+        <p:spPr>
+          <a:xfrm>
+            <a:off x="274320" y="2624328"/>
+            <a:ext cx="4114800" cy="685800"/>
+          </a:xfrm>
+          <a:prstGeom prst="roundRect">
+            <a:avLst>
+              <a:gd name="adj" fmla="val 10667"/>
+            </a:avLst>
+          </a:prstGeom>
+          <a:solidFill>
+            <a:srgbClr val="F2F6FA"/>
+          </a:solidFill>
+          <a:ln/>
+        </p:spPr>
+      </p:sp>
+      <p:sp>
+        <p:nvSpPr>
+          <p:cNvPr id="26" name="Num3">
+            <a:extLst>
+              <a:ext uri="{FF2B5EF4-FFF2-40B4-BE49-F238E27FC236}">
+                <a16:creationId xmlns:a16="http://schemas.microsoft.com/office/drawing/2014/main" id="{094A45E6-A055-C528-5F2B-3B269B3FE52B}"/>
+              </a:ext>
+            </a:extLst>
+          </p:cNvPr>
+          <p:cNvSpPr/>
+          <p:nvPr/>
+        </p:nvSpPr>
+        <p:spPr>
+          <a:xfrm>
+            <a:off x="384048" y="2715768"/>
+            <a:ext cx="457200" cy="502920"/>
+          </a:xfrm>
+          <a:prstGeom prst="roundRect">
+            <a:avLst>
+              <a:gd name="adj" fmla="val 12000"/>
+            </a:avLst>
+          </a:prstGeom>
+          <a:solidFill>
+            <a:srgbClr val="028090"/>
+          </a:solidFill>
+          <a:ln/>
+        </p:spPr>
+      </p:sp>
+      <p:sp>
+        <p:nvSpPr>
+          <p:cNvPr id="27" name="NumTxt3">
+            <a:extLst>
+              <a:ext uri="{FF2B5EF4-FFF2-40B4-BE49-F238E27FC236}">
+                <a16:creationId xmlns:a16="http://schemas.microsoft.com/office/drawing/2014/main" id="{6E7358C8-6E27-37F8-9B45-4D899FD26C37}"/>
+              </a:ext>
+            </a:extLst>
+          </p:cNvPr>
+          <p:cNvSpPr/>
+          <p:nvPr/>
+        </p:nvSpPr>
+        <p:spPr>
+          <a:xfrm>
+            <a:off x="384048" y="2715768"/>
+            <a:ext cx="457200" cy="502920"/>
+          </a:xfrm>
+          <a:prstGeom prst="rect">
+            <a:avLst/>
+          </a:prstGeom>
+          <a:noFill/>
+          <a:ln/>
+        </p:spPr>
+        <p:txBody>
+          <a:bodyPr wrap="square" lIns="0" tIns="0" rIns="0" bIns="0" rtlCol="0" anchor="ctr"/>
+          <a:lstStyle/>
+          <a:p>
+            <a:pPr marL="0" indent="0" algn="ctr">
+              <a:buNone/>
+            </a:pPr>
+            <a:r>
+              <a:rPr lang="fr-FR" sz="1200" b="1" dirty="0">
+                <a:solidFill>
+                  <a:srgbClr val="FFFFFF"/>
+                </a:solidFill>
+              </a:rPr>
+              <a:t>3</a:t>
+            </a:r>
+          </a:p>
+        </p:txBody>
+      </p:sp>
+      <p:sp>
+        <p:nvSpPr>
+          <p:cNvPr id="28" name="Title3">
+            <a:extLst>
+              <a:ext uri="{FF2B5EF4-FFF2-40B4-BE49-F238E27FC236}">
+                <a16:creationId xmlns:a16="http://schemas.microsoft.com/office/drawing/2014/main" id="{D6460E36-F6E0-FCF4-2043-7AD7A2F27886}"/>
+              </a:ext>
+            </a:extLst>
+          </p:cNvPr>
+          <p:cNvSpPr/>
+          <p:nvPr/>
+        </p:nvSpPr>
+        <p:spPr>
+          <a:xfrm>
+            <a:off x="932688" y="2697480"/>
+            <a:ext cx="3200400" cy="320040"/>
+          </a:xfrm>
+          <a:prstGeom prst="rect">
+            <a:avLst/>
+          </a:prstGeom>
+          <a:noFill/>
+          <a:ln/>
+        </p:spPr>
+        <p:txBody>
+          <a:bodyPr wrap="square" rtlCol="0" anchor="ctr"/>
+          <a:lstStyle/>
+          <a:p>
+            <a:pPr marL="0" indent="0">
+              <a:buNone/>
+            </a:pPr>
+            <a:r>
+              <a:rPr lang="fr-FR" sz="1200" b="1" dirty="0">
+                <a:solidFill>
+                  <a:srgbClr val="1F4E79"/>
+                </a:solidFill>
+              </a:rPr>
+              <a:t>Scripts de pre-traitement et vectorisation</a:t>
+            </a:r>
+          </a:p>
+        </p:txBody>
+      </p:sp>
+      <p:sp>
+        <p:nvSpPr>
+          <p:cNvPr id="29" name="Desc3">
+            <a:extLst>
+              <a:ext uri="{FF2B5EF4-FFF2-40B4-BE49-F238E27FC236}">
+                <a16:creationId xmlns:a16="http://schemas.microsoft.com/office/drawing/2014/main" id="{B277533C-6F53-2F16-2F9C-405AC7FAF325}"/>
+              </a:ext>
+            </a:extLst>
+          </p:cNvPr>
+          <p:cNvSpPr/>
+          <p:nvPr/>
+        </p:nvSpPr>
+        <p:spPr>
+          <a:xfrm>
+            <a:off x="932688" y="3008376"/>
+            <a:ext cx="3200400" cy="256032"/>
+          </a:xfrm>
+          <a:prstGeom prst="rect">
+            <a:avLst/>
+          </a:prstGeom>
+          <a:noFill/>
+          <a:ln/>
+        </p:spPr>
+        <p:txBody>
+          <a:bodyPr wrap="square" rtlCol="0" anchor="ctr"/>
+          <a:lstStyle/>
+          <a:p>
+            <a:pPr marL="0" indent="0">
+              <a:buNone/>
+            </a:pPr>
+            <a:r>
+              <a:rPr lang="fr-FR" sz="1000" dirty="0">
+                <a:solidFill>
+                  <a:srgbClr val="5D6D7E"/>
+                </a:solidFill>
+              </a:rPr>
+              <a:t>fetch, chunk, embed, index — avec docstrings integrees</a:t>
+            </a:r>
+          </a:p>
+        </p:txBody>
+      </p:sp>
+      <p:sp>
+        <p:nvSpPr>
+          <p:cNvPr id="35" name="Card4">
+            <a:extLst>
+              <a:ext uri="{FF2B5EF4-FFF2-40B4-BE49-F238E27FC236}">
+                <a16:creationId xmlns:a16="http://schemas.microsoft.com/office/drawing/2014/main" id="{D31A94C9-8557-09E5-8F53-0DA4723F0C75}"/>
+              </a:ext>
+            </a:extLst>
+          </p:cNvPr>
+          <p:cNvSpPr/>
+          <p:nvPr/>
+        </p:nvSpPr>
+        <p:spPr>
+          <a:xfrm>
+            <a:off x="274320" y="3410712"/>
+            <a:ext cx="4114800" cy="685800"/>
+          </a:xfrm>
+          <a:prstGeom prst="roundRect">
+            <a:avLst>
+              <a:gd name="adj" fmla="val 10667"/>
+            </a:avLst>
+          </a:prstGeom>
+          <a:solidFill>
+            <a:srgbClr val="F2F6FA"/>
+          </a:solidFill>
+          <a:ln/>
+        </p:spPr>
+      </p:sp>
+      <p:sp>
+        <p:nvSpPr>
+          <p:cNvPr id="36" name="Num4">
+            <a:extLst>
+              <a:ext uri="{FF2B5EF4-FFF2-40B4-BE49-F238E27FC236}">
+                <a16:creationId xmlns:a16="http://schemas.microsoft.com/office/drawing/2014/main" id="{BF6D25AE-730C-0606-D3A3-7EE2A897A254}"/>
+              </a:ext>
+            </a:extLst>
+          </p:cNvPr>
+          <p:cNvSpPr/>
+          <p:nvPr/>
+        </p:nvSpPr>
+        <p:spPr>
+          <a:xfrm>
+            <a:off x="384048" y="3502152"/>
+            <a:ext cx="457200" cy="502920"/>
+          </a:xfrm>
+          <a:prstGeom prst="roundRect">
+            <a:avLst>
+              <a:gd name="adj" fmla="val 12000"/>
+            </a:avLst>
+          </a:prstGeom>
+          <a:solidFill>
+            <a:srgbClr val="1F4E79"/>
+          </a:solidFill>
+          <a:ln/>
+        </p:spPr>
+      </p:sp>
+      <p:sp>
+        <p:nvSpPr>
+          <p:cNvPr id="37" name="NumTxt4">
+            <a:extLst>
+              <a:ext uri="{FF2B5EF4-FFF2-40B4-BE49-F238E27FC236}">
+                <a16:creationId xmlns:a16="http://schemas.microsoft.com/office/drawing/2014/main" id="{53945532-2877-5E49-4521-EDA93578109A}"/>
+              </a:ext>
+            </a:extLst>
+          </p:cNvPr>
+          <p:cNvSpPr/>
+          <p:nvPr/>
+        </p:nvSpPr>
+        <p:spPr>
+          <a:xfrm>
+            <a:off x="384048" y="3502152"/>
+            <a:ext cx="457200" cy="502920"/>
+          </a:xfrm>
+          <a:prstGeom prst="rect">
+            <a:avLst/>
+          </a:prstGeom>
+          <a:noFill/>
+          <a:ln/>
+        </p:spPr>
+        <p:txBody>
+          <a:bodyPr wrap="square" lIns="0" tIns="0" rIns="0" bIns="0" rtlCol="0" anchor="ctr"/>
+          <a:lstStyle/>
+          <a:p>
+            <a:pPr marL="0" indent="0" algn="ctr">
+              <a:buNone/>
+            </a:pPr>
+            <a:r>
+              <a:rPr lang="fr-FR" sz="1200" b="1" dirty="0">
+                <a:solidFill>
+                  <a:srgbClr val="FFFFFF"/>
+                </a:solidFill>
+              </a:rPr>
+              <a:t>4</a:t>
+            </a:r>
+          </a:p>
+        </p:txBody>
+      </p:sp>
+      <p:sp>
+        <p:nvSpPr>
+          <p:cNvPr id="38" name="Title4">
+            <a:extLst>
+              <a:ext uri="{FF2B5EF4-FFF2-40B4-BE49-F238E27FC236}">
+                <a16:creationId xmlns:a16="http://schemas.microsoft.com/office/drawing/2014/main" id="{7DBE6EBD-D642-43A5-E083-3A2E239C1617}"/>
+              </a:ext>
+            </a:extLst>
+          </p:cNvPr>
+          <p:cNvSpPr/>
+          <p:nvPr/>
+        </p:nvSpPr>
+        <p:spPr>
+          <a:xfrm>
+            <a:off x="932688" y="3483864"/>
+            <a:ext cx="3200400" cy="320040"/>
+          </a:xfrm>
+          <a:prstGeom prst="rect">
+            <a:avLst/>
+          </a:prstGeom>
+          <a:noFill/>
+          <a:ln/>
+        </p:spPr>
+        <p:txBody>
+          <a:bodyPr wrap="square" rtlCol="0" anchor="ctr"/>
+          <a:lstStyle/>
+          <a:p>
+            <a:pPr marL="0" indent="0">
+              <a:buNone/>
+            </a:pPr>
+            <a:r>
+              <a:rPr lang="fr-FR" sz="1200" b="1" dirty="0">
+                <a:solidFill>
+                  <a:srgbClr val="1F4E79"/>
+                </a:solidFill>
+              </a:rPr>
+              <a:t>Tests unitaires integres au pipeline</a:t>
+            </a:r>
+          </a:p>
+        </p:txBody>
+      </p:sp>
+      <p:sp>
+        <p:nvSpPr>
+          <p:cNvPr id="39" name="Desc4">
+            <a:extLst>
+              <a:ext uri="{FF2B5EF4-FFF2-40B4-BE49-F238E27FC236}">
+                <a16:creationId xmlns:a16="http://schemas.microsoft.com/office/drawing/2014/main" id="{4E362993-FDF6-73F9-3B5E-7D5EA45C90A7}"/>
+              </a:ext>
+            </a:extLst>
+          </p:cNvPr>
+          <p:cNvSpPr/>
+          <p:nvPr/>
+        </p:nvSpPr>
+        <p:spPr>
+          <a:xfrm>
+            <a:off x="932688" y="3794760"/>
+            <a:ext cx="3200400" cy="256032"/>
+          </a:xfrm>
+          <a:prstGeom prst="rect">
+            <a:avLst/>
+          </a:prstGeom>
+          <a:noFill/>
+          <a:ln/>
+        </p:spPr>
+        <p:txBody>
+          <a:bodyPr wrap="square" rtlCol="0" anchor="ctr"/>
+          <a:lstStyle/>
+          <a:p>
+            <a:pPr marL="0" indent="0">
+              <a:buNone/>
+            </a:pPr>
+            <a:r>
+              <a:rPr lang="fr-FR" sz="1000" dirty="0">
+                <a:solidFill>
+                  <a:srgbClr val="5D6D7E"/>
+                </a:solidFill>
+              </a:rPr>
+              <a:t>25 tests pytest — date, localisation, index, qualite chunks</a:t>
+            </a:r>
+          </a:p>
+        </p:txBody>
+      </p:sp>
+      <p:sp>
+        <p:nvSpPr>
+          <p:cNvPr id="45" name="Card5">
+            <a:extLst>
+              <a:ext uri="{FF2B5EF4-FFF2-40B4-BE49-F238E27FC236}">
+                <a16:creationId xmlns:a16="http://schemas.microsoft.com/office/drawing/2014/main" id="{CED640BE-4F1F-5A77-4B0D-1E2C5A7C740F}"/>
+              </a:ext>
+            </a:extLst>
+          </p:cNvPr>
+          <p:cNvSpPr/>
+          <p:nvPr/>
+        </p:nvSpPr>
+        <p:spPr>
+          <a:xfrm>
+            <a:off x="4754880" y="1051560"/>
+            <a:ext cx="4114800" cy="685800"/>
+          </a:xfrm>
+          <a:prstGeom prst="roundRect">
+            <a:avLst>
+              <a:gd name="adj" fmla="val 10667"/>
+            </a:avLst>
+          </a:prstGeom>
+          <a:solidFill>
+            <a:srgbClr val="F2F6FA"/>
+          </a:solidFill>
+          <a:ln/>
+        </p:spPr>
+      </p:sp>
+      <p:sp>
+        <p:nvSpPr>
+          <p:cNvPr id="46" name="Num5">
+            <a:extLst>
+              <a:ext uri="{FF2B5EF4-FFF2-40B4-BE49-F238E27FC236}">
+                <a16:creationId xmlns:a16="http://schemas.microsoft.com/office/drawing/2014/main" id="{9C2A2E10-7BC6-B335-2B2D-A6D78BB307D5}"/>
+              </a:ext>
+            </a:extLst>
+          </p:cNvPr>
+          <p:cNvSpPr/>
+          <p:nvPr/>
+        </p:nvSpPr>
+        <p:spPr>
+          <a:xfrm>
+            <a:off x="4864608" y="1143000"/>
+            <a:ext cx="457200" cy="502920"/>
+          </a:xfrm>
+          <a:prstGeom prst="roundRect">
+            <a:avLst>
+              <a:gd name="adj" fmla="val 12000"/>
+            </a:avLst>
+          </a:prstGeom>
+          <a:solidFill>
+            <a:srgbClr val="2E75B6"/>
+          </a:solidFill>
+          <a:ln/>
+        </p:spPr>
+      </p:sp>
+      <p:sp>
+        <p:nvSpPr>
+          <p:cNvPr id="47" name="NumTxt5">
+            <a:extLst>
+              <a:ext uri="{FF2B5EF4-FFF2-40B4-BE49-F238E27FC236}">
+                <a16:creationId xmlns:a16="http://schemas.microsoft.com/office/drawing/2014/main" id="{42BA2D11-CB05-FDA4-3FF3-CA04CD8E1EB7}"/>
+              </a:ext>
+            </a:extLst>
+          </p:cNvPr>
+          <p:cNvSpPr/>
+          <p:nvPr/>
+        </p:nvSpPr>
+        <p:spPr>
+          <a:xfrm>
+            <a:off x="4864608" y="1143000"/>
+            <a:ext cx="457200" cy="502920"/>
+          </a:xfrm>
+          <a:prstGeom prst="rect">
+            <a:avLst/>
+          </a:prstGeom>
+          <a:noFill/>
+          <a:ln/>
+        </p:spPr>
+        <p:txBody>
+          <a:bodyPr wrap="square" lIns="0" tIns="0" rIns="0" bIns="0" rtlCol="0" anchor="ctr"/>
+          <a:lstStyle/>
+          <a:p>
+            <a:pPr marL="0" indent="0" algn="ctr">
+              <a:buNone/>
+            </a:pPr>
+            <a:r>
+              <a:rPr lang="fr-FR" sz="1200" b="1" dirty="0">
+                <a:solidFill>
+                  <a:srgbClr val="FFFFFF"/>
+                </a:solidFill>
+              </a:rPr>
+              <a:t>5</a:t>
+            </a:r>
+          </a:p>
+        </p:txBody>
+      </p:sp>
+      <p:sp>
+        <p:nvSpPr>
+          <p:cNvPr id="48" name="Title5">
+            <a:extLst>
+              <a:ext uri="{FF2B5EF4-FFF2-40B4-BE49-F238E27FC236}">
+                <a16:creationId xmlns:a16="http://schemas.microsoft.com/office/drawing/2014/main" id="{E9BFD86D-24A3-1FFE-7DC9-3F900EB72969}"/>
+              </a:ext>
+            </a:extLst>
+          </p:cNvPr>
+          <p:cNvSpPr/>
+          <p:nvPr/>
+        </p:nvSpPr>
+        <p:spPr>
+          <a:xfrm>
+            <a:off x="5413248" y="1124712"/>
+            <a:ext cx="3200400" cy="320040"/>
+          </a:xfrm>
+          <a:prstGeom prst="rect">
+            <a:avLst/>
+          </a:prstGeom>
+          <a:noFill/>
+          <a:ln/>
+        </p:spPr>
+        <p:txBody>
+          <a:bodyPr wrap="square" rtlCol="0" anchor="ctr"/>
+          <a:lstStyle/>
+          <a:p>
+            <a:pPr marL="0" indent="0">
+              <a:buNone/>
+            </a:pPr>
+            <a:r>
+              <a:rPr lang="fr-FR" sz="1200" b="1" dirty="0">
+                <a:solidFill>
+                  <a:srgbClr val="1F4E79"/>
+                </a:solidFill>
+              </a:rPr>
+              <a:t>Rapport technique</a:t>
+            </a:r>
+          </a:p>
+        </p:txBody>
+      </p:sp>
+      <p:sp>
+        <p:nvSpPr>
+          <p:cNvPr id="49" name="Desc5">
+            <a:extLst>
+              <a:ext uri="{FF2B5EF4-FFF2-40B4-BE49-F238E27FC236}">
+                <a16:creationId xmlns:a16="http://schemas.microsoft.com/office/drawing/2014/main" id="{D65E0CDA-C8D7-C5AF-0F87-4EA92BA609FA}"/>
+              </a:ext>
+            </a:extLst>
+          </p:cNvPr>
+          <p:cNvSpPr/>
+          <p:nvPr/>
+        </p:nvSpPr>
+        <p:spPr>
+          <a:xfrm>
+            <a:off x="5413248" y="1435608"/>
+            <a:ext cx="3200400" cy="256032"/>
+          </a:xfrm>
+          <a:prstGeom prst="rect">
+            <a:avLst/>
+          </a:prstGeom>
+          <a:noFill/>
+          <a:ln/>
+        </p:spPr>
+        <p:txBody>
+          <a:bodyPr wrap="square" rtlCol="0" anchor="ctr"/>
+          <a:lstStyle/>
+          <a:p>
+            <a:pPr marL="0" indent="0">
+              <a:buNone/>
+            </a:pPr>
+            <a:r>
+              <a:rPr lang="fr-FR" sz="1000" dirty="0">
+                <a:solidFill>
+                  <a:srgbClr val="5D6D7E"/>
+                </a:solidFill>
+              </a:rPr>
+              <a:t>Architecture, choix techniques, resultats, recommandations</a:t>
+            </a:r>
+          </a:p>
+        </p:txBody>
+      </p:sp>
+      <p:sp>
+        <p:nvSpPr>
+          <p:cNvPr id="55" name="Card6">
+            <a:extLst>
+              <a:ext uri="{FF2B5EF4-FFF2-40B4-BE49-F238E27FC236}">
+                <a16:creationId xmlns:a16="http://schemas.microsoft.com/office/drawing/2014/main" id="{CA4F9888-62B0-5396-95ED-713197FE9460}"/>
+              </a:ext>
+            </a:extLst>
+          </p:cNvPr>
+          <p:cNvSpPr/>
+          <p:nvPr/>
+        </p:nvSpPr>
+        <p:spPr>
+          <a:xfrm>
+            <a:off x="4754880" y="1837944"/>
+            <a:ext cx="4114800" cy="685800"/>
+          </a:xfrm>
+          <a:prstGeom prst="roundRect">
+            <a:avLst>
+              <a:gd name="adj" fmla="val 10667"/>
+            </a:avLst>
+          </a:prstGeom>
+          <a:solidFill>
+            <a:srgbClr val="F2F6FA"/>
+          </a:solidFill>
+          <a:ln/>
+        </p:spPr>
+      </p:sp>
+      <p:sp>
+        <p:nvSpPr>
+          <p:cNvPr id="56" name="Num6">
+            <a:extLst>
+              <a:ext uri="{FF2B5EF4-FFF2-40B4-BE49-F238E27FC236}">
+                <a16:creationId xmlns:a16="http://schemas.microsoft.com/office/drawing/2014/main" id="{77E92353-E7CB-5137-1DB4-583CD1F2E6FA}"/>
+              </a:ext>
+            </a:extLst>
+          </p:cNvPr>
+          <p:cNvSpPr/>
+          <p:nvPr/>
+        </p:nvSpPr>
+        <p:spPr>
+          <a:xfrm>
+            <a:off x="4864608" y="1929384"/>
+            <a:ext cx="457200" cy="502920"/>
+          </a:xfrm>
+          <a:prstGeom prst="roundRect">
+            <a:avLst>
+              <a:gd name="adj" fmla="val 12000"/>
+            </a:avLst>
+          </a:prstGeom>
+          <a:solidFill>
+            <a:srgbClr val="028090"/>
+          </a:solidFill>
+          <a:ln/>
+        </p:spPr>
+      </p:sp>
+      <p:sp>
+        <p:nvSpPr>
+          <p:cNvPr id="57" name="NumTxt6">
+            <a:extLst>
+              <a:ext uri="{FF2B5EF4-FFF2-40B4-BE49-F238E27FC236}">
+                <a16:creationId xmlns:a16="http://schemas.microsoft.com/office/drawing/2014/main" id="{010FFA98-56E9-B345-C8D1-9E6705AD0851}"/>
+              </a:ext>
+            </a:extLst>
+          </p:cNvPr>
+          <p:cNvSpPr/>
+          <p:nvPr/>
+        </p:nvSpPr>
+        <p:spPr>
+          <a:xfrm>
+            <a:off x="4864608" y="1929384"/>
+            <a:ext cx="457200" cy="502920"/>
+          </a:xfrm>
+          <a:prstGeom prst="rect">
+            <a:avLst/>
+          </a:prstGeom>
+          <a:noFill/>
+          <a:ln/>
+        </p:spPr>
+        <p:txBody>
+          <a:bodyPr wrap="square" lIns="0" tIns="0" rIns="0" bIns="0" rtlCol="0" anchor="ctr"/>
+          <a:lstStyle/>
+          <a:p>
+            <a:pPr marL="0" indent="0" algn="ctr">
+              <a:buNone/>
+            </a:pPr>
+            <a:r>
+              <a:rPr lang="fr-FR" sz="1200" b="1" dirty="0">
+                <a:solidFill>
+                  <a:srgbClr val="FFFFFF"/>
+                </a:solidFill>
+              </a:rPr>
+              <a:t>6</a:t>
+            </a:r>
+          </a:p>
+        </p:txBody>
+      </p:sp>
+      <p:sp>
+        <p:nvSpPr>
+          <p:cNvPr id="58" name="Title6">
+            <a:extLst>
+              <a:ext uri="{FF2B5EF4-FFF2-40B4-BE49-F238E27FC236}">
+                <a16:creationId xmlns:a16="http://schemas.microsoft.com/office/drawing/2014/main" id="{23DBD1A3-9F1E-90FF-83CA-A4A61187798A}"/>
+              </a:ext>
+            </a:extLst>
+          </p:cNvPr>
+          <p:cNvSpPr/>
+          <p:nvPr/>
+        </p:nvSpPr>
+        <p:spPr>
+          <a:xfrm>
+            <a:off x="5413248" y="1911096"/>
+            <a:ext cx="3200400" cy="320040"/>
+          </a:xfrm>
+          <a:prstGeom prst="rect">
+            <a:avLst/>
+          </a:prstGeom>
+          <a:noFill/>
+          <a:ln/>
+        </p:spPr>
+        <p:txBody>
+          <a:bodyPr wrap="square" rtlCol="0" anchor="ctr"/>
+          <a:lstStyle/>
+          <a:p>
+            <a:pPr marL="0" indent="0">
+              <a:buNone/>
+            </a:pPr>
+            <a:r>
+              <a:rPr lang="fr-FR" sz="1200" b="1" dirty="0">
+                <a:solidFill>
+                  <a:srgbClr val="1F4E79"/>
+                </a:solidFill>
+              </a:rPr>
+              <a:t>Code du systeme RAG</a:t>
+            </a:r>
+          </a:p>
+        </p:txBody>
+      </p:sp>
+      <p:sp>
+        <p:nvSpPr>
+          <p:cNvPr id="59" name="Desc6">
+            <a:extLst>
+              <a:ext uri="{FF2B5EF4-FFF2-40B4-BE49-F238E27FC236}">
+                <a16:creationId xmlns:a16="http://schemas.microsoft.com/office/drawing/2014/main" id="{43AFA956-6599-4B42-9C82-BDB0AF67C985}"/>
+              </a:ext>
+            </a:extLst>
+          </p:cNvPr>
+          <p:cNvSpPr/>
+          <p:nvPr/>
+        </p:nvSpPr>
+        <p:spPr>
+          <a:xfrm>
+            <a:off x="5413248" y="2221992"/>
+            <a:ext cx="3200400" cy="256032"/>
+          </a:xfrm>
+          <a:prstGeom prst="rect">
+            <a:avLst/>
+          </a:prstGeom>
+          <a:noFill/>
+          <a:ln/>
+        </p:spPr>
+        <p:txBody>
+          <a:bodyPr wrap="square" rtlCol="0" anchor="ctr"/>
+          <a:lstStyle/>
+          <a:p>
+            <a:pPr marL="0" indent="0">
+              <a:buNone/>
+            </a:pPr>
+            <a:r>
+              <a:rPr lang="fr-FR" sz="1000" dirty="0">
+                <a:solidFill>
+                  <a:srgbClr val="5D6D7E"/>
+                </a:solidFill>
+              </a:rPr>
+              <a:t>Chaine complete LangChain + Mistral + FAISS versionnee Git</a:t>
+            </a:r>
+          </a:p>
+        </p:txBody>
+      </p:sp>
+      <p:sp>
+        <p:nvSpPr>
+          <p:cNvPr id="65" name="Card7">
+            <a:extLst>
+              <a:ext uri="{FF2B5EF4-FFF2-40B4-BE49-F238E27FC236}">
+                <a16:creationId xmlns:a16="http://schemas.microsoft.com/office/drawing/2014/main" id="{66577EF0-7E1C-82FD-1FF1-01CD820D81D3}"/>
+              </a:ext>
+            </a:extLst>
+          </p:cNvPr>
+          <p:cNvSpPr/>
+          <p:nvPr/>
+        </p:nvSpPr>
+        <p:spPr>
+          <a:xfrm>
+            <a:off x="4754880" y="2624328"/>
+            <a:ext cx="4114800" cy="685800"/>
+          </a:xfrm>
+          <a:prstGeom prst="roundRect">
+            <a:avLst>
+              <a:gd name="adj" fmla="val 10667"/>
+            </a:avLst>
+          </a:prstGeom>
+          <a:solidFill>
+            <a:srgbClr val="F2F6FA"/>
+          </a:solidFill>
+          <a:ln/>
+        </p:spPr>
+      </p:sp>
+      <p:sp>
+        <p:nvSpPr>
+          <p:cNvPr id="66" name="Num7">
+            <a:extLst>
+              <a:ext uri="{FF2B5EF4-FFF2-40B4-BE49-F238E27FC236}">
+                <a16:creationId xmlns:a16="http://schemas.microsoft.com/office/drawing/2014/main" id="{39044C20-C9FE-D665-D167-03AF35AEAEEE}"/>
+              </a:ext>
+            </a:extLst>
+          </p:cNvPr>
+          <p:cNvSpPr/>
+          <p:nvPr/>
+        </p:nvSpPr>
+        <p:spPr>
+          <a:xfrm>
+            <a:off x="4864608" y="2715768"/>
+            <a:ext cx="457200" cy="502920"/>
+          </a:xfrm>
+          <a:prstGeom prst="roundRect">
+            <a:avLst>
+              <a:gd name="adj" fmla="val 12000"/>
+            </a:avLst>
+          </a:prstGeom>
+          <a:solidFill>
+            <a:srgbClr val="1F4E79"/>
+          </a:solidFill>
+          <a:ln/>
+        </p:spPr>
+      </p:sp>
+      <p:sp>
+        <p:nvSpPr>
+          <p:cNvPr id="67" name="NumTxt7">
+            <a:extLst>
+              <a:ext uri="{FF2B5EF4-FFF2-40B4-BE49-F238E27FC236}">
+                <a16:creationId xmlns:a16="http://schemas.microsoft.com/office/drawing/2014/main" id="{61F73B06-C9E7-EED6-1B96-EA771A3ED17C}"/>
+              </a:ext>
+            </a:extLst>
+          </p:cNvPr>
+          <p:cNvSpPr/>
+          <p:nvPr/>
+        </p:nvSpPr>
+        <p:spPr>
+          <a:xfrm>
+            <a:off x="4864608" y="2715768"/>
+            <a:ext cx="457200" cy="502920"/>
+          </a:xfrm>
+          <a:prstGeom prst="rect">
+            <a:avLst/>
+          </a:prstGeom>
+          <a:noFill/>
+          <a:ln/>
+        </p:spPr>
+        <p:txBody>
+          <a:bodyPr wrap="square" lIns="0" tIns="0" rIns="0" bIns="0" rtlCol="0" anchor="ctr"/>
+          <a:lstStyle/>
+          <a:p>
+            <a:pPr marL="0" indent="0" algn="ctr">
+              <a:buNone/>
+            </a:pPr>
+            <a:r>
+              <a:rPr lang="fr-FR" sz="1200" b="1" dirty="0">
+                <a:solidFill>
+                  <a:srgbClr val="FFFFFF"/>
+                </a:solidFill>
+              </a:rPr>
+              <a:t>7</a:t>
+            </a:r>
+          </a:p>
+        </p:txBody>
+      </p:sp>
+      <p:sp>
+        <p:nvSpPr>
+          <p:cNvPr id="68" name="Title7">
+            <a:extLst>
+              <a:ext uri="{FF2B5EF4-FFF2-40B4-BE49-F238E27FC236}">
+                <a16:creationId xmlns:a16="http://schemas.microsoft.com/office/drawing/2014/main" id="{43BD2D4D-B257-E0E4-8B2B-D78A91F36161}"/>
+              </a:ext>
+            </a:extLst>
+          </p:cNvPr>
+          <p:cNvSpPr/>
+          <p:nvPr/>
+        </p:nvSpPr>
+        <p:spPr>
+          <a:xfrm>
+            <a:off x="5413248" y="2697480"/>
+            <a:ext cx="3200400" cy="320040"/>
+          </a:xfrm>
+          <a:prstGeom prst="rect">
+            <a:avLst/>
+          </a:prstGeom>
+          <a:noFill/>
+          <a:ln/>
+        </p:spPr>
+        <p:txBody>
+          <a:bodyPr wrap="square" rtlCol="0" anchor="ctr"/>
+          <a:lstStyle/>
+          <a:p>
+            <a:pPr marL="0" indent="0">
+              <a:buNone/>
+            </a:pPr>
+            <a:r>
+              <a:rPr lang="fr-FR" sz="1200" b="1" dirty="0">
+                <a:solidFill>
+                  <a:srgbClr val="1F4E79"/>
+                </a:solidFill>
+              </a:rPr>
+              <a:t>Presentation PowerPoint</a:t>
+            </a:r>
+          </a:p>
+        </p:txBody>
+      </p:sp>
+      <p:sp>
+        <p:nvSpPr>
+          <p:cNvPr id="69" name="Desc7">
+            <a:extLst>
+              <a:ext uri="{FF2B5EF4-FFF2-40B4-BE49-F238E27FC236}">
+                <a16:creationId xmlns:a16="http://schemas.microsoft.com/office/drawing/2014/main" id="{43C92354-2169-8ECC-59CE-05EAB5DFF49D}"/>
+              </a:ext>
+            </a:extLst>
+          </p:cNvPr>
+          <p:cNvSpPr/>
+          <p:nvPr/>
+        </p:nvSpPr>
+        <p:spPr>
+          <a:xfrm>
+            <a:off x="5413248" y="3008376"/>
+            <a:ext cx="3200400" cy="256032"/>
+          </a:xfrm>
+          <a:prstGeom prst="rect">
+            <a:avLst/>
+          </a:prstGeom>
+          <a:noFill/>
+          <a:ln/>
+        </p:spPr>
+        <p:txBody>
+          <a:bodyPr wrap="square" rtlCol="0" anchor="ctr"/>
+          <a:lstStyle/>
+          <a:p>
+            <a:pPr marL="0" indent="0">
+              <a:buNone/>
+            </a:pPr>
+            <a:r>
+              <a:rPr lang="fr-FR" sz="1000" dirty="0">
+                <a:solidFill>
+                  <a:srgbClr val="5D6D7E"/>
+                </a:solidFill>
+              </a:rPr>
+              <a:t>10-15 diapositives — concept, resultats, demo, recommandations</a:t>
+            </a:r>
+          </a:p>
+        </p:txBody>
+      </p:sp>
+      <p:sp>
+        <p:nvSpPr>
+          <p:cNvPr id="76" name="Text 1">
+            <a:extLst>
+              <a:ext uri="{FF2B5EF4-FFF2-40B4-BE49-F238E27FC236}">
+                <a16:creationId xmlns:a16="http://schemas.microsoft.com/office/drawing/2014/main" id="{2AEF46E8-BF84-BC3D-EBC9-0F71FDD87F40}"/>
+              </a:ext>
+            </a:extLst>
+          </p:cNvPr>
+          <p:cNvSpPr/>
+          <p:nvPr/>
+        </p:nvSpPr>
+        <p:spPr>
+          <a:xfrm>
+            <a:off x="457200" y="10533"/>
+            <a:ext cx="8412480" cy="914400"/>
+          </a:xfrm>
+          <a:prstGeom prst="rect">
+            <a:avLst/>
+          </a:prstGeom>
+          <a:noFill/>
+          <a:ln/>
+        </p:spPr>
+        <p:txBody>
+          <a:bodyPr wrap="square" rtlCol="0" anchor="ctr"/>
+          <a:lstStyle/>
+          <a:p>
+            <a:pPr marL="0" indent="0">
+              <a:buNone/>
+            </a:pPr>
+            <a:r>
+              <a:rPr lang="fr-FR" sz="2200" b="1" dirty="0">
+                <a:solidFill>
+                  <a:srgbClr val="FFFFFF"/>
+                </a:solidFill>
+              </a:rPr>
+              <a:t>LIVRABLES SOUMIS</a:t>
+            </a:r>
+            <a:endParaRPr lang="fr-FR" sz="2200" dirty="0"/>
+          </a:p>
+        </p:txBody>
+      </p:sp>
+      <p:sp>
+        <p:nvSpPr>
+          <p:cNvPr id="77" name="Shape 0">
+            <a:extLst>
+              <a:ext uri="{FF2B5EF4-FFF2-40B4-BE49-F238E27FC236}">
+                <a16:creationId xmlns:a16="http://schemas.microsoft.com/office/drawing/2014/main" id="{E475820E-4DCD-0F3B-F4FB-259EE2118BC9}"/>
+              </a:ext>
+            </a:extLst>
+          </p:cNvPr>
+          <p:cNvSpPr/>
+          <p:nvPr/>
+        </p:nvSpPr>
+        <p:spPr>
+          <a:xfrm>
+            <a:off x="0" y="-44335"/>
+            <a:ext cx="9144000" cy="914400"/>
+          </a:xfrm>
+          <a:prstGeom prst="rect">
+            <a:avLst/>
+          </a:prstGeom>
+          <a:solidFill>
+            <a:srgbClr val="1F4E79"/>
+          </a:solidFill>
+          <a:ln/>
+        </p:spPr>
+      </p:sp>
+      <p:sp>
+        <p:nvSpPr>
+          <p:cNvPr id="79" name="TextBox 78">
+            <a:extLst>
+              <a:ext uri="{FF2B5EF4-FFF2-40B4-BE49-F238E27FC236}">
+                <a16:creationId xmlns:a16="http://schemas.microsoft.com/office/drawing/2014/main" id="{B6084F38-5A20-F56A-69EB-D267D5CBF544}"/>
+              </a:ext>
+            </a:extLst>
+          </p:cNvPr>
+          <p:cNvSpPr txBox="1"/>
+          <p:nvPr/>
+        </p:nvSpPr>
+        <p:spPr>
+          <a:xfrm>
+            <a:off x="0" y="98401"/>
+            <a:ext cx="4613564" cy="369332"/>
+          </a:xfrm>
+          <a:prstGeom prst="rect">
+            <a:avLst/>
+          </a:prstGeom>
+          <a:noFill/>
+        </p:spPr>
+        <p:txBody>
+          <a:bodyPr wrap="square">
+            <a:spAutoFit/>
+          </a:bodyPr>
+          <a:lstStyle/>
+          <a:p>
+            <a:pPr marL="0" indent="0">
+              <a:buNone/>
+            </a:pPr>
+            <a:r>
+              <a:rPr lang="fr-FR" sz="1800" b="1" dirty="0">
+                <a:solidFill>
+                  <a:srgbClr val="FFFFFF"/>
+                </a:solidFill>
+              </a:rPr>
+              <a:t>LIVRABLES SOUMIS</a:t>
+            </a:r>
+            <a:endParaRPr lang="fr-FR" sz="1800" dirty="0"/>
           </a:p>
         </p:txBody>
       </p:sp>
     </p:spTree>
+    <p:extLst>
+      <p:ext uri="{BB962C8B-B14F-4D97-AF65-F5344CB8AC3E}">
+        <p14:creationId xmlns:p14="http://schemas.microsoft.com/office/powerpoint/2010/main" val="2744804691"/>
+      </p:ext>
+    </p:extLst>
   </p:cSld>
   <p:clrMapOvr>
     <a:masterClrMapping/>
@@ -9003,7 +8656,7 @@
                 <a:ea typeface="Cambria" pitchFamily="34" charset="-122"/>
                 <a:cs typeface="Cambria" pitchFamily="34" charset="-120"/>
               </a:rPr>
-              <a:t>9 651</a:t>
+              <a:t>10 025</a:t>
             </a:r>
             <a:endParaRPr lang="en-US" sz="3000" dirty="0"/>
           </a:p>
@@ -9100,7 +8753,7 @@
                 <a:ea typeface="Cambria" pitchFamily="34" charset="-122"/>
                 <a:cs typeface="Cambria" pitchFamily="34" charset="-120"/>
               </a:rPr>
-              <a:t>1 740</a:t>
+              <a:t>1 643</a:t>
             </a:r>
             <a:endParaRPr lang="en-US" sz="3000" dirty="0"/>
           </a:p>
@@ -9582,15 +9235,7 @@
 
 <file path=ppt/slides/slide6.xml><?xml version="1.0" encoding="utf-8"?>
 <p:sld xmlns:a="http://schemas.openxmlformats.org/drawingml/2006/main" xmlns:r="http://schemas.openxmlformats.org/officeDocument/2006/relationships" xmlns:p="http://schemas.openxmlformats.org/presentationml/2006/main">
-  <p:cSld name="LangChain">
-    <p:bg>
-      <p:bgPr>
-        <a:solidFill>
-          <a:srgbClr val="FFFFFF"/>
-        </a:solidFill>
-        <a:effectLst/>
-      </p:bgPr>
-    </p:bg>
+  <p:cSld>
     <p:spTree>
       <p:nvGrpSpPr>
         <p:cNvPr id="1" name=""/>
@@ -9607,7 +9252,7 @@
       </p:grpSpPr>
       <p:sp>
         <p:nvSpPr>
-          <p:cNvPr id="2" name="Header"/>
+          <p:cNvPr id="2" name="Shape 0"/>
           <p:cNvSpPr/>
           <p:nvPr/>
         </p:nvSpPr>
@@ -9627,7 +9272,7 @@
       </p:sp>
       <p:sp>
         <p:nvSpPr>
-          <p:cNvPr id="3" name="HeaderText"/>
+          <p:cNvPr id="3" name="Text 1"/>
           <p:cNvSpPr/>
           <p:nvPr/>
         </p:nvSpPr>
@@ -9650,103 +9295,100 @@
               <a:buNone/>
             </a:pPr>
             <a:r>
-              <a:rPr lang="fr-FR" sz="2200" b="1" dirty="0">
+              <a:rPr lang="en-US" sz="2200" b="1" dirty="0">
                 <a:solidFill>
                   <a:srgbClr val="FFFFFF"/>
                 </a:solidFill>
               </a:rPr>
-              <a:t>POURQUOI LANGCHAIN  |  ORCHESTRATION DU PIPELINE RAG</a:t>
-            </a:r>
-          </a:p>
-        </p:txBody>
-      </p:sp>
-      <p:sp>
-        <p:nvSpPr>
-          <p:cNvPr id="10" name="LeftCard"/>
+              <a:t>CHOIX TECHNIQUES</a:t>
+            </a:r>
+            <a:endParaRPr lang="en-US" sz="2200" dirty="0"/>
+          </a:p>
+        </p:txBody>
+      </p:sp>
+      <p:sp>
+        <p:nvSpPr>
+          <p:cNvPr id="4" name="Shape 2"/>
           <p:cNvSpPr/>
           <p:nvPr/>
         </p:nvSpPr>
         <p:spPr>
           <a:xfrm>
             <a:off x="274320" y="1051560"/>
-            <a:ext cx="4114800" cy="4100400"/>
+            <a:ext cx="2697480" cy="1783080"/>
           </a:xfrm>
           <a:prstGeom prst="roundRect">
             <a:avLst>
-              <a:gd name="adj" fmla="val 8000"/>
+              <a:gd name="adj" fmla="val 5128"/>
             </a:avLst>
           </a:prstGeom>
           <a:solidFill>
             <a:srgbClr val="F2F6FA"/>
           </a:solidFill>
           <a:ln/>
-        </p:spPr>
-      </p:sp>
-      <p:sp>
-        <p:nvSpPr>
-          <p:cNvPr id="11" name="IconCircle"/>
-          <p:cNvSpPr/>
-          <p:nvPr/>
-        </p:nvSpPr>
-        <p:spPr>
-          <a:xfrm>
-            <a:off x="457200" y="1234440"/>
-            <a:ext cx="548640" cy="548640"/>
+          <a:effectLst>
+            <a:outerShdw blurRad="101600" dist="38100" dir="2700000" algn="bl" rotWithShape="0">
+              <a:srgbClr val="000000">
+                <a:alpha val="12000"/>
+              </a:srgbClr>
+            </a:outerShdw>
+          </a:effectLst>
+        </p:spPr>
+      </p:sp>
+      <p:sp>
+        <p:nvSpPr>
+          <p:cNvPr id="5" name="Shape 3"/>
+          <p:cNvSpPr/>
+          <p:nvPr/>
+        </p:nvSpPr>
+        <p:spPr>
+          <a:xfrm>
+            <a:off x="384048" y="1143000"/>
+            <a:ext cx="502920" cy="502920"/>
           </a:xfrm>
           <a:prstGeom prst="ellipse">
             <a:avLst/>
           </a:prstGeom>
           <a:solidFill>
-            <a:srgbClr val="028090"/>
-          </a:solidFill>
-          <a:ln/>
-        </p:spPr>
-      </p:sp>
-      <p:sp>
-        <p:nvSpPr>
-          <p:cNvPr id="12" name="IconText"/>
-          <p:cNvSpPr/>
-          <p:nvPr/>
-        </p:nvSpPr>
-        <p:spPr>
-          <a:xfrm>
-            <a:off x="457200" y="1234440"/>
-            <a:ext cx="548640" cy="548640"/>
-          </a:xfrm>
-          <a:prstGeom prst="rect">
-            <a:avLst/>
-          </a:prstGeom>
-          <a:noFill/>
-          <a:ln/>
-        </p:spPr>
-        <p:txBody>
-          <a:bodyPr wrap="square" lIns="0" tIns="0" rIns="0" bIns="0" rtlCol="0" anchor="ctr"/>
-          <a:lstStyle/>
-          <a:p>
-            <a:pPr marL="0" indent="0" algn="ctr">
-              <a:buNone/>
-            </a:pPr>
-            <a:r>
-              <a:rPr lang="fr-FR" sz="1800" b="1" dirty="0">
-                <a:solidFill>
-                  <a:srgbClr val="FFFFFF"/>
-                </a:solidFill>
-              </a:rPr>
-              <a:t>LC</a:t>
-            </a:r>
-          </a:p>
-        </p:txBody>
-      </p:sp>
-      <p:sp>
-        <p:nvSpPr>
-          <p:cNvPr id="13" name="LeftTitle"/>
-          <p:cNvSpPr/>
-          <p:nvPr/>
-        </p:nvSpPr>
-        <p:spPr>
-          <a:xfrm>
-            <a:off x="1097280" y="1270440"/>
-            <a:ext cx="3200400" cy="400000"/>
+            <a:srgbClr val="1F4E79"/>
+          </a:solidFill>
+          <a:ln/>
+        </p:spPr>
+      </p:sp>
+      <p:pic>
+        <p:nvPicPr>
+          <p:cNvPr id="6" name="Image 0" descr="preencoded.png"/>
+          <p:cNvPicPr>
+            <a:picLocks noChangeAspect="1"/>
+          </p:cNvPicPr>
+          <p:nvPr/>
+        </p:nvPicPr>
+        <p:blipFill>
+          <a:blip r:embed="rId3"/>
+          <a:stretch>
+            <a:fillRect/>
+          </a:stretch>
+        </p:blipFill>
+        <p:spPr>
+          <a:xfrm>
+            <a:off x="429768" y="1188720"/>
+            <a:ext cx="384048" cy="384048"/>
+          </a:xfrm>
+          <a:prstGeom prst="rect">
+            <a:avLst/>
+          </a:prstGeom>
+        </p:spPr>
+      </p:pic>
+      <p:sp>
+        <p:nvSpPr>
+          <p:cNvPr id="7" name="Text 4"/>
+          <p:cNvSpPr/>
+          <p:nvPr/>
+        </p:nvSpPr>
+        <p:spPr>
+          <a:xfrm>
+            <a:off x="960120" y="1143000"/>
+            <a:ext cx="1920240" cy="320040"/>
           </a:xfrm>
           <a:prstGeom prst="rect">
             <a:avLst/>
@@ -9762,26 +9404,27 @@
               <a:buNone/>
             </a:pPr>
             <a:r>
-              <a:rPr lang="fr-FR" sz="1600" b="1" dirty="0">
+              <a:rPr lang="en-US" sz="1200" b="1" dirty="0">
                 <a:solidFill>
                   <a:srgbClr val="1F4E79"/>
                 </a:solidFill>
               </a:rPr>
-              <a:t>LangChain</a:t>
-            </a:r>
-          </a:p>
-        </p:txBody>
-      </p:sp>
-      <p:sp>
-        <p:nvSpPr>
-          <p:cNvPr id="14" name="LeftSub"/>
-          <p:cNvSpPr/>
-          <p:nvPr/>
-        </p:nvSpPr>
-        <p:spPr>
-          <a:xfrm>
-            <a:off x="1097280" y="1620000"/>
-            <a:ext cx="3200400" cy="280000"/>
+              <a:t>mistral-embed</a:t>
+            </a:r>
+            <a:endParaRPr lang="en-US" sz="1200" dirty="0"/>
+          </a:p>
+        </p:txBody>
+      </p:sp>
+      <p:sp>
+        <p:nvSpPr>
+          <p:cNvPr id="8" name="Text 5"/>
+          <p:cNvSpPr/>
+          <p:nvPr/>
+        </p:nvSpPr>
+        <p:spPr>
+          <a:xfrm>
+            <a:off x="960120" y="1463040"/>
+            <a:ext cx="1920240" cy="274320"/>
           </a:xfrm>
           <a:prstGeom prst="rect">
             <a:avLst/>
@@ -9797,135 +9440,136 @@
               <a:buNone/>
             </a:pPr>
             <a:r>
-              <a:rPr lang="fr-FR" sz="1100" i="1" dirty="0">
+              <a:rPr lang="en-US" sz="1000" i="1" dirty="0">
                 <a:solidFill>
                   <a:srgbClr val="5D6D7E"/>
                 </a:solidFill>
               </a:rPr>
-              <a:t>Framework d'orchestration NLP</a:t>
-            </a:r>
-          </a:p>
-        </p:txBody>
-      </p:sp>
-      <p:sp>
-        <p:nvSpPr>
-          <p:cNvPr id="15" name="LeftBody"/>
-          <p:cNvSpPr/>
-          <p:nvPr/>
-        </p:nvSpPr>
-        <p:spPr>
-          <a:xfrm>
-            <a:off x="457200" y="2000000"/>
-            <a:ext cx="3840000" cy="3000000"/>
-          </a:xfrm>
-          <a:prstGeom prst="rect">
-            <a:avLst/>
-          </a:prstGeom>
-          <a:noFill/>
-          <a:ln/>
-        </p:spPr>
-        <p:txBody>
-          <a:bodyPr wrap="square" rtlCol="0" anchor="t"/>
-          <a:lstStyle/>
-          <a:p>
-            <a:pPr marL="228600" indent="-228600">
-              <a:buChar char="•"/>
-            </a:pPr>
-            <a:r>
-              <a:rPr lang="fr-FR" sz="1100" dirty="0">
+              <a:t>Modele d'embedding</a:t>
+            </a:r>
+            <a:endParaRPr lang="en-US" sz="1000" dirty="0"/>
+          </a:p>
+        </p:txBody>
+      </p:sp>
+      <p:sp>
+        <p:nvSpPr>
+          <p:cNvPr id="9" name="Text 6"/>
+          <p:cNvSpPr/>
+          <p:nvPr/>
+        </p:nvSpPr>
+        <p:spPr>
+          <a:xfrm>
+            <a:off x="384048" y="1828800"/>
+            <a:ext cx="2487168" cy="914400"/>
+          </a:xfrm>
+          <a:prstGeom prst="rect">
+            <a:avLst/>
+          </a:prstGeom>
+          <a:noFill/>
+          <a:ln/>
+        </p:spPr>
+        <p:txBody>
+          <a:bodyPr wrap="square" rtlCol="0" anchor="ctr"/>
+          <a:lstStyle/>
+          <a:p>
+            <a:pPr marL="0" indent="0">
+              <a:buNone/>
+            </a:pPr>
+            <a:r>
+              <a:rPr lang="en-US" sz="1000" dirty="0">
                 <a:solidFill>
                   <a:srgbClr val="5D6D7E"/>
                 </a:solidFill>
               </a:rPr>
-              <a:t>Interfaces standardisees pour LLMs et bases vectorielles — changer de fournisseur ne necessite que de modifier une ligne de configuration</a:t>
-            </a:r>
-          </a:p>
-          <a:p>
-            <a:pPr marL="228600" indent="-228600">
-              <a:buChar char="•"/>
-            </a:pPr>
-            <a:r>
-              <a:rPr lang="fr-FR" sz="1100" dirty="0">
-                <a:solidFill>
-                  <a:srgbClr val="5D6D7E"/>
-                </a:solidFill>
-              </a:rPr>
-              <a:t>Chaines RAG preconstruites (RetrievalQA) qui orchestrent recuperation et generation en quelques lignes</a:t>
-            </a:r>
-          </a:p>
-          <a:p>
-            <a:pPr marL="228600" indent="-228600">
-              <a:buChar char="•"/>
-            </a:pPr>
-            <a:r>
-              <a:rPr lang="fr-FR" sz="1100" dirty="0">
-                <a:solidFill>
-                  <a:srgbClr val="5D6D7E"/>
-                </a:solidFill>
-              </a:rPr>
-              <a:t>Vaste ecosysteme de connecteurs pour dizaines de fournisseurs LLM et bases vectorielles</a:t>
-            </a:r>
-          </a:p>
-          <a:p>
-            <a:pPr marL="228600" indent="-228600">
-              <a:buChar char="•"/>
-            </a:pPr>
-            <a:r>
-              <a:rPr lang="fr-FR" sz="1100" dirty="0">
-                <a:solidFill>
-                  <a:srgbClr val="5D6D7E"/>
-                </a:solidFill>
-              </a:rPr>
-              <a:t>Gestion native de l'historique conversationnel pour les versions multi-tours en production</a:t>
-            </a:r>
-          </a:p>
-          <a:p>
-            <a:pPr marL="228600" indent="-228600">
-              <a:buChar char="•"/>
-            </a:pPr>
-            <a:r>
-              <a:rPr lang="fr-FR" sz="1100" dirty="0">
-                <a:solidFill>
-                  <a:srgbClr val="5D6D7E"/>
-                </a:solidFill>
-              </a:rPr>
-              <a:t>Chaine unique et partagee : le meme module alimente le chatbot en direct et l'evaluation RAGAS</a:t>
-            </a:r>
-          </a:p>
-        </p:txBody>
-      </p:sp>
-      <p:sp>
-        <p:nvSpPr>
-          <p:cNvPr id="20" name="RightCard"/>
-          <p:cNvSpPr/>
-          <p:nvPr/>
-        </p:nvSpPr>
-        <p:spPr>
-          <a:xfrm>
-            <a:off x="4754880" y="1051560"/>
-            <a:ext cx="4114800" cy="4100400"/>
+              <a:t>1 024 dimensions. Support francais optimise. Meme fournisseur que le LLM pour la coherence de tokenisation.</a:t>
+            </a:r>
+            <a:endParaRPr lang="en-US" sz="1000" dirty="0"/>
+          </a:p>
+        </p:txBody>
+      </p:sp>
+      <p:sp>
+        <p:nvSpPr>
+          <p:cNvPr id="10" name="Shape 7"/>
+          <p:cNvSpPr/>
+          <p:nvPr/>
+        </p:nvSpPr>
+        <p:spPr>
+          <a:xfrm>
+            <a:off x="3154680" y="1051560"/>
+            <a:ext cx="2697480" cy="1783080"/>
           </a:xfrm>
           <a:prstGeom prst="roundRect">
             <a:avLst>
-              <a:gd name="adj" fmla="val 8000"/>
+              <a:gd name="adj" fmla="val 5128"/>
             </a:avLst>
           </a:prstGeom>
           <a:solidFill>
             <a:srgbClr val="F2F6FA"/>
           </a:solidFill>
           <a:ln/>
-        </p:spPr>
-      </p:sp>
-      <p:sp>
-        <p:nvSpPr>
-          <p:cNvPr id="21" name="RightTitle"/>
-          <p:cNvSpPr/>
-          <p:nvPr/>
-        </p:nvSpPr>
-        <p:spPr>
-          <a:xfrm>
-            <a:off x="5029200" y="1270440"/>
-            <a:ext cx="3657600" cy="400000"/>
+          <a:effectLst>
+            <a:outerShdw blurRad="101600" dist="38100" dir="2700000" algn="bl" rotWithShape="0">
+              <a:srgbClr val="000000">
+                <a:alpha val="12000"/>
+              </a:srgbClr>
+            </a:outerShdw>
+          </a:effectLst>
+        </p:spPr>
+      </p:sp>
+      <p:sp>
+        <p:nvSpPr>
+          <p:cNvPr id="11" name="Shape 8"/>
+          <p:cNvSpPr/>
+          <p:nvPr/>
+        </p:nvSpPr>
+        <p:spPr>
+          <a:xfrm>
+            <a:off x="3264408" y="1143000"/>
+            <a:ext cx="502920" cy="502920"/>
+          </a:xfrm>
+          <a:prstGeom prst="ellipse">
+            <a:avLst/>
+          </a:prstGeom>
+          <a:solidFill>
+            <a:srgbClr val="2E75B6"/>
+          </a:solidFill>
+          <a:ln/>
+        </p:spPr>
+      </p:sp>
+      <p:pic>
+        <p:nvPicPr>
+          <p:cNvPr id="12" name="Image 1" descr="preencoded.png"/>
+          <p:cNvPicPr>
+            <a:picLocks noChangeAspect="1"/>
+          </p:cNvPicPr>
+          <p:nvPr/>
+        </p:nvPicPr>
+        <p:blipFill>
+          <a:blip r:embed="rId4"/>
+          <a:stretch>
+            <a:fillRect/>
+          </a:stretch>
+        </p:blipFill>
+        <p:spPr>
+          <a:xfrm>
+            <a:off x="3310128" y="1188720"/>
+            <a:ext cx="384048" cy="384048"/>
+          </a:xfrm>
+          <a:prstGeom prst="rect">
+            <a:avLst/>
+          </a:prstGeom>
+        </p:spPr>
+      </p:pic>
+      <p:sp>
+        <p:nvSpPr>
+          <p:cNvPr id="13" name="Text 9"/>
+          <p:cNvSpPr/>
+          <p:nvPr/>
+        </p:nvSpPr>
+        <p:spPr>
+          <a:xfrm>
+            <a:off x="3840480" y="1143000"/>
+            <a:ext cx="1920240" cy="320040"/>
           </a:xfrm>
           <a:prstGeom prst="rect">
             <a:avLst/>
@@ -9941,109 +9585,353 @@
               <a:buNone/>
             </a:pPr>
             <a:r>
-              <a:rPr lang="fr-FR" sz="1400" b="1" dirty="0">
+              <a:rPr lang="en-US" sz="1200" b="1" dirty="0">
                 <a:solidFill>
                   <a:srgbClr val="1F4E79"/>
                 </a:solidFill>
               </a:rPr>
-              <a:t>Role dans ce projet</a:t>
-            </a:r>
-          </a:p>
-        </p:txBody>
-      </p:sp>
-      <p:sp>
-        <p:nvSpPr>
-          <p:cNvPr id="30" name="BlockA"/>
-          <p:cNvSpPr/>
-          <p:nvPr/>
-        </p:nvSpPr>
-        <p:spPr>
-          <a:xfrm>
-            <a:off x="4937400" y="1828800"/>
-            <a:ext cx="3657600" cy="914400"/>
+              <a:t>FAISS IndexFlatL2</a:t>
+            </a:r>
+            <a:endParaRPr lang="en-US" sz="1200" dirty="0"/>
+          </a:p>
+        </p:txBody>
+      </p:sp>
+      <p:sp>
+        <p:nvSpPr>
+          <p:cNvPr id="14" name="Text 10"/>
+          <p:cNvSpPr/>
+          <p:nvPr/>
+        </p:nvSpPr>
+        <p:spPr>
+          <a:xfrm>
+            <a:off x="3840480" y="1463040"/>
+            <a:ext cx="1920240" cy="274320"/>
+          </a:xfrm>
+          <a:prstGeom prst="rect">
+            <a:avLst/>
+          </a:prstGeom>
+          <a:noFill/>
+          <a:ln/>
+        </p:spPr>
+        <p:txBody>
+          <a:bodyPr wrap="square" rtlCol="0" anchor="ctr"/>
+          <a:lstStyle/>
+          <a:p>
+            <a:pPr marL="0" indent="0">
+              <a:buNone/>
+            </a:pPr>
+            <a:r>
+              <a:rPr lang="en-US" sz="1000" i="1" dirty="0">
+                <a:solidFill>
+                  <a:srgbClr val="5D6D7E"/>
+                </a:solidFill>
+              </a:rPr>
+              <a:t>Base vectorielle</a:t>
+            </a:r>
+            <a:endParaRPr lang="en-US" sz="1000" dirty="0"/>
+          </a:p>
+        </p:txBody>
+      </p:sp>
+      <p:sp>
+        <p:nvSpPr>
+          <p:cNvPr id="15" name="Text 11"/>
+          <p:cNvSpPr/>
+          <p:nvPr/>
+        </p:nvSpPr>
+        <p:spPr>
+          <a:xfrm>
+            <a:off x="3264408" y="1828800"/>
+            <a:ext cx="2487168" cy="914400"/>
+          </a:xfrm>
+          <a:prstGeom prst="rect">
+            <a:avLst/>
+          </a:prstGeom>
+          <a:noFill/>
+          <a:ln/>
+        </p:spPr>
+        <p:txBody>
+          <a:bodyPr wrap="square" rtlCol="0" anchor="ctr"/>
+          <a:lstStyle/>
+          <a:p>
+            <a:pPr marL="0" indent="0">
+              <a:buNone/>
+            </a:pPr>
+            <a:r>
+              <a:rPr lang="en-US" sz="1000" dirty="0">
+                <a:solidFill>
+                  <a:srgbClr val="5D6D7E"/>
+                </a:solidFill>
+              </a:rPr>
+              <a:t>Recherche exacte en moins de 1 ms sur 1 643 vecteurs. Zero configuration pour le POC. Scalable avec IVFFlat en production.</a:t>
+            </a:r>
+            <a:endParaRPr lang="en-US" sz="1000" dirty="0"/>
+          </a:p>
+        </p:txBody>
+      </p:sp>
+      <p:sp>
+        <p:nvSpPr>
+          <p:cNvPr id="16" name="Shape 12"/>
+          <p:cNvSpPr/>
+          <p:nvPr/>
+        </p:nvSpPr>
+        <p:spPr>
+          <a:xfrm>
+            <a:off x="6035040" y="1051560"/>
+            <a:ext cx="2697480" cy="1783080"/>
           </a:xfrm>
           <a:prstGeom prst="roundRect">
             <a:avLst>
-              <a:gd name="adj" fmla="val 6000"/>
+              <a:gd name="adj" fmla="val 5128"/>
             </a:avLst>
           </a:prstGeom>
           <a:solidFill>
-            <a:srgbClr val="FFFFFF"/>
-          </a:solidFill>
-          <a:ln w="9525">
-            <a:solidFill>
-              <a:srgbClr val="D3D1C7"/>
-            </a:solidFill>
-          </a:ln>
-        </p:spPr>
-      </p:sp>
-      <p:sp>
-        <p:nvSpPr>
-          <p:cNvPr id="31" name="BlockALabel"/>
-          <p:cNvSpPr/>
-          <p:nvPr/>
-        </p:nvSpPr>
-        <p:spPr>
-          <a:xfrm>
-            <a:off x="4937400" y="1828800"/>
-            <a:ext cx="548640" cy="914400"/>
+            <a:srgbClr val="F2F6FA"/>
+          </a:solidFill>
+          <a:ln/>
+          <a:effectLst>
+            <a:outerShdw blurRad="101600" dist="38100" dir="2700000" algn="bl" rotWithShape="0">
+              <a:srgbClr val="000000">
+                <a:alpha val="12000"/>
+              </a:srgbClr>
+            </a:outerShdw>
+          </a:effectLst>
+        </p:spPr>
+      </p:sp>
+      <p:sp>
+        <p:nvSpPr>
+          <p:cNvPr id="17" name="Shape 13"/>
+          <p:cNvSpPr/>
+          <p:nvPr/>
+        </p:nvSpPr>
+        <p:spPr>
+          <a:xfrm>
+            <a:off x="6144768" y="1143000"/>
+            <a:ext cx="502920" cy="502920"/>
+          </a:xfrm>
+          <a:prstGeom prst="ellipse">
+            <a:avLst/>
+          </a:prstGeom>
+          <a:solidFill>
+            <a:srgbClr val="028090"/>
+          </a:solidFill>
+          <a:ln/>
+        </p:spPr>
+      </p:sp>
+      <p:pic>
+        <p:nvPicPr>
+          <p:cNvPr id="18" name="Image 2" descr="preencoded.png"/>
+          <p:cNvPicPr>
+            <a:picLocks noChangeAspect="1"/>
+          </p:cNvPicPr>
+          <p:nvPr/>
+        </p:nvPicPr>
+        <p:blipFill>
+          <a:blip r:embed="rId5"/>
+          <a:stretch>
+            <a:fillRect/>
+          </a:stretch>
+        </p:blipFill>
+        <p:spPr>
+          <a:xfrm>
+            <a:off x="6190488" y="1188720"/>
+            <a:ext cx="384048" cy="384048"/>
+          </a:xfrm>
+          <a:prstGeom prst="rect">
+            <a:avLst/>
+          </a:prstGeom>
+        </p:spPr>
+      </p:pic>
+      <p:sp>
+        <p:nvSpPr>
+          <p:cNvPr id="19" name="Text 14"/>
+          <p:cNvSpPr/>
+          <p:nvPr/>
+        </p:nvSpPr>
+        <p:spPr>
+          <a:xfrm>
+            <a:off x="6720840" y="1143000"/>
+            <a:ext cx="1920240" cy="320040"/>
+          </a:xfrm>
+          <a:prstGeom prst="rect">
+            <a:avLst/>
+          </a:prstGeom>
+          <a:noFill/>
+          <a:ln/>
+        </p:spPr>
+        <p:txBody>
+          <a:bodyPr wrap="square" rtlCol="0" anchor="ctr"/>
+          <a:lstStyle/>
+          <a:p>
+            <a:pPr marL="0" indent="0">
+              <a:buNone/>
+            </a:pPr>
+            <a:r>
+              <a:rPr lang="en-US" sz="1200" b="1" dirty="0">
+                <a:solidFill>
+                  <a:srgbClr val="1F4E79"/>
+                </a:solidFill>
+              </a:rPr>
+              <a:t>mistral-small-latest</a:t>
+            </a:r>
+            <a:endParaRPr lang="en-US" sz="1200" dirty="0"/>
+          </a:p>
+        </p:txBody>
+      </p:sp>
+      <p:sp>
+        <p:nvSpPr>
+          <p:cNvPr id="20" name="Text 15"/>
+          <p:cNvSpPr/>
+          <p:nvPr/>
+        </p:nvSpPr>
+        <p:spPr>
+          <a:xfrm>
+            <a:off x="6720840" y="1463040"/>
+            <a:ext cx="1920240" cy="274320"/>
+          </a:xfrm>
+          <a:prstGeom prst="rect">
+            <a:avLst/>
+          </a:prstGeom>
+          <a:noFill/>
+          <a:ln/>
+        </p:spPr>
+        <p:txBody>
+          <a:bodyPr wrap="square" rtlCol="0" anchor="ctr"/>
+          <a:lstStyle/>
+          <a:p>
+            <a:pPr marL="0" indent="0">
+              <a:buNone/>
+            </a:pPr>
+            <a:r>
+              <a:rPr lang="en-US" sz="1000" i="1" dirty="0">
+                <a:solidFill>
+                  <a:srgbClr val="5D6D7E"/>
+                </a:solidFill>
+              </a:rPr>
+              <a:t>Modele de generation</a:t>
+            </a:r>
+            <a:endParaRPr lang="en-US" sz="1000" dirty="0"/>
+          </a:p>
+        </p:txBody>
+      </p:sp>
+      <p:sp>
+        <p:nvSpPr>
+          <p:cNvPr id="21" name="Text 16"/>
+          <p:cNvSpPr/>
+          <p:nvPr/>
+        </p:nvSpPr>
+        <p:spPr>
+          <a:xfrm>
+            <a:off x="6144768" y="1828800"/>
+            <a:ext cx="2487168" cy="914400"/>
+          </a:xfrm>
+          <a:prstGeom prst="rect">
+            <a:avLst/>
+          </a:prstGeom>
+          <a:noFill/>
+          <a:ln/>
+        </p:spPr>
+        <p:txBody>
+          <a:bodyPr wrap="square" rtlCol="0" anchor="ctr"/>
+          <a:lstStyle/>
+          <a:p>
+            <a:pPr marL="0" indent="0">
+              <a:buNone/>
+            </a:pPr>
+            <a:r>
+              <a:rPr lang="en-US" sz="1000" dirty="0">
+                <a:solidFill>
+                  <a:srgbClr val="5D6D7E"/>
+                </a:solidFill>
+              </a:rPr>
+              <a:t>Temperature 0,1. Niveau gratuit. Reponses en francais. Prompt systeme strict : zero hallucination.</a:t>
+            </a:r>
+            <a:endParaRPr lang="en-US" sz="1000" dirty="0"/>
+          </a:p>
+        </p:txBody>
+      </p:sp>
+      <p:sp>
+        <p:nvSpPr>
+          <p:cNvPr id="22" name="Shape 17"/>
+          <p:cNvSpPr/>
+          <p:nvPr/>
+        </p:nvSpPr>
+        <p:spPr>
+          <a:xfrm>
+            <a:off x="274320" y="2971800"/>
+            <a:ext cx="2697480" cy="1783080"/>
           </a:xfrm>
           <a:prstGeom prst="roundRect">
             <a:avLst>
-              <a:gd name="adj" fmla="val 6000"/>
+              <a:gd name="adj" fmla="val 5128"/>
             </a:avLst>
           </a:prstGeom>
           <a:solidFill>
-            <a:srgbClr val="028090"/>
-          </a:solidFill>
-          <a:ln/>
-        </p:spPr>
-      </p:sp>
-      <p:sp>
-        <p:nvSpPr>
-          <p:cNvPr id="32" name="BlockALabelTxt"/>
-          <p:cNvSpPr/>
-          <p:nvPr/>
-        </p:nvSpPr>
-        <p:spPr>
-          <a:xfrm>
-            <a:off x="4937400" y="1828800"/>
-            <a:ext cx="548640" cy="914400"/>
-          </a:xfrm>
-          <a:prstGeom prst="rect">
-            <a:avLst/>
-          </a:prstGeom>
-          <a:noFill/>
-          <a:ln/>
-        </p:spPr>
-        <p:txBody>
-          <a:bodyPr wrap="square" lIns="0" tIns="0" rIns="0" bIns="0" rtlCol="0" anchor="ctr"/>
-          <a:lstStyle/>
-          <a:p>
-            <a:pPr marL="0" indent="0" algn="ctr">
-              <a:buNone/>
-            </a:pPr>
-            <a:r>
-              <a:rPr lang="fr-FR" sz="800" b="1" dirty="0">
-                <a:solidFill>
-                  <a:srgbClr val="FFFFFF"/>
-                </a:solidFill>
-              </a:rPr>
-              <a:t>CHATBOT</a:t>
-            </a:r>
-          </a:p>
-        </p:txBody>
-      </p:sp>
-      <p:sp>
-        <p:nvSpPr>
-          <p:cNvPr id="33" name="BlockAText"/>
-          <p:cNvSpPr/>
-          <p:nvPr/>
-        </p:nvSpPr>
-        <p:spPr>
-          <a:xfrm>
-            <a:off x="5577480" y="1865880"/>
-            <a:ext cx="2926200" cy="840240"/>
+            <a:srgbClr val="F2F6FA"/>
+          </a:solidFill>
+          <a:ln/>
+          <a:effectLst>
+            <a:outerShdw blurRad="101600" dist="38100" dir="2700000" algn="bl" rotWithShape="0">
+              <a:srgbClr val="000000">
+                <a:alpha val="12000"/>
+              </a:srgbClr>
+            </a:outerShdw>
+          </a:effectLst>
+        </p:spPr>
+      </p:sp>
+      <p:sp>
+        <p:nvSpPr>
+          <p:cNvPr id="23" name="Shape 18"/>
+          <p:cNvSpPr/>
+          <p:nvPr/>
+        </p:nvSpPr>
+        <p:spPr>
+          <a:xfrm>
+            <a:off x="384048" y="3063240"/>
+            <a:ext cx="502920" cy="502920"/>
+          </a:xfrm>
+          <a:prstGeom prst="ellipse">
+            <a:avLst/>
+          </a:prstGeom>
+          <a:solidFill>
+            <a:srgbClr val="1F4E79"/>
+          </a:solidFill>
+          <a:ln/>
+        </p:spPr>
+      </p:sp>
+      <p:pic>
+        <p:nvPicPr>
+          <p:cNvPr id="24" name="Image 3" descr="preencoded.png"/>
+          <p:cNvPicPr>
+            <a:picLocks noChangeAspect="1"/>
+          </p:cNvPicPr>
+          <p:nvPr/>
+        </p:nvPicPr>
+        <p:blipFill>
+          <a:blip r:embed="rId6"/>
+          <a:stretch>
+            <a:fillRect/>
+          </a:stretch>
+        </p:blipFill>
+        <p:spPr>
+          <a:xfrm>
+            <a:off x="429768" y="3108960"/>
+            <a:ext cx="384048" cy="384048"/>
+          </a:xfrm>
+          <a:prstGeom prst="rect">
+            <a:avLst/>
+          </a:prstGeom>
+        </p:spPr>
+      </p:pic>
+      <p:sp>
+        <p:nvSpPr>
+          <p:cNvPr id="25" name="Text 19"/>
+          <p:cNvSpPr/>
+          <p:nvPr/>
+        </p:nvSpPr>
+        <p:spPr>
+          <a:xfrm>
+            <a:off x="960120" y="3063240"/>
+            <a:ext cx="1920240" cy="320040"/>
           </a:xfrm>
           <a:prstGeom prst="rect">
             <a:avLst/>
@@ -10059,122 +9947,353 @@
               <a:buNone/>
             </a:pPr>
             <a:r>
-              <a:rPr lang="fr-FR" sz="1100" b="1" dirty="0">
+              <a:rPr lang="en-US" sz="1200" b="1" dirty="0">
                 <a:solidFill>
                   <a:srgbClr val="1F4E79"/>
                 </a:solidFill>
               </a:rPr>
-              <a:t>Chaine LCEL unique</a:t>
-            </a:r>
-          </a:p>
+              <a:t>Poetry + Python 3.13</a:t>
+            </a:r>
+            <a:endParaRPr lang="en-US" sz="1200" dirty="0"/>
+          </a:p>
+        </p:txBody>
+      </p:sp>
+      <p:sp>
+        <p:nvSpPr>
+          <p:cNvPr id="26" name="Text 20"/>
+          <p:cNvSpPr/>
+          <p:nvPr/>
+        </p:nvSpPr>
+        <p:spPr>
+          <a:xfrm>
+            <a:off x="960120" y="3383280"/>
+            <a:ext cx="1920240" cy="274320"/>
+          </a:xfrm>
+          <a:prstGeom prst="rect">
+            <a:avLst/>
+          </a:prstGeom>
+          <a:noFill/>
+          <a:ln/>
+        </p:spPr>
+        <p:txBody>
+          <a:bodyPr wrap="square" rtlCol="0" anchor="ctr"/>
+          <a:lstStyle/>
           <a:p>
             <a:pPr marL="0" indent="0">
               <a:buNone/>
             </a:pPr>
             <a:r>
-              <a:rPr lang="fr-FR" sz="1000" dirty="0">
+              <a:rPr lang="en-US" sz="1000" i="1" dirty="0">
                 <a:solidFill>
                   <a:srgbClr val="5D6D7E"/>
                 </a:solidFill>
               </a:rPr>
-              <a:t>embed → retrieve → generate — utilisee par le chatbot ET l'evaluation</a:t>
-            </a:r>
-          </a:p>
-        </p:txBody>
-      </p:sp>
-      <p:sp>
-        <p:nvSpPr>
-          <p:cNvPr id="40" name="BlockB"/>
-          <p:cNvSpPr/>
-          <p:nvPr/>
-        </p:nvSpPr>
-        <p:spPr>
-          <a:xfrm>
-            <a:off x="4937400" y="2835000"/>
-            <a:ext cx="3657600" cy="914400"/>
+              <a:t>Environnement</a:t>
+            </a:r>
+            <a:endParaRPr lang="en-US" sz="1000" dirty="0"/>
+          </a:p>
+        </p:txBody>
+      </p:sp>
+      <p:sp>
+        <p:nvSpPr>
+          <p:cNvPr id="27" name="Text 21"/>
+          <p:cNvSpPr/>
+          <p:nvPr/>
+        </p:nvSpPr>
+        <p:spPr>
+          <a:xfrm>
+            <a:off x="384048" y="3749040"/>
+            <a:ext cx="2487168" cy="914400"/>
+          </a:xfrm>
+          <a:prstGeom prst="rect">
+            <a:avLst/>
+          </a:prstGeom>
+          <a:noFill/>
+          <a:ln/>
+        </p:spPr>
+        <p:txBody>
+          <a:bodyPr wrap="square" rtlCol="0" anchor="ctr"/>
+          <a:lstStyle/>
+          <a:p>
+            <a:pPr marL="0" indent="0">
+              <a:buNone/>
+            </a:pPr>
+            <a:r>
+              <a:rPr lang="en-US" sz="1000" dirty="0">
+                <a:solidFill>
+                  <a:srgbClr val="5D6D7E"/>
+                </a:solidFill>
+              </a:rPr>
+              <a:t>Lock file pour la reproducibilite. Contrainte Python bornee a 3.13-3.15. mistralai epingle a 1.2.5.</a:t>
+            </a:r>
+            <a:endParaRPr lang="en-US" sz="1000" dirty="0"/>
+          </a:p>
+        </p:txBody>
+      </p:sp>
+      <p:sp>
+        <p:nvSpPr>
+          <p:cNvPr id="28" name="Shape 22"/>
+          <p:cNvSpPr/>
+          <p:nvPr/>
+        </p:nvSpPr>
+        <p:spPr>
+          <a:xfrm>
+            <a:off x="3154680" y="2971800"/>
+            <a:ext cx="2697480" cy="1783080"/>
           </a:xfrm>
           <a:prstGeom prst="roundRect">
             <a:avLst>
-              <a:gd name="adj" fmla="val 6000"/>
+              <a:gd name="adj" fmla="val 5128"/>
             </a:avLst>
           </a:prstGeom>
           <a:solidFill>
-            <a:srgbClr val="FFFFFF"/>
-          </a:solidFill>
-          <a:ln w="9525">
-            <a:solidFill>
-              <a:srgbClr val="D3D1C7"/>
-            </a:solidFill>
-          </a:ln>
-        </p:spPr>
-      </p:sp>
-      <p:sp>
-        <p:nvSpPr>
-          <p:cNvPr id="41" name="BlockBLabel"/>
-          <p:cNvSpPr/>
-          <p:nvPr/>
-        </p:nvSpPr>
-        <p:spPr>
-          <a:xfrm>
-            <a:off x="4937400" y="2835000"/>
-            <a:ext cx="548640" cy="914400"/>
+            <a:srgbClr val="F2F6FA"/>
+          </a:solidFill>
+          <a:ln/>
+          <a:effectLst>
+            <a:outerShdw blurRad="101600" dist="38100" dir="2700000" algn="bl" rotWithShape="0">
+              <a:srgbClr val="000000">
+                <a:alpha val="12000"/>
+              </a:srgbClr>
+            </a:outerShdw>
+          </a:effectLst>
+        </p:spPr>
+      </p:sp>
+      <p:sp>
+        <p:nvSpPr>
+          <p:cNvPr id="29" name="Shape 23"/>
+          <p:cNvSpPr/>
+          <p:nvPr/>
+        </p:nvSpPr>
+        <p:spPr>
+          <a:xfrm>
+            <a:off x="3264408" y="3063240"/>
+            <a:ext cx="502920" cy="502920"/>
+          </a:xfrm>
+          <a:prstGeom prst="ellipse">
+            <a:avLst/>
+          </a:prstGeom>
+          <a:solidFill>
+            <a:srgbClr val="2E75B6"/>
+          </a:solidFill>
+          <a:ln/>
+        </p:spPr>
+      </p:sp>
+      <p:pic>
+        <p:nvPicPr>
+          <p:cNvPr id="30" name="Image 4" descr="preencoded.png"/>
+          <p:cNvPicPr>
+            <a:picLocks noChangeAspect="1"/>
+          </p:cNvPicPr>
+          <p:nvPr/>
+        </p:nvPicPr>
+        <p:blipFill>
+          <a:blip r:embed="rId7"/>
+          <a:stretch>
+            <a:fillRect/>
+          </a:stretch>
+        </p:blipFill>
+        <p:spPr>
+          <a:xfrm>
+            <a:off x="3310128" y="3108960"/>
+            <a:ext cx="384048" cy="384048"/>
+          </a:xfrm>
+          <a:prstGeom prst="rect">
+            <a:avLst/>
+          </a:prstGeom>
+        </p:spPr>
+      </p:pic>
+      <p:sp>
+        <p:nvSpPr>
+          <p:cNvPr id="31" name="Text 24"/>
+          <p:cNvSpPr/>
+          <p:nvPr/>
+        </p:nvSpPr>
+        <p:spPr>
+          <a:xfrm>
+            <a:off x="3840480" y="3063240"/>
+            <a:ext cx="1920240" cy="320040"/>
+          </a:xfrm>
+          <a:prstGeom prst="rect">
+            <a:avLst/>
+          </a:prstGeom>
+          <a:noFill/>
+          <a:ln/>
+        </p:spPr>
+        <p:txBody>
+          <a:bodyPr wrap="square" rtlCol="0" anchor="ctr"/>
+          <a:lstStyle/>
+          <a:p>
+            <a:pPr marL="0" indent="0">
+              <a:buNone/>
+            </a:pPr>
+            <a:r>
+              <a:rPr lang="en-US" sz="1200" b="1" dirty="0">
+                <a:solidFill>
+                  <a:srgbClr val="1F4E79"/>
+                </a:solidFill>
+              </a:rPr>
+              <a:t>1 chunk par evenement</a:t>
+            </a:r>
+            <a:endParaRPr lang="en-US" sz="1200" dirty="0"/>
+          </a:p>
+        </p:txBody>
+      </p:sp>
+      <p:sp>
+        <p:nvSpPr>
+          <p:cNvPr id="32" name="Text 25"/>
+          <p:cNvSpPr/>
+          <p:nvPr/>
+        </p:nvSpPr>
+        <p:spPr>
+          <a:xfrm>
+            <a:off x="3840480" y="3383280"/>
+            <a:ext cx="1920240" cy="274320"/>
+          </a:xfrm>
+          <a:prstGeom prst="rect">
+            <a:avLst/>
+          </a:prstGeom>
+          <a:noFill/>
+          <a:ln/>
+        </p:spPr>
+        <p:txBody>
+          <a:bodyPr wrap="square" rtlCol="0" anchor="ctr"/>
+          <a:lstStyle/>
+          <a:p>
+            <a:pPr marL="0" indent="0">
+              <a:buNone/>
+            </a:pPr>
+            <a:r>
+              <a:rPr lang="en-US" sz="1000" i="1" dirty="0">
+                <a:solidFill>
+                  <a:srgbClr val="5D6D7E"/>
+                </a:solidFill>
+              </a:rPr>
+              <a:t>Strategie de chunking</a:t>
+            </a:r>
+            <a:endParaRPr lang="en-US" sz="1000" dirty="0"/>
+          </a:p>
+        </p:txBody>
+      </p:sp>
+      <p:sp>
+        <p:nvSpPr>
+          <p:cNvPr id="33" name="Text 26"/>
+          <p:cNvSpPr/>
+          <p:nvPr/>
+        </p:nvSpPr>
+        <p:spPr>
+          <a:xfrm>
+            <a:off x="3264408" y="3749040"/>
+            <a:ext cx="2487168" cy="914400"/>
+          </a:xfrm>
+          <a:prstGeom prst="rect">
+            <a:avLst/>
+          </a:prstGeom>
+          <a:noFill/>
+          <a:ln/>
+        </p:spPr>
+        <p:txBody>
+          <a:bodyPr wrap="square" rtlCol="0" anchor="ctr"/>
+          <a:lstStyle/>
+          <a:p>
+            <a:pPr marL="0" indent="0">
+              <a:buNone/>
+            </a:pPr>
+            <a:r>
+              <a:rPr lang="en-US" sz="1000" dirty="0">
+                <a:solidFill>
+                  <a:srgbClr val="5D6D7E"/>
+                </a:solidFill>
+              </a:rPr>
+              <a:t>Mediane 50 caracteres. Pas de decoupage recursif. Concatenation titre + description + lieu + date.</a:t>
+            </a:r>
+            <a:endParaRPr lang="en-US" sz="1000" dirty="0"/>
+          </a:p>
+        </p:txBody>
+      </p:sp>
+      <p:sp>
+        <p:nvSpPr>
+          <p:cNvPr id="34" name="Shape 27"/>
+          <p:cNvSpPr/>
+          <p:nvPr/>
+        </p:nvSpPr>
+        <p:spPr>
+          <a:xfrm>
+            <a:off x="6035040" y="2971800"/>
+            <a:ext cx="2697480" cy="1783080"/>
           </a:xfrm>
           <a:prstGeom prst="roundRect">
             <a:avLst>
-              <a:gd name="adj" fmla="val 6000"/>
+              <a:gd name="adj" fmla="val 5128"/>
             </a:avLst>
           </a:prstGeom>
           <a:solidFill>
-            <a:srgbClr val="2E75B6"/>
-          </a:solidFill>
-          <a:ln/>
-        </p:spPr>
-      </p:sp>
-      <p:sp>
-        <p:nvSpPr>
-          <p:cNvPr id="42" name="BlockBLabelTxt"/>
-          <p:cNvSpPr/>
-          <p:nvPr/>
-        </p:nvSpPr>
-        <p:spPr>
-          <a:xfrm>
-            <a:off x="4937400" y="2835000"/>
-            <a:ext cx="548640" cy="914400"/>
-          </a:xfrm>
-          <a:prstGeom prst="rect">
-            <a:avLst/>
-          </a:prstGeom>
-          <a:noFill/>
-          <a:ln/>
-        </p:spPr>
-        <p:txBody>
-          <a:bodyPr wrap="square" lIns="0" tIns="0" rIns="0" bIns="0" rtlCol="0" anchor="ctr"/>
-          <a:lstStyle/>
-          <a:p>
-            <a:pPr marL="0" indent="0" algn="ctr">
-              <a:buNone/>
-            </a:pPr>
-            <a:r>
-              <a:rPr lang="fr-FR" sz="650" b="1" dirty="0">
-                <a:solidFill>
-                  <a:srgbClr val="FFFFFF"/>
-                </a:solidFill>
-              </a:rPr>
-              <a:t>EVALUATION</a:t>
-            </a:r>
-          </a:p>
-        </p:txBody>
-      </p:sp>
-      <p:sp>
-        <p:nvSpPr>
-          <p:cNvPr id="43" name="BlockBText"/>
-          <p:cNvSpPr/>
-          <p:nvPr/>
-        </p:nvSpPr>
-        <p:spPr>
-          <a:xfrm>
-            <a:off x="5577480" y="2872080"/>
-            <a:ext cx="2926200" cy="840240"/>
+            <a:srgbClr val="F2F6FA"/>
+          </a:solidFill>
+          <a:ln/>
+          <a:effectLst>
+            <a:outerShdw blurRad="101600" dist="38100" dir="2700000" algn="bl" rotWithShape="0">
+              <a:srgbClr val="000000">
+                <a:alpha val="12000"/>
+              </a:srgbClr>
+            </a:outerShdw>
+          </a:effectLst>
+        </p:spPr>
+      </p:sp>
+      <p:sp>
+        <p:nvSpPr>
+          <p:cNvPr id="35" name="Shape 28"/>
+          <p:cNvSpPr/>
+          <p:nvPr/>
+        </p:nvSpPr>
+        <p:spPr>
+          <a:xfrm>
+            <a:off x="6144768" y="3063240"/>
+            <a:ext cx="502920" cy="502920"/>
+          </a:xfrm>
+          <a:prstGeom prst="ellipse">
+            <a:avLst/>
+          </a:prstGeom>
+          <a:solidFill>
+            <a:srgbClr val="028090"/>
+          </a:solidFill>
+          <a:ln/>
+        </p:spPr>
+      </p:sp>
+      <p:pic>
+        <p:nvPicPr>
+          <p:cNvPr id="36" name="Image 5" descr="preencoded.png"/>
+          <p:cNvPicPr>
+            <a:picLocks noChangeAspect="1"/>
+          </p:cNvPicPr>
+          <p:nvPr/>
+        </p:nvPicPr>
+        <p:blipFill>
+          <a:blip r:embed="rId8"/>
+          <a:stretch>
+            <a:fillRect/>
+          </a:stretch>
+        </p:blipFill>
+        <p:spPr>
+          <a:xfrm>
+            <a:off x="6190488" y="3108960"/>
+            <a:ext cx="384048" cy="384048"/>
+          </a:xfrm>
+          <a:prstGeom prst="rect">
+            <a:avLst/>
+          </a:prstGeom>
+        </p:spPr>
+      </p:pic>
+      <p:sp>
+        <p:nvSpPr>
+          <p:cNvPr id="37" name="Text 29"/>
+          <p:cNvSpPr/>
+          <p:nvPr/>
+        </p:nvSpPr>
+        <p:spPr>
+          <a:xfrm>
+            <a:off x="6720840" y="3063240"/>
+            <a:ext cx="1920240" cy="320040"/>
           </a:xfrm>
           <a:prstGeom prst="rect">
             <a:avLst/>
@@ -10190,65 +10309,63 @@
               <a:buNone/>
             </a:pPr>
             <a:r>
-              <a:rPr lang="fr-FR" sz="1100" b="1" dirty="0">
+              <a:rPr lang="en-US" sz="1200" b="1" dirty="0">
                 <a:solidFill>
                   <a:srgbClr val="1F4E79"/>
                 </a:solidFill>
               </a:rPr>
-              <a:t>Meme chaine RAGAS</a:t>
-            </a:r>
-          </a:p>
+              <a:t>Streamlit</a:t>
+            </a:r>
+            <a:endParaRPr lang="en-US" sz="1200" dirty="0"/>
+          </a:p>
+        </p:txBody>
+      </p:sp>
+      <p:sp>
+        <p:nvSpPr>
+          <p:cNvPr id="38" name="Text 30"/>
+          <p:cNvSpPr/>
+          <p:nvPr/>
+        </p:nvSpPr>
+        <p:spPr>
+          <a:xfrm>
+            <a:off x="6720840" y="3383280"/>
+            <a:ext cx="1920240" cy="274320"/>
+          </a:xfrm>
+          <a:prstGeom prst="rect">
+            <a:avLst/>
+          </a:prstGeom>
+          <a:noFill/>
+          <a:ln/>
+        </p:spPr>
+        <p:txBody>
+          <a:bodyPr wrap="square" rtlCol="0" anchor="ctr"/>
+          <a:lstStyle/>
           <a:p>
             <a:pPr marL="0" indent="0">
               <a:buNone/>
             </a:pPr>
             <a:r>
-              <a:rPr lang="fr-FR" sz="1000" dirty="0">
+              <a:rPr lang="en-US" sz="1000" i="1" dirty="0">
                 <a:solidFill>
                   <a:srgbClr val="5D6D7E"/>
                 </a:solidFill>
               </a:rPr>
-              <a:t>30 questions annotees evaluees sur la chaine exacte du chatbot</a:t>
-            </a:r>
-          </a:p>
-        </p:txBody>
-      </p:sp>
-      <p:sp>
-        <p:nvSpPr>
-          <p:cNvPr id="50" name="BlockC"/>
-          <p:cNvSpPr/>
-          <p:nvPr/>
-        </p:nvSpPr>
-        <p:spPr>
-          <a:xfrm>
-            <a:off x="4937400" y="3841200"/>
-            <a:ext cx="3657600" cy="914400"/>
-          </a:xfrm>
-          <a:prstGeom prst="roundRect">
-            <a:avLst>
-              <a:gd name="adj" fmla="val 6000"/>
-            </a:avLst>
-          </a:prstGeom>
-          <a:solidFill>
-            <a:srgbClr val="EBF3FB"/>
-          </a:solidFill>
-          <a:ln w="9525">
-            <a:solidFill>
-              <a:srgbClr val="185FA5"/>
-            </a:solidFill>
-          </a:ln>
-        </p:spPr>
-      </p:sp>
-      <p:sp>
-        <p:nvSpPr>
-          <p:cNvPr id="51" name="BlockCText"/>
-          <p:cNvSpPr/>
-          <p:nvPr/>
-        </p:nvSpPr>
-        <p:spPr>
-          <a:xfrm>
-            <a:off x="5029200" y="3878280"/>
-            <a:ext cx="3474720" cy="840240"/>
+              <a:t>Interface</a:t>
+            </a:r>
+            <a:endParaRPr lang="en-US" sz="1000" dirty="0"/>
+          </a:p>
+        </p:txBody>
+      </p:sp>
+      <p:sp>
+        <p:nvSpPr>
+          <p:cNvPr id="39" name="Text 31"/>
+          <p:cNvSpPr/>
+          <p:nvPr/>
+        </p:nvSpPr>
+        <p:spPr>
+          <a:xfrm>
+            <a:off x="6144768" y="3749040"/>
+            <a:ext cx="2487168" cy="914400"/>
           </a:xfrm>
           <a:prstGeom prst="rect">
             <a:avLst/>
@@ -10264,51 +10381,23 @@
               <a:buNone/>
             </a:pPr>
             <a:r>
-              <a:rPr lang="fr-FR" sz="1000" b="1" dirty="0">
-                <a:solidFill>
-                  <a:srgbClr val="0C447C"/>
-                </a:solidFill>
-              </a:rPr>
-              <a:t>Pourquoi pas l'API Mistral directement ?</a:t>
-            </a:r>
-          </a:p>
-          <a:p>
-            <a:pPr marL="0" indent="0">
-              <a:buNone/>
-            </a:pPr>
-            <a:r>
-              <a:rPr lang="fr-FR" sz="1000" dirty="0">
-                <a:solidFill>
-                  <a:srgbClr val="185FA5"/>
-                </a:solidFill>
-              </a:rPr>
-              <a:t>LangChain abstrait le fournisseur : migration vers GPT-4 ou Llama sans reecriture de la logique de recherche</a:t>
-            </a:r>
-          </a:p>
-        </p:txBody>
-      </p:sp>
-      <p:sp>
-        <p:nvSpPr>
-          <p:cNvPr id="99" name="Notes"/>
-          <p:cNvSpPr>
-            <a:spLocks noGrp="1"/>
-          </p:cNvSpPr>
-          <p:nvPr>
-            <p:ph type="body" idx="1"/>
-          </p:nvPr>
-        </p:nvSpPr>
-        <p:spPr/>
-        <p:txBody>
-          <a:bodyPr/>
-          <a:lstStyle/>
-          <a:p>
-            <a:r>
-              <a:t>Jeremy demandera specifiquement pourquoi LangChain. Reponse en 3 points : (1) interfaces standardisees = portabilite entre fournisseurs LLM et bases vectorielles, (2) le chain LCEL orchestre recuperation + generation nativement, (3) ecosysteme communautaire maintenu. Le module src/rag/langchain_chain.py est la source unique utilisee par le chatbot Streamlit et le script d'evaluation RAGAS, garantissant que ce qui est mesure correspond exactement a ce que l'utilisateur experimente.</a:t>
-            </a:r>
+              <a:rPr lang="en-US" sz="1000" dirty="0">
+                <a:solidFill>
+                  <a:srgbClr val="5D6D7E"/>
+                </a:solidFill>
+              </a:rPr>
+              <a:t>Interface conversationnelle avec panneau de sources. Chargement unique via @st.cache_resource.</a:t>
+            </a:r>
+            <a:endParaRPr lang="en-US" sz="1000" dirty="0"/>
           </a:p>
         </p:txBody>
       </p:sp>
     </p:spTree>
+    <p:extLst>
+      <p:ext uri="{BB962C8B-B14F-4D97-AF65-F5344CB8AC3E}">
+        <p14:creationId xmlns:p14="http://schemas.microsoft.com/office/powerpoint/2010/main" val="3838102217"/>
+      </p:ext>
+    </p:extLst>
   </p:cSld>
   <p:clrMapOvr>
     <a:masterClrMapping/>
@@ -10317,6 +10406,880 @@
 </file>
 
 <file path=ppt/slides/slide7.xml><?xml version="1.0" encoding="utf-8"?>
+<p:sld xmlns:a="http://schemas.openxmlformats.org/drawingml/2006/main" xmlns:r="http://schemas.openxmlformats.org/officeDocument/2006/relationships" xmlns:p="http://schemas.openxmlformats.org/presentationml/2006/main">
+  <p:cSld>
+    <p:bg>
+      <p:bgPr>
+        <a:solidFill>
+          <a:srgbClr val="FFFFFF"/>
+        </a:solidFill>
+        <a:effectLst/>
+      </p:bgPr>
+    </p:bg>
+    <p:spTree>
+      <p:nvGrpSpPr>
+        <p:cNvPr id="1" name="">
+          <a:extLst>
+            <a:ext uri="{FF2B5EF4-FFF2-40B4-BE49-F238E27FC236}">
+              <a16:creationId xmlns:a16="http://schemas.microsoft.com/office/drawing/2014/main" id="{D998C5A7-B90C-BF60-BF05-B79DD81F0F59}"/>
+            </a:ext>
+          </a:extLst>
+        </p:cNvPr>
+        <p:cNvGrpSpPr/>
+        <p:nvPr/>
+      </p:nvGrpSpPr>
+      <p:grpSpPr>
+        <a:xfrm>
+          <a:off x="0" y="0"/>
+          <a:ext cx="0" cy="0"/>
+          <a:chOff x="0" y="0"/>
+          <a:chExt cx="0" cy="0"/>
+        </a:xfrm>
+      </p:grpSpPr>
+      <p:sp>
+        <p:nvSpPr>
+          <p:cNvPr id="10" name="LeftCard">
+            <a:extLst>
+              <a:ext uri="{FF2B5EF4-FFF2-40B4-BE49-F238E27FC236}">
+                <a16:creationId xmlns:a16="http://schemas.microsoft.com/office/drawing/2014/main" id="{43DBE610-E73E-DF86-165D-18C1A2C4AC0A}"/>
+              </a:ext>
+            </a:extLst>
+          </p:cNvPr>
+          <p:cNvSpPr/>
+          <p:nvPr/>
+        </p:nvSpPr>
+        <p:spPr>
+          <a:xfrm>
+            <a:off x="274320" y="1051560"/>
+            <a:ext cx="4114800" cy="4100400"/>
+          </a:xfrm>
+          <a:prstGeom prst="roundRect">
+            <a:avLst>
+              <a:gd name="adj" fmla="val 8000"/>
+            </a:avLst>
+          </a:prstGeom>
+          <a:solidFill>
+            <a:srgbClr val="F2F6FA"/>
+          </a:solidFill>
+          <a:ln/>
+        </p:spPr>
+      </p:sp>
+      <p:sp>
+        <p:nvSpPr>
+          <p:cNvPr id="11" name="IconCircle">
+            <a:extLst>
+              <a:ext uri="{FF2B5EF4-FFF2-40B4-BE49-F238E27FC236}">
+                <a16:creationId xmlns:a16="http://schemas.microsoft.com/office/drawing/2014/main" id="{E0094B40-7E33-2823-4DC0-671FBA132CC0}"/>
+              </a:ext>
+            </a:extLst>
+          </p:cNvPr>
+          <p:cNvSpPr/>
+          <p:nvPr/>
+        </p:nvSpPr>
+        <p:spPr>
+          <a:xfrm>
+            <a:off x="457200" y="1234440"/>
+            <a:ext cx="548640" cy="548640"/>
+          </a:xfrm>
+          <a:prstGeom prst="ellipse">
+            <a:avLst/>
+          </a:prstGeom>
+          <a:solidFill>
+            <a:srgbClr val="028090"/>
+          </a:solidFill>
+          <a:ln/>
+        </p:spPr>
+      </p:sp>
+      <p:sp>
+        <p:nvSpPr>
+          <p:cNvPr id="12" name="IconText">
+            <a:extLst>
+              <a:ext uri="{FF2B5EF4-FFF2-40B4-BE49-F238E27FC236}">
+                <a16:creationId xmlns:a16="http://schemas.microsoft.com/office/drawing/2014/main" id="{A9E46E7F-EBF8-D9C5-3D50-667E2D6394DF}"/>
+              </a:ext>
+            </a:extLst>
+          </p:cNvPr>
+          <p:cNvSpPr/>
+          <p:nvPr/>
+        </p:nvSpPr>
+        <p:spPr>
+          <a:xfrm>
+            <a:off x="457200" y="1234440"/>
+            <a:ext cx="548640" cy="548640"/>
+          </a:xfrm>
+          <a:prstGeom prst="rect">
+            <a:avLst/>
+          </a:prstGeom>
+          <a:noFill/>
+          <a:ln/>
+        </p:spPr>
+        <p:txBody>
+          <a:bodyPr wrap="square" lIns="0" tIns="0" rIns="0" bIns="0" rtlCol="0" anchor="ctr"/>
+          <a:lstStyle/>
+          <a:p>
+            <a:pPr marL="0" indent="0" algn="ctr">
+              <a:buNone/>
+            </a:pPr>
+            <a:r>
+              <a:rPr lang="fr-FR" sz="1800" b="1" dirty="0">
+                <a:solidFill>
+                  <a:srgbClr val="FFFFFF"/>
+                </a:solidFill>
+              </a:rPr>
+              <a:t>LC</a:t>
+            </a:r>
+          </a:p>
+        </p:txBody>
+      </p:sp>
+      <p:sp>
+        <p:nvSpPr>
+          <p:cNvPr id="13" name="LeftTitle">
+            <a:extLst>
+              <a:ext uri="{FF2B5EF4-FFF2-40B4-BE49-F238E27FC236}">
+                <a16:creationId xmlns:a16="http://schemas.microsoft.com/office/drawing/2014/main" id="{1EDF1D71-FCCC-85AC-22FF-F7DA35759D34}"/>
+              </a:ext>
+            </a:extLst>
+          </p:cNvPr>
+          <p:cNvSpPr/>
+          <p:nvPr/>
+        </p:nvSpPr>
+        <p:spPr>
+          <a:xfrm>
+            <a:off x="1097280" y="1270440"/>
+            <a:ext cx="3200400" cy="400000"/>
+          </a:xfrm>
+          <a:prstGeom prst="rect">
+            <a:avLst/>
+          </a:prstGeom>
+          <a:noFill/>
+          <a:ln/>
+        </p:spPr>
+        <p:txBody>
+          <a:bodyPr wrap="square" rtlCol="0" anchor="ctr"/>
+          <a:lstStyle/>
+          <a:p>
+            <a:pPr marL="0" indent="0">
+              <a:buNone/>
+            </a:pPr>
+            <a:r>
+              <a:rPr lang="fr-FR" sz="1600" b="1" dirty="0">
+                <a:solidFill>
+                  <a:srgbClr val="1F4E79"/>
+                </a:solidFill>
+              </a:rPr>
+              <a:t>LangChain</a:t>
+            </a:r>
+          </a:p>
+        </p:txBody>
+      </p:sp>
+      <p:sp>
+        <p:nvSpPr>
+          <p:cNvPr id="14" name="LeftSub">
+            <a:extLst>
+              <a:ext uri="{FF2B5EF4-FFF2-40B4-BE49-F238E27FC236}">
+                <a16:creationId xmlns:a16="http://schemas.microsoft.com/office/drawing/2014/main" id="{1D181C80-E34F-38E4-F98B-9417524CD486}"/>
+              </a:ext>
+            </a:extLst>
+          </p:cNvPr>
+          <p:cNvSpPr/>
+          <p:nvPr/>
+        </p:nvSpPr>
+        <p:spPr>
+          <a:xfrm>
+            <a:off x="1097280" y="1620000"/>
+            <a:ext cx="3200400" cy="280000"/>
+          </a:xfrm>
+          <a:prstGeom prst="rect">
+            <a:avLst/>
+          </a:prstGeom>
+          <a:noFill/>
+          <a:ln/>
+        </p:spPr>
+        <p:txBody>
+          <a:bodyPr wrap="square" rtlCol="0" anchor="ctr"/>
+          <a:lstStyle/>
+          <a:p>
+            <a:pPr marL="0" indent="0">
+              <a:buNone/>
+            </a:pPr>
+            <a:r>
+              <a:rPr lang="fr-FR" sz="1100" i="1" dirty="0">
+                <a:solidFill>
+                  <a:srgbClr val="5D6D7E"/>
+                </a:solidFill>
+              </a:rPr>
+              <a:t>Framework d'orchestration NLP</a:t>
+            </a:r>
+          </a:p>
+        </p:txBody>
+      </p:sp>
+      <p:sp>
+        <p:nvSpPr>
+          <p:cNvPr id="15" name="LeftBody">
+            <a:extLst>
+              <a:ext uri="{FF2B5EF4-FFF2-40B4-BE49-F238E27FC236}">
+                <a16:creationId xmlns:a16="http://schemas.microsoft.com/office/drawing/2014/main" id="{981ED764-45E7-0B07-0061-DB18727563A2}"/>
+              </a:ext>
+            </a:extLst>
+          </p:cNvPr>
+          <p:cNvSpPr/>
+          <p:nvPr/>
+        </p:nvSpPr>
+        <p:spPr>
+          <a:xfrm>
+            <a:off x="457200" y="2000000"/>
+            <a:ext cx="3840000" cy="3000000"/>
+          </a:xfrm>
+          <a:prstGeom prst="rect">
+            <a:avLst/>
+          </a:prstGeom>
+          <a:noFill/>
+          <a:ln/>
+        </p:spPr>
+        <p:txBody>
+          <a:bodyPr wrap="square" rtlCol="0" anchor="t"/>
+          <a:lstStyle/>
+          <a:p>
+            <a:pPr marL="228600" indent="-228600">
+              <a:buChar char="•"/>
+            </a:pPr>
+            <a:r>
+              <a:rPr lang="fr-FR" sz="1100" dirty="0">
+                <a:solidFill>
+                  <a:srgbClr val="5D6D7E"/>
+                </a:solidFill>
+              </a:rPr>
+              <a:t>Interfaces standardisees pour LLMs et bases vectorielles — changer de fournisseur ne necessite que de modifier une ligne de configuration</a:t>
+            </a:r>
+          </a:p>
+          <a:p>
+            <a:pPr marL="228600" indent="-228600">
+              <a:buChar char="•"/>
+            </a:pPr>
+            <a:r>
+              <a:rPr lang="fr-FR" sz="1100" dirty="0">
+                <a:solidFill>
+                  <a:srgbClr val="5D6D7E"/>
+                </a:solidFill>
+              </a:rPr>
+              <a:t>Chaines RAG preconstruites (RetrievalQA) qui orchestrent recuperation et generation en quelques lignes</a:t>
+            </a:r>
+          </a:p>
+          <a:p>
+            <a:pPr marL="228600" indent="-228600">
+              <a:buChar char="•"/>
+            </a:pPr>
+            <a:r>
+              <a:rPr lang="fr-FR" sz="1100" dirty="0">
+                <a:solidFill>
+                  <a:srgbClr val="5D6D7E"/>
+                </a:solidFill>
+              </a:rPr>
+              <a:t>Vaste ecosysteme de connecteurs pour dizaines de fournisseurs LLM et bases vectorielles</a:t>
+            </a:r>
+          </a:p>
+          <a:p>
+            <a:pPr marL="228600" indent="-228600">
+              <a:buChar char="•"/>
+            </a:pPr>
+            <a:r>
+              <a:rPr lang="fr-FR" sz="1100" dirty="0">
+                <a:solidFill>
+                  <a:srgbClr val="5D6D7E"/>
+                </a:solidFill>
+              </a:rPr>
+              <a:t>Gestion native de l'historique conversationnel pour les versions multi-tours en production</a:t>
+            </a:r>
+          </a:p>
+          <a:p>
+            <a:pPr marL="228600" indent="-228600">
+              <a:buChar char="•"/>
+            </a:pPr>
+            <a:r>
+              <a:rPr lang="fr-FR" sz="1100" dirty="0">
+                <a:solidFill>
+                  <a:srgbClr val="5D6D7E"/>
+                </a:solidFill>
+              </a:rPr>
+              <a:t>Chaine unique et partagee : le meme module alimente le chatbot en direct et l'evaluation RAGAS</a:t>
+            </a:r>
+          </a:p>
+        </p:txBody>
+      </p:sp>
+      <p:sp>
+        <p:nvSpPr>
+          <p:cNvPr id="20" name="RightCard">
+            <a:extLst>
+              <a:ext uri="{FF2B5EF4-FFF2-40B4-BE49-F238E27FC236}">
+                <a16:creationId xmlns:a16="http://schemas.microsoft.com/office/drawing/2014/main" id="{517582AE-CDF5-FEC0-1FBC-525F2DC9721C}"/>
+              </a:ext>
+            </a:extLst>
+          </p:cNvPr>
+          <p:cNvSpPr/>
+          <p:nvPr/>
+        </p:nvSpPr>
+        <p:spPr>
+          <a:xfrm>
+            <a:off x="4754880" y="1051560"/>
+            <a:ext cx="4114800" cy="4100400"/>
+          </a:xfrm>
+          <a:prstGeom prst="roundRect">
+            <a:avLst>
+              <a:gd name="adj" fmla="val 8000"/>
+            </a:avLst>
+          </a:prstGeom>
+          <a:solidFill>
+            <a:srgbClr val="F2F6FA"/>
+          </a:solidFill>
+          <a:ln/>
+        </p:spPr>
+      </p:sp>
+      <p:sp>
+        <p:nvSpPr>
+          <p:cNvPr id="21" name="RightTitle">
+            <a:extLst>
+              <a:ext uri="{FF2B5EF4-FFF2-40B4-BE49-F238E27FC236}">
+                <a16:creationId xmlns:a16="http://schemas.microsoft.com/office/drawing/2014/main" id="{DA85FFBD-83DD-57C5-97ED-5E8FB2163C29}"/>
+              </a:ext>
+            </a:extLst>
+          </p:cNvPr>
+          <p:cNvSpPr/>
+          <p:nvPr/>
+        </p:nvSpPr>
+        <p:spPr>
+          <a:xfrm>
+            <a:off x="5029200" y="1270440"/>
+            <a:ext cx="3657600" cy="400000"/>
+          </a:xfrm>
+          <a:prstGeom prst="rect">
+            <a:avLst/>
+          </a:prstGeom>
+          <a:noFill/>
+          <a:ln/>
+        </p:spPr>
+        <p:txBody>
+          <a:bodyPr wrap="square" rtlCol="0" anchor="ctr"/>
+          <a:lstStyle/>
+          <a:p>
+            <a:pPr marL="0" indent="0">
+              <a:buNone/>
+            </a:pPr>
+            <a:r>
+              <a:rPr lang="fr-FR" sz="1400" b="1" dirty="0">
+                <a:solidFill>
+                  <a:srgbClr val="1F4E79"/>
+                </a:solidFill>
+              </a:rPr>
+              <a:t>Role dans ce projet</a:t>
+            </a:r>
+          </a:p>
+        </p:txBody>
+      </p:sp>
+      <p:sp>
+        <p:nvSpPr>
+          <p:cNvPr id="30" name="BlockA">
+            <a:extLst>
+              <a:ext uri="{FF2B5EF4-FFF2-40B4-BE49-F238E27FC236}">
+                <a16:creationId xmlns:a16="http://schemas.microsoft.com/office/drawing/2014/main" id="{CEAE79EE-71BB-10FF-C5DF-7B34B86193A2}"/>
+              </a:ext>
+            </a:extLst>
+          </p:cNvPr>
+          <p:cNvSpPr/>
+          <p:nvPr/>
+        </p:nvSpPr>
+        <p:spPr>
+          <a:xfrm>
+            <a:off x="4937400" y="1828800"/>
+            <a:ext cx="3657600" cy="914400"/>
+          </a:xfrm>
+          <a:prstGeom prst="roundRect">
+            <a:avLst>
+              <a:gd name="adj" fmla="val 6000"/>
+            </a:avLst>
+          </a:prstGeom>
+          <a:solidFill>
+            <a:srgbClr val="FFFFFF"/>
+          </a:solidFill>
+          <a:ln w="9525">
+            <a:solidFill>
+              <a:srgbClr val="D3D1C7"/>
+            </a:solidFill>
+          </a:ln>
+        </p:spPr>
+      </p:sp>
+      <p:sp>
+        <p:nvSpPr>
+          <p:cNvPr id="31" name="BlockALabel">
+            <a:extLst>
+              <a:ext uri="{FF2B5EF4-FFF2-40B4-BE49-F238E27FC236}">
+                <a16:creationId xmlns:a16="http://schemas.microsoft.com/office/drawing/2014/main" id="{1D71FB57-18A4-E280-FA2A-A4FBF76CE2BC}"/>
+              </a:ext>
+            </a:extLst>
+          </p:cNvPr>
+          <p:cNvSpPr/>
+          <p:nvPr/>
+        </p:nvSpPr>
+        <p:spPr>
+          <a:xfrm>
+            <a:off x="4937400" y="1828800"/>
+            <a:ext cx="548640" cy="914400"/>
+          </a:xfrm>
+          <a:prstGeom prst="roundRect">
+            <a:avLst>
+              <a:gd name="adj" fmla="val 6000"/>
+            </a:avLst>
+          </a:prstGeom>
+          <a:solidFill>
+            <a:srgbClr val="028090"/>
+          </a:solidFill>
+          <a:ln/>
+        </p:spPr>
+      </p:sp>
+      <p:sp>
+        <p:nvSpPr>
+          <p:cNvPr id="32" name="BlockALabelTxt">
+            <a:extLst>
+              <a:ext uri="{FF2B5EF4-FFF2-40B4-BE49-F238E27FC236}">
+                <a16:creationId xmlns:a16="http://schemas.microsoft.com/office/drawing/2014/main" id="{0B47D4B9-4A92-74B4-2509-4E4B197B60C4}"/>
+              </a:ext>
+            </a:extLst>
+          </p:cNvPr>
+          <p:cNvSpPr/>
+          <p:nvPr/>
+        </p:nvSpPr>
+        <p:spPr>
+          <a:xfrm>
+            <a:off x="4937400" y="1828800"/>
+            <a:ext cx="548640" cy="914400"/>
+          </a:xfrm>
+          <a:prstGeom prst="rect">
+            <a:avLst/>
+          </a:prstGeom>
+          <a:noFill/>
+          <a:ln/>
+        </p:spPr>
+        <p:txBody>
+          <a:bodyPr wrap="square" lIns="0" tIns="0" rIns="0" bIns="0" rtlCol="0" anchor="ctr"/>
+          <a:lstStyle/>
+          <a:p>
+            <a:pPr marL="0" indent="0" algn="ctr">
+              <a:buNone/>
+            </a:pPr>
+            <a:r>
+              <a:rPr lang="fr-FR" sz="800" b="1" dirty="0">
+                <a:solidFill>
+                  <a:srgbClr val="FFFFFF"/>
+                </a:solidFill>
+              </a:rPr>
+              <a:t>CHATBOT</a:t>
+            </a:r>
+          </a:p>
+        </p:txBody>
+      </p:sp>
+      <p:sp>
+        <p:nvSpPr>
+          <p:cNvPr id="33" name="BlockAText">
+            <a:extLst>
+              <a:ext uri="{FF2B5EF4-FFF2-40B4-BE49-F238E27FC236}">
+                <a16:creationId xmlns:a16="http://schemas.microsoft.com/office/drawing/2014/main" id="{C879BC36-E181-595A-F7BA-F713F64C4898}"/>
+              </a:ext>
+            </a:extLst>
+          </p:cNvPr>
+          <p:cNvSpPr/>
+          <p:nvPr/>
+        </p:nvSpPr>
+        <p:spPr>
+          <a:xfrm>
+            <a:off x="5577480" y="1865880"/>
+            <a:ext cx="2926200" cy="840240"/>
+          </a:xfrm>
+          <a:prstGeom prst="rect">
+            <a:avLst/>
+          </a:prstGeom>
+          <a:noFill/>
+          <a:ln/>
+        </p:spPr>
+        <p:txBody>
+          <a:bodyPr wrap="square" rtlCol="0" anchor="ctr"/>
+          <a:lstStyle/>
+          <a:p>
+            <a:pPr marL="0" indent="0">
+              <a:buNone/>
+            </a:pPr>
+            <a:r>
+              <a:rPr lang="fr-FR" sz="1100" b="1" dirty="0">
+                <a:solidFill>
+                  <a:srgbClr val="1F4E79"/>
+                </a:solidFill>
+              </a:rPr>
+              <a:t>Chaine LCEL unique</a:t>
+            </a:r>
+          </a:p>
+          <a:p>
+            <a:pPr marL="0" indent="0">
+              <a:buNone/>
+            </a:pPr>
+            <a:r>
+              <a:rPr lang="fr-FR" sz="1000" dirty="0">
+                <a:solidFill>
+                  <a:srgbClr val="5D6D7E"/>
+                </a:solidFill>
+              </a:rPr>
+              <a:t>embed → retrieve → generate — utilisee par le chatbot ET l'evaluation</a:t>
+            </a:r>
+          </a:p>
+        </p:txBody>
+      </p:sp>
+      <p:sp>
+        <p:nvSpPr>
+          <p:cNvPr id="40" name="BlockB">
+            <a:extLst>
+              <a:ext uri="{FF2B5EF4-FFF2-40B4-BE49-F238E27FC236}">
+                <a16:creationId xmlns:a16="http://schemas.microsoft.com/office/drawing/2014/main" id="{70D81573-A3D3-10AC-428A-34A5A76A6AE1}"/>
+              </a:ext>
+            </a:extLst>
+          </p:cNvPr>
+          <p:cNvSpPr/>
+          <p:nvPr/>
+        </p:nvSpPr>
+        <p:spPr>
+          <a:xfrm>
+            <a:off x="4937400" y="2835000"/>
+            <a:ext cx="3657600" cy="914400"/>
+          </a:xfrm>
+          <a:prstGeom prst="roundRect">
+            <a:avLst>
+              <a:gd name="adj" fmla="val 6000"/>
+            </a:avLst>
+          </a:prstGeom>
+          <a:solidFill>
+            <a:srgbClr val="FFFFFF"/>
+          </a:solidFill>
+          <a:ln w="9525">
+            <a:solidFill>
+              <a:srgbClr val="D3D1C7"/>
+            </a:solidFill>
+          </a:ln>
+        </p:spPr>
+      </p:sp>
+      <p:sp>
+        <p:nvSpPr>
+          <p:cNvPr id="41" name="BlockBLabel">
+            <a:extLst>
+              <a:ext uri="{FF2B5EF4-FFF2-40B4-BE49-F238E27FC236}">
+                <a16:creationId xmlns:a16="http://schemas.microsoft.com/office/drawing/2014/main" id="{60C83080-14FF-58E8-4246-A258CD9BB26B}"/>
+              </a:ext>
+            </a:extLst>
+          </p:cNvPr>
+          <p:cNvSpPr/>
+          <p:nvPr/>
+        </p:nvSpPr>
+        <p:spPr>
+          <a:xfrm>
+            <a:off x="4937400" y="2835000"/>
+            <a:ext cx="548640" cy="914400"/>
+          </a:xfrm>
+          <a:prstGeom prst="roundRect">
+            <a:avLst>
+              <a:gd name="adj" fmla="val 6000"/>
+            </a:avLst>
+          </a:prstGeom>
+          <a:solidFill>
+            <a:srgbClr val="2E75B6"/>
+          </a:solidFill>
+          <a:ln/>
+        </p:spPr>
+      </p:sp>
+      <p:sp>
+        <p:nvSpPr>
+          <p:cNvPr id="42" name="BlockBLabelTxt">
+            <a:extLst>
+              <a:ext uri="{FF2B5EF4-FFF2-40B4-BE49-F238E27FC236}">
+                <a16:creationId xmlns:a16="http://schemas.microsoft.com/office/drawing/2014/main" id="{DA1869B8-1BF1-466D-3BF9-B36DB231A6D6}"/>
+              </a:ext>
+            </a:extLst>
+          </p:cNvPr>
+          <p:cNvSpPr/>
+          <p:nvPr/>
+        </p:nvSpPr>
+        <p:spPr>
+          <a:xfrm>
+            <a:off x="4937400" y="2835000"/>
+            <a:ext cx="548640" cy="914400"/>
+          </a:xfrm>
+          <a:prstGeom prst="rect">
+            <a:avLst/>
+          </a:prstGeom>
+          <a:noFill/>
+          <a:ln/>
+        </p:spPr>
+        <p:txBody>
+          <a:bodyPr wrap="square" lIns="0" tIns="0" rIns="0" bIns="0" rtlCol="0" anchor="ctr"/>
+          <a:lstStyle/>
+          <a:p>
+            <a:pPr marL="0" indent="0" algn="ctr">
+              <a:buNone/>
+            </a:pPr>
+            <a:r>
+              <a:rPr lang="fr-FR" sz="650" b="1" dirty="0">
+                <a:solidFill>
+                  <a:srgbClr val="FFFFFF"/>
+                </a:solidFill>
+              </a:rPr>
+              <a:t>EVALUATION</a:t>
+            </a:r>
+          </a:p>
+        </p:txBody>
+      </p:sp>
+      <p:sp>
+        <p:nvSpPr>
+          <p:cNvPr id="43" name="BlockBText">
+            <a:extLst>
+              <a:ext uri="{FF2B5EF4-FFF2-40B4-BE49-F238E27FC236}">
+                <a16:creationId xmlns:a16="http://schemas.microsoft.com/office/drawing/2014/main" id="{50C8EFAF-A294-818B-3A03-B2C29FE18CF2}"/>
+              </a:ext>
+            </a:extLst>
+          </p:cNvPr>
+          <p:cNvSpPr/>
+          <p:nvPr/>
+        </p:nvSpPr>
+        <p:spPr>
+          <a:xfrm>
+            <a:off x="5577480" y="2872080"/>
+            <a:ext cx="2926200" cy="840240"/>
+          </a:xfrm>
+          <a:prstGeom prst="rect">
+            <a:avLst/>
+          </a:prstGeom>
+          <a:noFill/>
+          <a:ln/>
+        </p:spPr>
+        <p:txBody>
+          <a:bodyPr wrap="square" rtlCol="0" anchor="ctr"/>
+          <a:lstStyle/>
+          <a:p>
+            <a:pPr marL="0" indent="0">
+              <a:buNone/>
+            </a:pPr>
+            <a:r>
+              <a:rPr lang="fr-FR" sz="1100" b="1" dirty="0">
+                <a:solidFill>
+                  <a:srgbClr val="1F4E79"/>
+                </a:solidFill>
+              </a:rPr>
+              <a:t>Meme chaine RAGAS</a:t>
+            </a:r>
+          </a:p>
+          <a:p>
+            <a:pPr marL="0" indent="0">
+              <a:buNone/>
+            </a:pPr>
+            <a:r>
+              <a:rPr lang="fr-FR" sz="1000" dirty="0">
+                <a:solidFill>
+                  <a:srgbClr val="5D6D7E"/>
+                </a:solidFill>
+              </a:rPr>
+              <a:t>30 questions annotees evaluees sur la chaine exacte du chatbot</a:t>
+            </a:r>
+          </a:p>
+        </p:txBody>
+      </p:sp>
+      <p:sp>
+        <p:nvSpPr>
+          <p:cNvPr id="50" name="BlockC">
+            <a:extLst>
+              <a:ext uri="{FF2B5EF4-FFF2-40B4-BE49-F238E27FC236}">
+                <a16:creationId xmlns:a16="http://schemas.microsoft.com/office/drawing/2014/main" id="{D6C6C839-926D-09A2-95F0-DC8468F08A95}"/>
+              </a:ext>
+            </a:extLst>
+          </p:cNvPr>
+          <p:cNvSpPr/>
+          <p:nvPr/>
+        </p:nvSpPr>
+        <p:spPr>
+          <a:xfrm>
+            <a:off x="4937400" y="3841200"/>
+            <a:ext cx="3657600" cy="914400"/>
+          </a:xfrm>
+          <a:prstGeom prst="roundRect">
+            <a:avLst>
+              <a:gd name="adj" fmla="val 6000"/>
+            </a:avLst>
+          </a:prstGeom>
+          <a:solidFill>
+            <a:srgbClr val="EBF3FB"/>
+          </a:solidFill>
+          <a:ln w="9525">
+            <a:solidFill>
+              <a:srgbClr val="185FA5"/>
+            </a:solidFill>
+          </a:ln>
+        </p:spPr>
+      </p:sp>
+      <p:sp>
+        <p:nvSpPr>
+          <p:cNvPr id="51" name="BlockCText">
+            <a:extLst>
+              <a:ext uri="{FF2B5EF4-FFF2-40B4-BE49-F238E27FC236}">
+                <a16:creationId xmlns:a16="http://schemas.microsoft.com/office/drawing/2014/main" id="{A8B500F9-5223-6410-04AD-9F2928622A17}"/>
+              </a:ext>
+            </a:extLst>
+          </p:cNvPr>
+          <p:cNvSpPr/>
+          <p:nvPr/>
+        </p:nvSpPr>
+        <p:spPr>
+          <a:xfrm>
+            <a:off x="5029200" y="3878280"/>
+            <a:ext cx="3474720" cy="840240"/>
+          </a:xfrm>
+          <a:prstGeom prst="rect">
+            <a:avLst/>
+          </a:prstGeom>
+          <a:noFill/>
+          <a:ln/>
+        </p:spPr>
+        <p:txBody>
+          <a:bodyPr wrap="square" rtlCol="0" anchor="ctr"/>
+          <a:lstStyle/>
+          <a:p>
+            <a:pPr marL="0" indent="0">
+              <a:buNone/>
+            </a:pPr>
+            <a:r>
+              <a:rPr lang="fr-FR" sz="1000" b="1" dirty="0">
+                <a:solidFill>
+                  <a:srgbClr val="0C447C"/>
+                </a:solidFill>
+              </a:rPr>
+              <a:t>Pourquoi pas l'API Mistral directement ?</a:t>
+            </a:r>
+          </a:p>
+          <a:p>
+            <a:pPr marL="0" indent="0">
+              <a:buNone/>
+            </a:pPr>
+            <a:r>
+              <a:rPr lang="fr-FR" sz="1000" dirty="0">
+                <a:solidFill>
+                  <a:srgbClr val="185FA5"/>
+                </a:solidFill>
+              </a:rPr>
+              <a:t>LangChain abstrait le fournisseur : migration vers GPT-4 ou Llama sans reecriture de la logique de recherche</a:t>
+            </a:r>
+          </a:p>
+        </p:txBody>
+      </p:sp>
+      <p:sp>
+        <p:nvSpPr>
+          <p:cNvPr id="99" name="Notes">
+            <a:extLst>
+              <a:ext uri="{FF2B5EF4-FFF2-40B4-BE49-F238E27FC236}">
+                <a16:creationId xmlns:a16="http://schemas.microsoft.com/office/drawing/2014/main" id="{A72D2951-C07F-9F1F-B1EA-89BE80623890}"/>
+              </a:ext>
+            </a:extLst>
+          </p:cNvPr>
+          <p:cNvSpPr>
+            <a:spLocks noGrp="1"/>
+          </p:cNvSpPr>
+          <p:nvPr>
+            <p:ph type="body" idx="1"/>
+          </p:nvPr>
+        </p:nvSpPr>
+        <p:spPr/>
+        <p:txBody>
+          <a:bodyPr>
+            <a:normAutofit fontScale="25000" lnSpcReduction="20000"/>
+          </a:bodyPr>
+          <a:lstStyle/>
+          <a:p>
+            <a:endParaRPr dirty="0"/>
+          </a:p>
+        </p:txBody>
+      </p:sp>
+      <p:sp>
+        <p:nvSpPr>
+          <p:cNvPr id="4" name="Header">
+            <a:extLst>
+              <a:ext uri="{FF2B5EF4-FFF2-40B4-BE49-F238E27FC236}">
+                <a16:creationId xmlns:a16="http://schemas.microsoft.com/office/drawing/2014/main" id="{8510CF28-1EFC-A4F8-0647-9E18F7270250}"/>
+              </a:ext>
+            </a:extLst>
+          </p:cNvPr>
+          <p:cNvSpPr/>
+          <p:nvPr/>
+        </p:nvSpPr>
+        <p:spPr>
+          <a:xfrm>
+            <a:off x="0" y="-11839"/>
+            <a:ext cx="9144000" cy="914400"/>
+          </a:xfrm>
+          <a:prstGeom prst="rect">
+            <a:avLst/>
+          </a:prstGeom>
+          <a:solidFill>
+            <a:srgbClr val="1F4E79"/>
+          </a:solidFill>
+          <a:ln/>
+        </p:spPr>
+      </p:sp>
+      <p:sp>
+        <p:nvSpPr>
+          <p:cNvPr id="7" name="TextBox 6">
+            <a:extLst>
+              <a:ext uri="{FF2B5EF4-FFF2-40B4-BE49-F238E27FC236}">
+                <a16:creationId xmlns:a16="http://schemas.microsoft.com/office/drawing/2014/main" id="{B5E5E7B1-E631-9AB4-BE26-7BB71CFE04C0}"/>
+              </a:ext>
+            </a:extLst>
+          </p:cNvPr>
+          <p:cNvSpPr txBox="1"/>
+          <p:nvPr/>
+        </p:nvSpPr>
+        <p:spPr>
+          <a:xfrm>
+            <a:off x="75252" y="173504"/>
+            <a:ext cx="7612088" cy="369332"/>
+          </a:xfrm>
+          <a:prstGeom prst="rect">
+            <a:avLst/>
+          </a:prstGeom>
+          <a:noFill/>
+        </p:spPr>
+        <p:txBody>
+          <a:bodyPr wrap="square">
+            <a:spAutoFit/>
+          </a:bodyPr>
+          <a:lstStyle/>
+          <a:p>
+            <a:pPr marL="0" indent="0">
+              <a:buNone/>
+            </a:pPr>
+            <a:r>
+              <a:rPr lang="fr-FR" sz="1800" b="1" dirty="0">
+                <a:solidFill>
+                  <a:srgbClr val="FFFFFF"/>
+                </a:solidFill>
+              </a:rPr>
+              <a:t>POURQUOI LANGCHAIN  |  ORCHESTRATION DU PIPELINE RAG</a:t>
+            </a:r>
+          </a:p>
+        </p:txBody>
+      </p:sp>
+    </p:spTree>
+    <p:extLst>
+      <p:ext uri="{BB962C8B-B14F-4D97-AF65-F5344CB8AC3E}">
+        <p14:creationId xmlns:p14="http://schemas.microsoft.com/office/powerpoint/2010/main" val="1602728807"/>
+      </p:ext>
+    </p:extLst>
+  </p:cSld>
+  <p:clrMapOvr>
+    <a:masterClrMapping/>
+  </p:clrMapOvr>
+</p:sld>
+</file>
+
+<file path=ppt/slides/slide8.xml><?xml version="1.0" encoding="utf-8"?>
 <p:sld xmlns:a="http://schemas.openxmlformats.org/drawingml/2006/main" xmlns:r="http://schemas.openxmlformats.org/officeDocument/2006/relationships" xmlns:p="http://schemas.openxmlformats.org/presentationml/2006/main">
   <p:cSld name="Slide 6">
     <p:bg>
@@ -10553,7 +11516,7 @@
 </p:sld>
 </file>
 
-<file path=ppt/slides/slide8.xml><?xml version="1.0" encoding="utf-8"?>
+<file path=ppt/slides/slide9.xml><?xml version="1.0" encoding="utf-8"?>
 <p:sld xmlns:a="http://schemas.openxmlformats.org/drawingml/2006/main" xmlns:r="http://schemas.openxmlformats.org/officeDocument/2006/relationships" xmlns:p="http://schemas.openxmlformats.org/presentationml/2006/main">
   <p:cSld name="Slide 7">
     <p:bg>
@@ -11555,588 +12518,6 @@
               <a:t>Distance L2 &lt; 0,50 = pertinent  |  Distance L2 &gt; 0,60 = hors perimetre detecte</a:t>
             </a:r>
             <a:endParaRPr lang="en-US" sz="1000" dirty="0"/>
-          </a:p>
-        </p:txBody>
-      </p:sp>
-    </p:spTree>
-  </p:cSld>
-  <p:clrMapOvr>
-    <a:masterClrMapping/>
-  </p:clrMapOvr>
-</p:sld>
-</file>
-
-<file path=ppt/slides/slide9.xml><?xml version="1.0" encoding="utf-8"?>
-<p:sld xmlns:a="http://schemas.openxmlformats.org/drawingml/2006/main" xmlns:r="http://schemas.openxmlformats.org/officeDocument/2006/relationships" xmlns:p="http://schemas.openxmlformats.org/presentationml/2006/main">
-  <p:cSld name="Slide 8">
-    <p:bg>
-      <p:bgPr>
-        <a:solidFill>
-          <a:srgbClr val="1F4E79"/>
-        </a:solidFill>
-        <a:effectLst/>
-      </p:bgPr>
-    </p:bg>
-    <p:spTree>
-      <p:nvGrpSpPr>
-        <p:cNvPr id="1" name=""/>
-        <p:cNvGrpSpPr/>
-        <p:nvPr/>
-      </p:nvGrpSpPr>
-      <p:grpSpPr>
-        <a:xfrm>
-          <a:off x="0" y="0"/>
-          <a:ext cx="0" cy="0"/>
-          <a:chOff x="0" y="0"/>
-          <a:chExt cx="0" cy="0"/>
-        </a:xfrm>
-      </p:grpSpPr>
-      <p:sp>
-        <p:nvSpPr>
-          <p:cNvPr id="2" name="Shape 0"/>
-          <p:cNvSpPr/>
-          <p:nvPr/>
-        </p:nvSpPr>
-        <p:spPr>
-          <a:xfrm>
-            <a:off x="0" y="0"/>
-            <a:ext cx="9144000" cy="5143500"/>
-          </a:xfrm>
-          <a:prstGeom prst="rect">
-            <a:avLst/>
-          </a:prstGeom>
-          <a:solidFill>
-            <a:srgbClr val="1F4E79"/>
-          </a:solidFill>
-          <a:ln/>
-        </p:spPr>
-      </p:sp>
-      <p:sp>
-        <p:nvSpPr>
-          <p:cNvPr id="3" name="Text 1"/>
-          <p:cNvSpPr/>
-          <p:nvPr/>
-        </p:nvSpPr>
-        <p:spPr>
-          <a:xfrm>
-            <a:off x="457200" y="457200"/>
-            <a:ext cx="8229600" cy="640080"/>
-          </a:xfrm>
-          <a:prstGeom prst="rect">
-            <a:avLst/>
-          </a:prstGeom>
-          <a:noFill/>
-          <a:ln/>
-        </p:spPr>
-        <p:txBody>
-          <a:bodyPr wrap="square" rtlCol="0" anchor="ctr"/>
-          <a:lstStyle/>
-          <a:p>
-            <a:pPr marL="0" indent="0" algn="ctr">
-              <a:buNone/>
-            </a:pPr>
-            <a:r>
-              <a:rPr lang="en-US" sz="1300" b="1" kern="0" spc="400" dirty="0">
-                <a:solidFill>
-                  <a:srgbClr val="F39C12"/>
-                </a:solidFill>
-              </a:rPr>
-              <a:t>DEMONSTRATION EN DIRECT</a:t>
-            </a:r>
-            <a:endParaRPr lang="en-US" sz="1300" dirty="0"/>
-          </a:p>
-        </p:txBody>
-      </p:sp>
-      <p:sp>
-        <p:nvSpPr>
-          <p:cNvPr id="4" name="Shape 2"/>
-          <p:cNvSpPr/>
-          <p:nvPr/>
-        </p:nvSpPr>
-        <p:spPr>
-          <a:xfrm>
-            <a:off x="2286000" y="1188720"/>
-            <a:ext cx="6583680" cy="3749040"/>
-          </a:xfrm>
-          <a:prstGeom prst="roundRect">
-            <a:avLst>
-              <a:gd name="adj" fmla="val 3659"/>
-            </a:avLst>
-          </a:prstGeom>
-          <a:solidFill>
-            <a:srgbClr val="FFFFFF"/>
-          </a:solidFill>
-          <a:ln/>
-          <a:effectLst>
-            <a:outerShdw blurRad="101600" dist="38100" dir="2700000" algn="bl" rotWithShape="0">
-              <a:srgbClr val="000000">
-                <a:alpha val="12000"/>
-              </a:srgbClr>
-            </a:outerShdw>
-          </a:effectLst>
-        </p:spPr>
-      </p:sp>
-      <p:sp>
-        <p:nvSpPr>
-          <p:cNvPr id="5" name="Shape 3"/>
-          <p:cNvSpPr/>
-          <p:nvPr/>
-        </p:nvSpPr>
-        <p:spPr>
-          <a:xfrm>
-            <a:off x="2286000" y="1188720"/>
-            <a:ext cx="6583680" cy="502920"/>
-          </a:xfrm>
-          <a:prstGeom prst="roundRect">
-            <a:avLst>
-              <a:gd name="adj" fmla="val 14545"/>
-            </a:avLst>
-          </a:prstGeom>
-          <a:solidFill>
-            <a:srgbClr val="2E75B6"/>
-          </a:solidFill>
-          <a:ln/>
-        </p:spPr>
-      </p:sp>
-      <p:sp>
-        <p:nvSpPr>
-          <p:cNvPr id="6" name="Text 4"/>
-          <p:cNvSpPr/>
-          <p:nvPr/>
-        </p:nvSpPr>
-        <p:spPr>
-          <a:xfrm>
-            <a:off x="2468880" y="1188720"/>
-            <a:ext cx="6400800" cy="502920"/>
-          </a:xfrm>
-          <a:prstGeom prst="rect">
-            <a:avLst/>
-          </a:prstGeom>
-          <a:noFill/>
-          <a:ln/>
-        </p:spPr>
-        <p:txBody>
-          <a:bodyPr wrap="square" rtlCol="0" anchor="ctr"/>
-          <a:lstStyle/>
-          <a:p>
-            <a:pPr marL="0" indent="0">
-              <a:buNone/>
-            </a:pPr>
-            <a:r>
-              <a:rPr lang="en-US" sz="1100" b="1" dirty="0">
-                <a:solidFill>
-                  <a:srgbClr val="FFFFFF"/>
-                </a:solidFill>
-              </a:rPr>
-              <a:t>Puls-Events  |  Assistant Culturel Paris</a:t>
-            </a:r>
-            <a:endParaRPr lang="en-US" sz="1100" dirty="0"/>
-          </a:p>
-        </p:txBody>
-      </p:sp>
-      <p:sp>
-        <p:nvSpPr>
-          <p:cNvPr id="7" name="Shape 5"/>
-          <p:cNvSpPr/>
-          <p:nvPr/>
-        </p:nvSpPr>
-        <p:spPr>
-          <a:xfrm>
-            <a:off x="5029200" y="1920240"/>
-            <a:ext cx="3566160" cy="502920"/>
-          </a:xfrm>
-          <a:prstGeom prst="roundRect">
-            <a:avLst>
-              <a:gd name="adj" fmla="val 18182"/>
-            </a:avLst>
-          </a:prstGeom>
-          <a:solidFill>
-            <a:srgbClr val="2E75B6"/>
-          </a:solidFill>
-          <a:ln/>
-        </p:spPr>
-      </p:sp>
-      <p:sp>
-        <p:nvSpPr>
-          <p:cNvPr id="8" name="Text 6"/>
-          <p:cNvSpPr/>
-          <p:nvPr/>
-        </p:nvSpPr>
-        <p:spPr>
-          <a:xfrm>
-            <a:off x="5120640" y="1920240"/>
-            <a:ext cx="3383280" cy="502920"/>
-          </a:xfrm>
-          <a:prstGeom prst="rect">
-            <a:avLst/>
-          </a:prstGeom>
-          <a:noFill/>
-          <a:ln/>
-        </p:spPr>
-        <p:txBody>
-          <a:bodyPr wrap="square" rtlCol="0" anchor="ctr"/>
-          <a:lstStyle/>
-          <a:p>
-            <a:pPr marL="0" indent="0">
-              <a:buNone/>
-            </a:pPr>
-            <a:r>
-              <a:rPr lang="en-US" sz="1000" dirty="0">
-                <a:solidFill>
-                  <a:srgbClr val="FFFFFF"/>
-                </a:solidFill>
-              </a:rPr>
-              <a:t>Quels concerts classiques ce mois ?</a:t>
-            </a:r>
-            <a:endParaRPr lang="en-US" sz="1000" dirty="0"/>
-          </a:p>
-        </p:txBody>
-      </p:sp>
-      <p:sp>
-        <p:nvSpPr>
-          <p:cNvPr id="9" name="Shape 7"/>
-          <p:cNvSpPr/>
-          <p:nvPr/>
-        </p:nvSpPr>
-        <p:spPr>
-          <a:xfrm>
-            <a:off x="2468880" y="2606040"/>
-            <a:ext cx="4389120" cy="2103120"/>
-          </a:xfrm>
-          <a:prstGeom prst="roundRect">
-            <a:avLst>
-              <a:gd name="adj" fmla="val 4348"/>
-            </a:avLst>
-          </a:prstGeom>
-          <a:solidFill>
-            <a:srgbClr val="F2F6FA"/>
-          </a:solidFill>
-          <a:ln/>
-        </p:spPr>
-      </p:sp>
-      <p:sp>
-        <p:nvSpPr>
-          <p:cNvPr id="10" name="Text 8"/>
-          <p:cNvSpPr/>
-          <p:nvPr/>
-        </p:nvSpPr>
-        <p:spPr>
-          <a:xfrm>
-            <a:off x="2651760" y="2697480"/>
-            <a:ext cx="4023360" cy="1920240"/>
-          </a:xfrm>
-          <a:prstGeom prst="rect">
-            <a:avLst/>
-          </a:prstGeom>
-          <a:noFill/>
-          <a:ln/>
-        </p:spPr>
-        <p:txBody>
-          <a:bodyPr wrap="square" rtlCol="0" anchor="ctr"/>
-          <a:lstStyle/>
-          <a:p>
-            <a:pPr marL="0" indent="0">
-              <a:buNone/>
-            </a:pPr>
-            <a:r>
-              <a:rPr lang="en-US" sz="1000" b="1" dirty="0">
-                <a:solidFill>
-                  <a:srgbClr val="1A252F"/>
-                </a:solidFill>
-              </a:rPr>
-              <a:t>Voici les concerts disponibles :</a:t>
-            </a:r>
-            <a:endParaRPr lang="en-US" sz="1000" dirty="0"/>
-          </a:p>
-          <a:p>
-            <a:pPr marL="0" indent="0">
-              <a:buNone/>
-            </a:pPr>
-            <a:r>
-              <a:rPr lang="en-US" sz="1000" dirty="0">
-                <a:solidFill>
-                  <a:srgbClr val="1A252F"/>
-                </a:solidFill>
-              </a:rPr>
-              <a:t> </a:t>
-            </a:r>
-            <a:endParaRPr lang="en-US" sz="1000" dirty="0"/>
-          </a:p>
-          <a:p>
-            <a:pPr marL="0" indent="0">
-              <a:buNone/>
-            </a:pPr>
-            <a:r>
-              <a:rPr lang="en-US" sz="1000" b="1" dirty="0">
-                <a:solidFill>
-                  <a:srgbClr val="1A252F"/>
-                </a:solidFill>
-              </a:rPr>
-              <a:t>1. Les 4 Saisons de Vivaldi</a:t>
-            </a:r>
-            <a:endParaRPr lang="en-US" sz="1000" dirty="0"/>
-          </a:p>
-          <a:p>
-            <a:pPr marL="0" indent="0">
-              <a:buNone/>
-            </a:pPr>
-            <a:r>
-              <a:rPr lang="en-US" sz="1000" dirty="0">
-                <a:solidFill>
-                  <a:srgbClr val="1A252F"/>
-                </a:solidFill>
-              </a:rPr>
-              <a:t>   Mercredi 11 mars, 20h00</a:t>
-            </a:r>
-            <a:endParaRPr lang="en-US" sz="1000" dirty="0"/>
-          </a:p>
-          <a:p>
-            <a:pPr marL="0" indent="0">
-              <a:buNone/>
-            </a:pPr>
-            <a:r>
-              <a:rPr lang="en-US" sz="1000" dirty="0">
-                <a:solidFill>
-                  <a:srgbClr val="1A252F"/>
-                </a:solidFill>
-              </a:rPr>
-              <a:t>   Eglise de La Madeleine, Paris</a:t>
-            </a:r>
-            <a:endParaRPr lang="en-US" sz="1000" dirty="0"/>
-          </a:p>
-          <a:p>
-            <a:pPr marL="0" indent="0">
-              <a:buNone/>
-            </a:pPr>
-            <a:r>
-              <a:rPr lang="en-US" sz="1000" dirty="0">
-                <a:solidFill>
-                  <a:srgbClr val="1A252F"/>
-                </a:solidFill>
-              </a:rPr>
-              <a:t> </a:t>
-            </a:r>
-            <a:endParaRPr lang="en-US" sz="1000" dirty="0"/>
-          </a:p>
-          <a:p>
-            <a:pPr marL="0" indent="0">
-              <a:buNone/>
-            </a:pPr>
-            <a:r>
-              <a:rPr lang="en-US" sz="1000" b="1" dirty="0">
-                <a:solidFill>
-                  <a:srgbClr val="1A252F"/>
-                </a:solidFill>
-              </a:rPr>
-              <a:t>2. Concert Aria Baroque</a:t>
-            </a:r>
-            <a:endParaRPr lang="en-US" sz="1000" dirty="0"/>
-          </a:p>
-          <a:p>
-            <a:pPr marL="0" indent="0">
-              <a:buNone/>
-            </a:pPr>
-            <a:r>
-              <a:rPr lang="en-US" sz="1000" dirty="0">
-                <a:solidFill>
-                  <a:srgbClr val="1A252F"/>
-                </a:solidFill>
-              </a:rPr>
-              <a:t>   Samedi 14 mars, 16h00</a:t>
-            </a:r>
-            <a:endParaRPr lang="en-US" sz="1000" dirty="0"/>
-          </a:p>
-          <a:p>
-            <a:pPr marL="0" indent="0">
-              <a:buNone/>
-            </a:pPr>
-            <a:r>
-              <a:rPr lang="en-US" sz="1000" dirty="0">
-                <a:solidFill>
-                  <a:srgbClr val="1A252F"/>
-                </a:solidFill>
-              </a:rPr>
-              <a:t>   Eglise Sainte-Elisabeth de Hongrie</a:t>
-            </a:r>
-            <a:endParaRPr lang="en-US" sz="1000" dirty="0"/>
-          </a:p>
-        </p:txBody>
-      </p:sp>
-      <p:sp>
-        <p:nvSpPr>
-          <p:cNvPr id="11" name="Shape 9"/>
-          <p:cNvSpPr/>
-          <p:nvPr/>
-        </p:nvSpPr>
-        <p:spPr>
-          <a:xfrm>
-            <a:off x="274320" y="1188720"/>
-            <a:ext cx="1828800" cy="3749040"/>
-          </a:xfrm>
-          <a:prstGeom prst="roundRect">
-            <a:avLst>
-              <a:gd name="adj" fmla="val 5000"/>
-            </a:avLst>
-          </a:prstGeom>
-          <a:solidFill>
-            <a:srgbClr val="1A252F"/>
-          </a:solidFill>
-          <a:ln/>
-        </p:spPr>
-      </p:sp>
-      <p:sp>
-        <p:nvSpPr>
-          <p:cNvPr id="12" name="Text 10"/>
-          <p:cNvSpPr/>
-          <p:nvPr/>
-        </p:nvSpPr>
-        <p:spPr>
-          <a:xfrm>
-            <a:off x="365760" y="1280160"/>
-            <a:ext cx="1645920" cy="365760"/>
-          </a:xfrm>
-          <a:prstGeom prst="rect">
-            <a:avLst/>
-          </a:prstGeom>
-          <a:noFill/>
-          <a:ln/>
-        </p:spPr>
-        <p:txBody>
-          <a:bodyPr wrap="square" rtlCol="0" anchor="ctr"/>
-          <a:lstStyle/>
-          <a:p>
-            <a:pPr marL="0" indent="0" algn="ctr">
-              <a:buNone/>
-            </a:pPr>
-            <a:r>
-              <a:rPr lang="en-US" sz="1100" b="1" dirty="0">
-                <a:solidFill>
-                  <a:srgbClr val="F39C12"/>
-                </a:solidFill>
-              </a:rPr>
-              <a:t>Sources</a:t>
-            </a:r>
-            <a:endParaRPr lang="en-US" sz="1100" dirty="0"/>
-          </a:p>
-        </p:txBody>
-      </p:sp>
-      <p:sp>
-        <p:nvSpPr>
-          <p:cNvPr id="13" name="Text 11"/>
-          <p:cNvSpPr/>
-          <p:nvPr/>
-        </p:nvSpPr>
-        <p:spPr>
-          <a:xfrm>
-            <a:off x="365760" y="1691640"/>
-            <a:ext cx="1645920" cy="3108960"/>
-          </a:xfrm>
-          <a:prstGeom prst="rect">
-            <a:avLst/>
-          </a:prstGeom>
-          <a:noFill/>
-          <a:ln/>
-        </p:spPr>
-        <p:txBody>
-          <a:bodyPr wrap="square" rtlCol="0" anchor="ctr"/>
-          <a:lstStyle/>
-          <a:p>
-            <a:pPr marL="0" indent="0">
-              <a:buNone/>
-            </a:pPr>
-            <a:r>
-              <a:rPr lang="en-US" sz="900" dirty="0">
-                <a:solidFill>
-                  <a:srgbClr val="CADCFC"/>
-                </a:solidFill>
-              </a:rPr>
-              <a:t>1. Les 4 Saisons...</a:t>
-            </a:r>
-            <a:endParaRPr lang="en-US" sz="900" dirty="0"/>
-          </a:p>
-          <a:p>
-            <a:pPr marL="0" indent="0">
-              <a:buNone/>
-            </a:pPr>
-            <a:r>
-              <a:rPr lang="en-US" sz="900" dirty="0">
-                <a:solidFill>
-                  <a:srgbClr val="CADCFC"/>
-                </a:solidFill>
-              </a:rPr>
-              <a:t>11 mars, 20h00</a:t>
-            </a:r>
-            <a:endParaRPr lang="en-US" sz="900" dirty="0"/>
-          </a:p>
-          <a:p>
-            <a:pPr marL="0" indent="0">
-              <a:buNone/>
-            </a:pPr>
-            <a:r>
-              <a:rPr lang="en-US" sz="900" dirty="0">
-                <a:solidFill>
-                  <a:srgbClr val="CADCFC"/>
-                </a:solidFill>
-              </a:rPr>
-              <a:t>La Madeleine</a:t>
-            </a:r>
-            <a:endParaRPr lang="en-US" sz="900" dirty="0"/>
-          </a:p>
-          <a:p>
-            <a:pPr marL="0" indent="0">
-              <a:buNone/>
-            </a:pPr>
-            <a:r>
-              <a:rPr lang="en-US" sz="900" dirty="0">
-                <a:solidFill>
-                  <a:srgbClr val="CADCFC"/>
-                </a:solidFill>
-              </a:rPr>
-              <a:t> </a:t>
-            </a:r>
-            <a:endParaRPr lang="en-US" sz="900" dirty="0"/>
-          </a:p>
-          <a:p>
-            <a:pPr marL="0" indent="0">
-              <a:buNone/>
-            </a:pPr>
-            <a:r>
-              <a:rPr lang="en-US" sz="900" dirty="0">
-                <a:solidFill>
-                  <a:srgbClr val="CADCFC"/>
-                </a:solidFill>
-              </a:rPr>
-              <a:t>2. Concert Aria...</a:t>
-            </a:r>
-            <a:endParaRPr lang="en-US" sz="900" dirty="0"/>
-          </a:p>
-          <a:p>
-            <a:pPr marL="0" indent="0">
-              <a:buNone/>
-            </a:pPr>
-            <a:r>
-              <a:rPr lang="en-US" sz="900" dirty="0">
-                <a:solidFill>
-                  <a:srgbClr val="CADCFC"/>
-                </a:solidFill>
-              </a:rPr>
-              <a:t>14 mars, 16h00</a:t>
-            </a:r>
-            <a:endParaRPr lang="en-US" sz="900" dirty="0"/>
-          </a:p>
-          <a:p>
-            <a:pPr marL="0" indent="0">
-              <a:buNone/>
-            </a:pPr>
-            <a:r>
-              <a:rPr lang="en-US" sz="900" dirty="0">
-                <a:solidFill>
-                  <a:srgbClr val="CADCFC"/>
-                </a:solidFill>
-              </a:rPr>
-              <a:t>Ste-Elisabeth</a:t>
-            </a:r>
-            <a:endParaRPr lang="en-US" sz="900" dirty="0"/>
           </a:p>
         </p:txBody>
       </p:sp>
